--- a/plugins/gradient-cio/assets/examples/gradient-odd-ddq-reconcile.pptx
+++ b/plugins/gradient-cio/assets/examples/gradient-odd-ddq-reconcile.pptx
@@ -3210,7 +3210,7 @@
         </p:nvSpPr>
         <p:spPr>
           <a:xfrm>
-            <a:off x="685800" y="1828800"/>
+            <a:off x="685800" y="1664208"/>
             <a:ext cx="9966960" cy="274320"/>
           </a:xfrm>
           <a:prstGeom prst="rect">
@@ -3228,7 +3228,7 @@
               <a:spcAft>
                 <a:spcPts val="0"/>
               </a:spcAft>
-              <a:defRPr sz="900" b="1">
+              <a:defRPr sz="850" b="1">
                 <a:solidFill>
                   <a:srgbClr val="C6F432"/>
                 </a:solidFill>
@@ -3252,7 +3252,7 @@
         </p:nvSpPr>
         <p:spPr>
           <a:xfrm>
-            <a:off x="685800" y="2176272"/>
+            <a:off x="685800" y="2011680"/>
             <a:ext cx="9966960" cy="1234440"/>
           </a:xfrm>
           <a:prstGeom prst="rect">
@@ -3270,7 +3270,7 @@
               <a:spcAft>
                 <a:spcPts val="0"/>
               </a:spcAft>
-              <a:defRPr sz="3400" b="1">
+              <a:defRPr sz="3300" b="1">
                 <a:solidFill>
                   <a:srgbClr val="FFFFFF"/>
                 </a:solidFill>
@@ -3281,7 +3281,7 @@
               <a:rPr>
                 <a:latin typeface="Inter"/>
               </a:rPr>
-              <a:t>Ridgeview Example Advisors, LP (TEST)</a:t>
+              <a:t>Ridgeview Advisors, LP</a:t>
             </a:r>
           </a:p>
         </p:txBody>
@@ -3294,8 +3294,8 @@
         </p:nvSpPr>
         <p:spPr>
           <a:xfrm>
-            <a:off x="685800" y="3456432"/>
-            <a:ext cx="9692640" cy="640080"/>
+            <a:off x="685800" y="3273552"/>
+            <a:ext cx="9692640" cy="594360"/>
           </a:xfrm>
           <a:prstGeom prst="rect">
             <a:avLst/>
@@ -3312,7 +3312,7 @@
               <a:spcAft>
                 <a:spcPts val="0"/>
               </a:spcAft>
-              <a:defRPr sz="1500" b="0">
+              <a:defRPr sz="1400" b="0">
                 <a:solidFill>
                   <a:srgbClr val="9AA5B1"/>
                 </a:solidFill>
@@ -3323,7 +3323,7 @@
               <a:rPr>
                 <a:latin typeface="Inter"/>
               </a:rPr>
-              <a:t>Synthetic test DDQ · Global Macro Fund III, Ltd. · CRD 999901 · Example City, ST</a:t>
+              <a:t>DDQ reconciliation · Global Macro Fund III · Form ADV cross-check</a:t>
             </a:r>
           </a:p>
         </p:txBody>
@@ -3336,8 +3336,8 @@
         </p:nvSpPr>
         <p:spPr>
           <a:xfrm>
-            <a:off x="685800" y="4251960"/>
-            <a:ext cx="1005840" cy="54864"/>
+            <a:off x="685800" y="4005072"/>
+            <a:ext cx="822960" cy="45720"/>
           </a:xfrm>
           <a:prstGeom prst="rect">
             <a:avLst/>
@@ -3385,8 +3385,8 @@
         </p:nvSpPr>
         <p:spPr>
           <a:xfrm>
-            <a:off x="685800" y="4572000"/>
-            <a:ext cx="3063240" cy="182880"/>
+            <a:off x="685800" y="4315968"/>
+            <a:ext cx="4709160" cy="182880"/>
           </a:xfrm>
           <a:prstGeom prst="rect">
             <a:avLst/>
@@ -3427,8 +3427,8 @@
         </p:nvSpPr>
         <p:spPr>
           <a:xfrm>
-            <a:off x="685800" y="4773168"/>
-            <a:ext cx="3063240" cy="320040"/>
+            <a:off x="685800" y="4507992"/>
+            <a:ext cx="4709160" cy="310896"/>
           </a:xfrm>
           <a:prstGeom prst="rect">
             <a:avLst/>
@@ -3469,8 +3469,8 @@
         </p:nvSpPr>
         <p:spPr>
           <a:xfrm>
-            <a:off x="4160520" y="4572000"/>
-            <a:ext cx="3063240" cy="182880"/>
+            <a:off x="5852160" y="4315968"/>
+            <a:ext cx="4709160" cy="182880"/>
           </a:xfrm>
           <a:prstGeom prst="rect">
             <a:avLst/>
@@ -3511,8 +3511,8 @@
         </p:nvSpPr>
         <p:spPr>
           <a:xfrm>
-            <a:off x="4160520" y="4773168"/>
-            <a:ext cx="3063240" cy="320040"/>
+            <a:off x="5852160" y="4507992"/>
+            <a:ext cx="4709160" cy="310896"/>
           </a:xfrm>
           <a:prstGeom prst="rect">
             <a:avLst/>
@@ -3553,8 +3553,8 @@
         </p:nvSpPr>
         <p:spPr>
           <a:xfrm>
-            <a:off x="7635240" y="4572000"/>
-            <a:ext cx="3063240" cy="182880"/>
+            <a:off x="685800" y="4937759"/>
+            <a:ext cx="4709160" cy="182880"/>
           </a:xfrm>
           <a:prstGeom prst="rect">
             <a:avLst/>
@@ -3595,8 +3595,8 @@
         </p:nvSpPr>
         <p:spPr>
           <a:xfrm>
-            <a:off x="7635240" y="4773168"/>
-            <a:ext cx="3063240" cy="320040"/>
+            <a:off x="685800" y="5129783"/>
+            <a:ext cx="4709160" cy="310896"/>
           </a:xfrm>
           <a:prstGeom prst="rect">
             <a:avLst/>
@@ -3637,8 +3637,8 @@
         </p:nvSpPr>
         <p:spPr>
           <a:xfrm>
-            <a:off x="685800" y="5230368"/>
-            <a:ext cx="3063240" cy="182880"/>
+            <a:off x="5852160" y="4937759"/>
+            <a:ext cx="4709160" cy="182880"/>
           </a:xfrm>
           <a:prstGeom prst="rect">
             <a:avLst/>
@@ -3666,7 +3666,7 @@
               <a:rPr>
                 <a:latin typeface="Inter"/>
               </a:rPr>
-              <a:t>ADV FILING DATE</a:t>
+              <a:t>REPORT DATE</a:t>
             </a:r>
           </a:p>
         </p:txBody>
@@ -3679,8 +3679,8 @@
         </p:nvSpPr>
         <p:spPr>
           <a:xfrm>
-            <a:off x="685800" y="5431536"/>
-            <a:ext cx="3063240" cy="320040"/>
+            <a:off x="5852160" y="5129783"/>
+            <a:ext cx="4709160" cy="310896"/>
           </a:xfrm>
           <a:prstGeom prst="rect">
             <a:avLst/>
@@ -3708,174 +3708,6 @@
               <a:rPr>
                 <a:latin typeface="Inter"/>
               </a:rPr>
-              <a:t>2026-08-18</a:t>
-            </a:r>
-          </a:p>
-        </p:txBody>
-      </p:sp>
-      <p:sp>
-        <p:nvSpPr>
-          <p:cNvPr id="17" name="TextBox 16"/>
-          <p:cNvSpPr txBox="1"/>
-          <p:nvPr/>
-        </p:nvSpPr>
-        <p:spPr>
-          <a:xfrm>
-            <a:off x="4160520" y="5230368"/>
-            <a:ext cx="3063240" cy="182880"/>
-          </a:xfrm>
-          <a:prstGeom prst="rect">
-            <a:avLst/>
-          </a:prstGeom>
-          <a:noFill/>
-        </p:spPr>
-        <p:txBody>
-          <a:bodyPr wrap="none" lIns="9144" rIns="9144" tIns="9144" bIns="9144" anchor="t">
-            <a:spAutoFit/>
-          </a:bodyPr>
-          <a:lstStyle/>
-          <a:p>
-            <a:pPr algn="l">
-              <a:spcAft>
-                <a:spcPts val="0"/>
-              </a:spcAft>
-              <a:defRPr sz="700" b="1">
-                <a:solidFill>
-                  <a:srgbClr val="8A94A1"/>
-                </a:solidFill>
-                <a:latin typeface="Inter"/>
-              </a:defRPr>
-            </a:pPr>
-            <a:r>
-              <a:rPr>
-                <a:latin typeface="Inter"/>
-              </a:rPr>
-              <a:t>PREPARED FOR</a:t>
-            </a:r>
-          </a:p>
-        </p:txBody>
-      </p:sp>
-      <p:sp>
-        <p:nvSpPr>
-          <p:cNvPr id="18" name="TextBox 17"/>
-          <p:cNvSpPr txBox="1"/>
-          <p:nvPr/>
-        </p:nvSpPr>
-        <p:spPr>
-          <a:xfrm>
-            <a:off x="4160520" y="5431536"/>
-            <a:ext cx="3063240" cy="320040"/>
-          </a:xfrm>
-          <a:prstGeom prst="rect">
-            <a:avLst/>
-          </a:prstGeom>
-          <a:noFill/>
-        </p:spPr>
-        <p:txBody>
-          <a:bodyPr wrap="none" lIns="9144" rIns="9144" tIns="9144" bIns="9144" anchor="t">
-            <a:spAutoFit/>
-          </a:bodyPr>
-          <a:lstStyle/>
-          <a:p>
-            <a:pPr algn="l">
-              <a:spcAft>
-                <a:spcPts val="0"/>
-              </a:spcAft>
-              <a:defRPr sz="1000" b="1">
-                <a:solidFill>
-                  <a:srgbClr val="FFFFFF"/>
-                </a:solidFill>
-                <a:latin typeface="Inter"/>
-              </a:defRPr>
-            </a:pPr>
-            <a:r>
-              <a:rPr>
-                <a:latin typeface="Inter"/>
-              </a:rPr>
-              <a:t>Gradient</a:t>
-            </a:r>
-          </a:p>
-        </p:txBody>
-      </p:sp>
-      <p:sp>
-        <p:nvSpPr>
-          <p:cNvPr id="19" name="TextBox 18"/>
-          <p:cNvSpPr txBox="1"/>
-          <p:nvPr/>
-        </p:nvSpPr>
-        <p:spPr>
-          <a:xfrm>
-            <a:off x="7635240" y="5230368"/>
-            <a:ext cx="3063240" cy="182880"/>
-          </a:xfrm>
-          <a:prstGeom prst="rect">
-            <a:avLst/>
-          </a:prstGeom>
-          <a:noFill/>
-        </p:spPr>
-        <p:txBody>
-          <a:bodyPr wrap="none" lIns="9144" rIns="9144" tIns="9144" bIns="9144" anchor="t">
-            <a:spAutoFit/>
-          </a:bodyPr>
-          <a:lstStyle/>
-          <a:p>
-            <a:pPr algn="l">
-              <a:spcAft>
-                <a:spcPts val="0"/>
-              </a:spcAft>
-              <a:defRPr sz="700" b="1">
-                <a:solidFill>
-                  <a:srgbClr val="8A94A1"/>
-                </a:solidFill>
-                <a:latin typeface="Inter"/>
-              </a:defRPr>
-            </a:pPr>
-            <a:r>
-              <a:rPr>
-                <a:latin typeface="Inter"/>
-              </a:rPr>
-              <a:t>REPORT DATE</a:t>
-            </a:r>
-          </a:p>
-        </p:txBody>
-      </p:sp>
-      <p:sp>
-        <p:nvSpPr>
-          <p:cNvPr id="20" name="TextBox 19"/>
-          <p:cNvSpPr txBox="1"/>
-          <p:nvPr/>
-        </p:nvSpPr>
-        <p:spPr>
-          <a:xfrm>
-            <a:off x="7635240" y="5431536"/>
-            <a:ext cx="3063240" cy="320040"/>
-          </a:xfrm>
-          <a:prstGeom prst="rect">
-            <a:avLst/>
-          </a:prstGeom>
-          <a:noFill/>
-        </p:spPr>
-        <p:txBody>
-          <a:bodyPr wrap="none" lIns="9144" rIns="9144" tIns="9144" bIns="9144" anchor="t">
-            <a:spAutoFit/>
-          </a:bodyPr>
-          <a:lstStyle/>
-          <a:p>
-            <a:pPr algn="l">
-              <a:spcAft>
-                <a:spcPts val="0"/>
-              </a:spcAft>
-              <a:defRPr sz="1000" b="1">
-                <a:solidFill>
-                  <a:srgbClr val="FFFFFF"/>
-                </a:solidFill>
-                <a:latin typeface="Inter"/>
-              </a:defRPr>
-            </a:pPr>
-            <a:r>
-              <a:rPr>
-                <a:latin typeface="Inter"/>
-              </a:rPr>
               <a:t>2026-10-04</a:t>
             </a:r>
           </a:p>
@@ -3883,14 +3715,14 @@
       </p:sp>
       <p:sp>
         <p:nvSpPr>
-          <p:cNvPr id="21" name="Rectangle 20"/>
+          <p:cNvPr id="17" name="Rectangle 16"/>
           <p:cNvSpPr/>
           <p:nvPr/>
         </p:nvSpPr>
         <p:spPr>
           <a:xfrm>
-            <a:off x="685800" y="5833872"/>
-            <a:ext cx="3063240" cy="384048"/>
+            <a:off x="685800" y="5687568"/>
+            <a:ext cx="3337560" cy="530352"/>
           </a:xfrm>
           <a:prstGeom prst="rect">
             <a:avLst/>
@@ -3932,14 +3764,14 @@
       </p:sp>
       <p:sp>
         <p:nvSpPr>
-          <p:cNvPr id="22" name="TextBox 21"/>
+          <p:cNvPr id="18" name="TextBox 17"/>
           <p:cNvSpPr txBox="1"/>
           <p:nvPr/>
         </p:nvSpPr>
         <p:spPr>
           <a:xfrm>
-            <a:off x="822960" y="5934456"/>
-            <a:ext cx="2788920" cy="164592"/>
+            <a:off x="822960" y="5760720"/>
+            <a:ext cx="3063240" cy="128016"/>
           </a:xfrm>
           <a:prstGeom prst="rect">
             <a:avLst/>
@@ -3956,7 +3788,7 @@
               <a:spcAft>
                 <a:spcPts val="0"/>
               </a:spcAft>
-              <a:defRPr sz="800" b="1">
+              <a:defRPr sz="620" b="1">
                 <a:solidFill>
                   <a:srgbClr val="0D1117"/>
                 </a:solidFill>
@@ -3967,6 +3799,48 @@
               <a:rPr>
                 <a:latin typeface="Inter"/>
               </a:rPr>
+              <a:t>OVERALL VIEW</a:t>
+            </a:r>
+          </a:p>
+        </p:txBody>
+      </p:sp>
+      <p:sp>
+        <p:nvSpPr>
+          <p:cNvPr id="19" name="TextBox 18"/>
+          <p:cNvSpPr txBox="1"/>
+          <p:nvPr/>
+        </p:nvSpPr>
+        <p:spPr>
+          <a:xfrm>
+            <a:off x="822960" y="5916168"/>
+            <a:ext cx="3063240" cy="182880"/>
+          </a:xfrm>
+          <a:prstGeom prst="rect">
+            <a:avLst/>
+          </a:prstGeom>
+          <a:noFill/>
+        </p:spPr>
+        <p:txBody>
+          <a:bodyPr wrap="none" lIns="9144" rIns="9144" tIns="9144" bIns="9144" anchor="t">
+            <a:spAutoFit/>
+          </a:bodyPr>
+          <a:lstStyle/>
+          <a:p>
+            <a:pPr algn="l">
+              <a:spcAft>
+                <a:spcPts val="0"/>
+              </a:spcAft>
+              <a:defRPr sz="900" b="1">
+                <a:solidFill>
+                  <a:srgbClr val="0D1117"/>
+                </a:solidFill>
+                <a:latin typeface="Inter"/>
+              </a:defRPr>
+            </a:pPr>
+            <a:r>
+              <a:rPr>
+                <a:latin typeface="Inter"/>
+              </a:rPr>
               <a:t>4 discrepancies found</a:t>
             </a:r>
           </a:p>
@@ -3974,13 +3848,13 @@
       </p:sp>
       <p:sp>
         <p:nvSpPr>
-          <p:cNvPr id="23" name="TextBox 22"/>
+          <p:cNvPr id="20" name="TextBox 19"/>
           <p:cNvSpPr txBox="1"/>
           <p:nvPr/>
         </p:nvSpPr>
         <p:spPr>
           <a:xfrm>
-            <a:off x="3977639" y="5824728"/>
+            <a:off x="4297680" y="5733288"/>
             <a:ext cx="3108960" cy="164592"/>
           </a:xfrm>
           <a:prstGeom prst="rect">
@@ -4009,20 +3883,20 @@
               <a:rPr>
                 <a:latin typeface="Inter"/>
               </a:rPr>
-              <a:t>FIELDS ASSESSED</a:t>
-            </a:r>
-          </a:p>
-        </p:txBody>
-      </p:sp>
-      <p:sp>
-        <p:nvSpPr>
-          <p:cNvPr id="24" name="TextBox 23"/>
+              <a:t>SCOPE REVIEWED</a:t>
+            </a:r>
+          </a:p>
+        </p:txBody>
+      </p:sp>
+      <p:sp>
+        <p:nvSpPr>
+          <p:cNvPr id="21" name="TextBox 20"/>
           <p:cNvSpPr txBox="1"/>
           <p:nvPr/>
         </p:nvSpPr>
         <p:spPr>
           <a:xfrm>
-            <a:off x="3977639" y="5998464"/>
+            <a:off x="4297680" y="5934456"/>
             <a:ext cx="3108960" cy="201168"/>
           </a:xfrm>
           <a:prstGeom prst="rect">
@@ -4058,14 +3932,14 @@
       </p:sp>
       <p:sp>
         <p:nvSpPr>
-          <p:cNvPr id="25" name="TextBox 24"/>
+          <p:cNvPr id="22" name="TextBox 21"/>
           <p:cNvSpPr txBox="1"/>
           <p:nvPr/>
         </p:nvSpPr>
         <p:spPr>
           <a:xfrm>
-            <a:off x="685800" y="6473952"/>
-            <a:ext cx="8046720" cy="182880"/>
+            <a:off x="685800" y="6400800"/>
+            <a:ext cx="8046720" cy="146304"/>
           </a:xfrm>
           <a:prstGeom prst="rect">
             <a:avLst/>
@@ -4093,14 +3967,56 @@
               <a:rPr>
                 <a:latin typeface="Inter"/>
               </a:rPr>
-              <a:t>TEST FIXTURE — synthetic DDQ, not a manager document</a:t>
-            </a:r>
-          </a:p>
-        </p:txBody>
-      </p:sp>
-      <p:sp>
-        <p:nvSpPr>
-          <p:cNvPr id="26" name="TextBox 25"/>
+              <a:t>Confidential — manager diligence review</a:t>
+            </a:r>
+          </a:p>
+        </p:txBody>
+      </p:sp>
+      <p:sp>
+        <p:nvSpPr>
+          <p:cNvPr id="23" name="TextBox 22"/>
+          <p:cNvSpPr txBox="1"/>
+          <p:nvPr/>
+        </p:nvSpPr>
+        <p:spPr>
+          <a:xfrm>
+            <a:off x="685800" y="6556248"/>
+            <a:ext cx="8046720" cy="128016"/>
+          </a:xfrm>
+          <a:prstGeom prst="rect">
+            <a:avLst/>
+          </a:prstGeom>
+          <a:noFill/>
+        </p:spPr>
+        <p:txBody>
+          <a:bodyPr wrap="none" lIns="9144" rIns="9144" tIns="9144" bIns="9144" anchor="t">
+            <a:spAutoFit/>
+          </a:bodyPr>
+          <a:lstStyle/>
+          <a:p>
+            <a:pPr algn="l">
+              <a:spcAft>
+                <a:spcPts val="0"/>
+              </a:spcAft>
+              <a:defRPr sz="650" b="0">
+                <a:solidFill>
+                  <a:srgbClr val="8A94A1"/>
+                </a:solidFill>
+                <a:latin typeface="Inter"/>
+              </a:defRPr>
+            </a:pPr>
+            <a:r>
+              <a:rPr>
+                <a:latin typeface="Inter"/>
+              </a:rPr>
+              <a:t>Illustrative sample · not client data</a:t>
+            </a:r>
+          </a:p>
+        </p:txBody>
+      </p:sp>
+      <p:sp>
+        <p:nvSpPr>
+          <p:cNvPr id="24" name="TextBox 23"/>
           <p:cNvSpPr txBox="1"/>
           <p:nvPr/>
         </p:nvSpPr>
@@ -4216,7 +4132,7 @@
         <p:spPr>
           <a:xfrm>
             <a:off x="640080" y="329184"/>
-            <a:ext cx="9875520" cy="182880"/>
+            <a:ext cx="5303520" cy="182880"/>
           </a:xfrm>
           <a:prstGeom prst="rect">
             <a:avLst/>
@@ -4257,6 +4173,48 @@
         </p:nvSpPr>
         <p:spPr>
           <a:xfrm>
+            <a:off x="5897880" y="310896"/>
+            <a:ext cx="4800600" cy="256032"/>
+          </a:xfrm>
+          <a:prstGeom prst="rect">
+            <a:avLst/>
+          </a:prstGeom>
+          <a:noFill/>
+        </p:spPr>
+        <p:txBody>
+          <a:bodyPr wrap="none" lIns="9144" rIns="9144" tIns="9144" bIns="9144" anchor="t">
+            <a:spAutoFit/>
+          </a:bodyPr>
+          <a:lstStyle/>
+          <a:p>
+            <a:pPr algn="r">
+              <a:spcAft>
+                <a:spcPts val="0"/>
+              </a:spcAft>
+              <a:defRPr sz="680" b="1">
+                <a:solidFill>
+                  <a:srgbClr val="4F6B00"/>
+                </a:solidFill>
+                <a:latin typeface="Inter"/>
+              </a:defRPr>
+            </a:pPr>
+            <a:r>
+              <a:rPr>
+                <a:latin typeface="Inter"/>
+              </a:rPr>
+              <a:t>Illustrative, Gradient Maintained — demo data, not the client's holdings or managers</a:t>
+            </a:r>
+          </a:p>
+        </p:txBody>
+      </p:sp>
+      <p:sp>
+        <p:nvSpPr>
+          <p:cNvPr id="5" name="TextBox 4"/>
+          <p:cNvSpPr txBox="1"/>
+          <p:nvPr/>
+        </p:nvSpPr>
+        <p:spPr>
+          <a:xfrm>
             <a:off x="640080" y="566928"/>
             <a:ext cx="10058400" cy="530352"/>
           </a:xfrm>
@@ -4293,7 +4251,7 @@
       </p:sp>
       <p:sp>
         <p:nvSpPr>
-          <p:cNvPr id="5" name="Rectangle 4"/>
+          <p:cNvPr id="6" name="Rectangle 5"/>
           <p:cNvSpPr/>
           <p:nvPr/>
         </p:nvSpPr>
@@ -4342,7 +4300,7 @@
       </p:sp>
       <p:sp>
         <p:nvSpPr>
-          <p:cNvPr id="6" name="Rectangle 5"/>
+          <p:cNvPr id="7" name="Rectangle 6"/>
           <p:cNvSpPr/>
           <p:nvPr/>
         </p:nvSpPr>
@@ -4391,7 +4349,7 @@
       </p:sp>
       <p:sp>
         <p:nvSpPr>
-          <p:cNvPr id="7" name="TextBox 6"/>
+          <p:cNvPr id="8" name="TextBox 7"/>
           <p:cNvSpPr txBox="1"/>
           <p:nvPr/>
         </p:nvSpPr>
@@ -4433,7 +4391,7 @@
       </p:sp>
       <p:sp>
         <p:nvSpPr>
-          <p:cNvPr id="8" name="TextBox 7"/>
+          <p:cNvPr id="9" name="TextBox 8"/>
           <p:cNvSpPr txBox="1"/>
           <p:nvPr/>
         </p:nvSpPr>
@@ -4475,7 +4433,7 @@
       </p:sp>
       <p:graphicFrame>
         <p:nvGraphicFramePr>
-          <p:cNvPr id="9" name="Table 8"/>
+          <p:cNvPr id="10" name="Table 9"/>
           <p:cNvGraphicFramePr>
             <a:graphicFrameLocks noGrp="1"/>
           </p:cNvGraphicFramePr>
@@ -4772,7 +4730,7 @@
       </p:graphicFrame>
       <p:sp>
         <p:nvSpPr>
-          <p:cNvPr id="10" name="Rectangle 9"/>
+          <p:cNvPr id="11" name="Rectangle 10"/>
           <p:cNvSpPr/>
           <p:nvPr/>
         </p:nvSpPr>
@@ -4821,7 +4779,7 @@
       </p:sp>
       <p:sp>
         <p:nvSpPr>
-          <p:cNvPr id="11" name="TextBox 10"/>
+          <p:cNvPr id="12" name="TextBox 11"/>
           <p:cNvSpPr txBox="1"/>
           <p:nvPr/>
         </p:nvSpPr>
@@ -4863,7 +4821,7 @@
       </p:sp>
       <p:sp>
         <p:nvSpPr>
-          <p:cNvPr id="12" name="TextBox 11"/>
+          <p:cNvPr id="13" name="TextBox 12"/>
           <p:cNvSpPr txBox="1"/>
           <p:nvPr/>
         </p:nvSpPr>
@@ -4898,14 +4856,14 @@
               <a:rPr>
                 <a:latin typeface="Inter"/>
               </a:rPr>
-              <a:t>TEST FIXTURE — synthetic DDQ, not a manager document · Data as of 2026-10-01 (Form ADV); DDQ responses as of 2026-09-30</a:t>
-            </a:r>
-          </a:p>
-        </p:txBody>
-      </p:sp>
-      <p:sp>
-        <p:nvSpPr>
-          <p:cNvPr id="13" name="TextBox 12"/>
+              <a:t>Confidential — manager diligence review · Data as of 2026-10-01 (Form ADV); DDQ responses as of 2026-09-30</a:t>
+            </a:r>
+          </a:p>
+        </p:txBody>
+      </p:sp>
+      <p:sp>
+        <p:nvSpPr>
+          <p:cNvPr id="14" name="TextBox 13"/>
           <p:cNvSpPr txBox="1"/>
           <p:nvPr/>
         </p:nvSpPr>
@@ -5021,7 +4979,7 @@
         <p:spPr>
           <a:xfrm>
             <a:off x="640080" y="329184"/>
-            <a:ext cx="9875520" cy="182880"/>
+            <a:ext cx="5303520" cy="182880"/>
           </a:xfrm>
           <a:prstGeom prst="rect">
             <a:avLst/>
@@ -5062,6 +5020,48 @@
         </p:nvSpPr>
         <p:spPr>
           <a:xfrm>
+            <a:off x="5897880" y="310896"/>
+            <a:ext cx="4800600" cy="256032"/>
+          </a:xfrm>
+          <a:prstGeom prst="rect">
+            <a:avLst/>
+          </a:prstGeom>
+          <a:noFill/>
+        </p:spPr>
+        <p:txBody>
+          <a:bodyPr wrap="none" lIns="9144" rIns="9144" tIns="9144" bIns="9144" anchor="t">
+            <a:spAutoFit/>
+          </a:bodyPr>
+          <a:lstStyle/>
+          <a:p>
+            <a:pPr algn="r">
+              <a:spcAft>
+                <a:spcPts val="0"/>
+              </a:spcAft>
+              <a:defRPr sz="680" b="1">
+                <a:solidFill>
+                  <a:srgbClr val="4F6B00"/>
+                </a:solidFill>
+                <a:latin typeface="Inter"/>
+              </a:defRPr>
+            </a:pPr>
+            <a:r>
+              <a:rPr>
+                <a:latin typeface="Inter"/>
+              </a:rPr>
+              <a:t>Illustrative, Gradient Maintained — demo data, not the client's holdings or managers</a:t>
+            </a:r>
+          </a:p>
+        </p:txBody>
+      </p:sp>
+      <p:sp>
+        <p:nvSpPr>
+          <p:cNvPr id="5" name="TextBox 4"/>
+          <p:cNvSpPr txBox="1"/>
+          <p:nvPr/>
+        </p:nvSpPr>
+        <p:spPr>
+          <a:xfrm>
             <a:off x="640080" y="566928"/>
             <a:ext cx="10058400" cy="530352"/>
           </a:xfrm>
@@ -5098,7 +5098,7 @@
       </p:sp>
       <p:sp>
         <p:nvSpPr>
-          <p:cNvPr id="5" name="Rectangle 4"/>
+          <p:cNvPr id="6" name="Rectangle 5"/>
           <p:cNvSpPr/>
           <p:nvPr/>
         </p:nvSpPr>
@@ -5147,7 +5147,7 @@
       </p:sp>
       <p:sp>
         <p:nvSpPr>
-          <p:cNvPr id="6" name="Rectangle 5"/>
+          <p:cNvPr id="7" name="Rectangle 6"/>
           <p:cNvSpPr/>
           <p:nvPr/>
         </p:nvSpPr>
@@ -5196,7 +5196,7 @@
       </p:sp>
       <p:sp>
         <p:nvSpPr>
-          <p:cNvPr id="7" name="TextBox 6"/>
+          <p:cNvPr id="8" name="TextBox 7"/>
           <p:cNvSpPr txBox="1"/>
           <p:nvPr/>
         </p:nvSpPr>
@@ -5238,7 +5238,7 @@
       </p:sp>
       <p:sp>
         <p:nvSpPr>
-          <p:cNvPr id="8" name="Rectangle 7"/>
+          <p:cNvPr id="9" name="Rectangle 8"/>
           <p:cNvSpPr/>
           <p:nvPr/>
         </p:nvSpPr>
@@ -5287,7 +5287,7 @@
       </p:sp>
       <p:sp>
         <p:nvSpPr>
-          <p:cNvPr id="9" name="Rectangle 8"/>
+          <p:cNvPr id="10" name="Rectangle 9"/>
           <p:cNvSpPr/>
           <p:nvPr/>
         </p:nvSpPr>
@@ -5336,7 +5336,7 @@
       </p:sp>
       <p:sp>
         <p:nvSpPr>
-          <p:cNvPr id="10" name="TextBox 9"/>
+          <p:cNvPr id="11" name="TextBox 10"/>
           <p:cNvSpPr txBox="1"/>
           <p:nvPr/>
         </p:nvSpPr>
@@ -5378,7 +5378,7 @@
       </p:sp>
       <p:sp>
         <p:nvSpPr>
-          <p:cNvPr id="11" name="TextBox 10"/>
+          <p:cNvPr id="12" name="TextBox 11"/>
           <p:cNvSpPr txBox="1"/>
           <p:nvPr/>
         </p:nvSpPr>
@@ -5420,7 +5420,7 @@
       </p:sp>
       <p:sp>
         <p:nvSpPr>
-          <p:cNvPr id="12" name="Rectangle 11"/>
+          <p:cNvPr id="13" name="Rectangle 12"/>
           <p:cNvSpPr/>
           <p:nvPr/>
         </p:nvSpPr>
@@ -5469,7 +5469,7 @@
       </p:sp>
       <p:sp>
         <p:nvSpPr>
-          <p:cNvPr id="13" name="TextBox 12"/>
+          <p:cNvPr id="14" name="TextBox 13"/>
           <p:cNvSpPr txBox="1"/>
           <p:nvPr/>
         </p:nvSpPr>
@@ -5511,7 +5511,7 @@
       </p:sp>
       <p:sp>
         <p:nvSpPr>
-          <p:cNvPr id="14" name="TextBox 13"/>
+          <p:cNvPr id="15" name="TextBox 14"/>
           <p:cNvSpPr txBox="1"/>
           <p:nvPr/>
         </p:nvSpPr>
@@ -5546,14 +5546,14 @@
               <a:rPr>
                 <a:latin typeface="Inter"/>
               </a:rPr>
-              <a:t>TEST FIXTURE — synthetic DDQ, not a manager document · Data as of 2026-10-01 (Form ADV); DDQ responses as of 2026-09-30</a:t>
-            </a:r>
-          </a:p>
-        </p:txBody>
-      </p:sp>
-      <p:sp>
-        <p:nvSpPr>
-          <p:cNvPr id="15" name="TextBox 14"/>
+              <a:t>Confidential — manager diligence review · Data as of 2026-10-01 (Form ADV); DDQ responses as of 2026-09-30</a:t>
+            </a:r>
+          </a:p>
+        </p:txBody>
+      </p:sp>
+      <p:sp>
+        <p:nvSpPr>
+          <p:cNvPr id="16" name="TextBox 15"/>
           <p:cNvSpPr txBox="1"/>
           <p:nvPr/>
         </p:nvSpPr>
@@ -5669,7 +5669,7 @@
         <p:spPr>
           <a:xfrm>
             <a:off x="640080" y="329184"/>
-            <a:ext cx="9875520" cy="182880"/>
+            <a:ext cx="5303520" cy="182880"/>
           </a:xfrm>
           <a:prstGeom prst="rect">
             <a:avLst/>
@@ -5710,6 +5710,48 @@
         </p:nvSpPr>
         <p:spPr>
           <a:xfrm>
+            <a:off x="5897880" y="310896"/>
+            <a:ext cx="4800600" cy="256032"/>
+          </a:xfrm>
+          <a:prstGeom prst="rect">
+            <a:avLst/>
+          </a:prstGeom>
+          <a:noFill/>
+        </p:spPr>
+        <p:txBody>
+          <a:bodyPr wrap="none" lIns="9144" rIns="9144" tIns="9144" bIns="9144" anchor="t">
+            <a:spAutoFit/>
+          </a:bodyPr>
+          <a:lstStyle/>
+          <a:p>
+            <a:pPr algn="r">
+              <a:spcAft>
+                <a:spcPts val="0"/>
+              </a:spcAft>
+              <a:defRPr sz="680" b="1">
+                <a:solidFill>
+                  <a:srgbClr val="4F6B00"/>
+                </a:solidFill>
+                <a:latin typeface="Inter"/>
+              </a:defRPr>
+            </a:pPr>
+            <a:r>
+              <a:rPr>
+                <a:latin typeface="Inter"/>
+              </a:rPr>
+              <a:t>Illustrative, Gradient Maintained — demo data, not the client's holdings or managers</a:t>
+            </a:r>
+          </a:p>
+        </p:txBody>
+      </p:sp>
+      <p:sp>
+        <p:nvSpPr>
+          <p:cNvPr id="5" name="TextBox 4"/>
+          <p:cNvSpPr txBox="1"/>
+          <p:nvPr/>
+        </p:nvSpPr>
+        <p:spPr>
+          <a:xfrm>
             <a:off x="640080" y="566928"/>
             <a:ext cx="10058400" cy="530352"/>
           </a:xfrm>
@@ -5746,7 +5788,7 @@
       </p:sp>
       <p:sp>
         <p:nvSpPr>
-          <p:cNvPr id="5" name="Rectangle 4"/>
+          <p:cNvPr id="6" name="Rectangle 5"/>
           <p:cNvSpPr/>
           <p:nvPr/>
         </p:nvSpPr>
@@ -5795,7 +5837,7 @@
       </p:sp>
       <p:sp>
         <p:nvSpPr>
-          <p:cNvPr id="6" name="Rectangle 5"/>
+          <p:cNvPr id="7" name="Rectangle 6"/>
           <p:cNvSpPr/>
           <p:nvPr/>
         </p:nvSpPr>
@@ -5844,7 +5886,7 @@
       </p:sp>
       <p:sp>
         <p:nvSpPr>
-          <p:cNvPr id="7" name="TextBox 6"/>
+          <p:cNvPr id="8" name="TextBox 7"/>
           <p:cNvSpPr txBox="1"/>
           <p:nvPr/>
         </p:nvSpPr>
@@ -5886,7 +5928,7 @@
       </p:sp>
       <p:sp>
         <p:nvSpPr>
-          <p:cNvPr id="8" name="TextBox 7"/>
+          <p:cNvPr id="9" name="TextBox 8"/>
           <p:cNvSpPr txBox="1"/>
           <p:nvPr/>
         </p:nvSpPr>
@@ -5928,7 +5970,7 @@
       </p:sp>
       <p:graphicFrame>
         <p:nvGraphicFramePr>
-          <p:cNvPr id="9" name="Table 8"/>
+          <p:cNvPr id="10" name="Table 9"/>
           <p:cNvGraphicFramePr>
             <a:graphicFrameLocks noGrp="1"/>
           </p:cNvGraphicFramePr>
@@ -7738,7 +7780,7 @@
       </p:graphicFrame>
       <p:sp>
         <p:nvSpPr>
-          <p:cNvPr id="10" name="Rectangle 9"/>
+          <p:cNvPr id="11" name="Rectangle 10"/>
           <p:cNvSpPr/>
           <p:nvPr/>
         </p:nvSpPr>
@@ -7787,7 +7829,7 @@
       </p:sp>
       <p:sp>
         <p:nvSpPr>
-          <p:cNvPr id="11" name="TextBox 10"/>
+          <p:cNvPr id="12" name="TextBox 11"/>
           <p:cNvSpPr txBox="1"/>
           <p:nvPr/>
         </p:nvSpPr>
@@ -7829,7 +7871,7 @@
       </p:sp>
       <p:sp>
         <p:nvSpPr>
-          <p:cNvPr id="12" name="TextBox 11"/>
+          <p:cNvPr id="13" name="TextBox 12"/>
           <p:cNvSpPr txBox="1"/>
           <p:nvPr/>
         </p:nvSpPr>
@@ -7864,14 +7906,14 @@
               <a:rPr>
                 <a:latin typeface="Inter"/>
               </a:rPr>
-              <a:t>TEST FIXTURE — synthetic DDQ, not a manager document · Data as of 2026-10-01 (Form ADV); DDQ responses as of 2026-09-30</a:t>
-            </a:r>
-          </a:p>
-        </p:txBody>
-      </p:sp>
-      <p:sp>
-        <p:nvSpPr>
-          <p:cNvPr id="13" name="TextBox 12"/>
+              <a:t>Confidential — manager diligence review · Data as of 2026-10-01 (Form ADV); DDQ responses as of 2026-09-30</a:t>
+            </a:r>
+          </a:p>
+        </p:txBody>
+      </p:sp>
+      <p:sp>
+        <p:nvSpPr>
+          <p:cNvPr id="14" name="TextBox 13"/>
           <p:cNvSpPr txBox="1"/>
           <p:nvPr/>
         </p:nvSpPr>
@@ -7987,7 +8029,7 @@
         <p:spPr>
           <a:xfrm>
             <a:off x="640080" y="329184"/>
-            <a:ext cx="9875520" cy="182880"/>
+            <a:ext cx="5303520" cy="182880"/>
           </a:xfrm>
           <a:prstGeom prst="rect">
             <a:avLst/>
@@ -8028,6 +8070,48 @@
         </p:nvSpPr>
         <p:spPr>
           <a:xfrm>
+            <a:off x="5897880" y="310896"/>
+            <a:ext cx="4800600" cy="256032"/>
+          </a:xfrm>
+          <a:prstGeom prst="rect">
+            <a:avLst/>
+          </a:prstGeom>
+          <a:noFill/>
+        </p:spPr>
+        <p:txBody>
+          <a:bodyPr wrap="none" lIns="9144" rIns="9144" tIns="9144" bIns="9144" anchor="t">
+            <a:spAutoFit/>
+          </a:bodyPr>
+          <a:lstStyle/>
+          <a:p>
+            <a:pPr algn="r">
+              <a:spcAft>
+                <a:spcPts val="0"/>
+              </a:spcAft>
+              <a:defRPr sz="680" b="1">
+                <a:solidFill>
+                  <a:srgbClr val="4F6B00"/>
+                </a:solidFill>
+                <a:latin typeface="Inter"/>
+              </a:defRPr>
+            </a:pPr>
+            <a:r>
+              <a:rPr>
+                <a:latin typeface="Inter"/>
+              </a:rPr>
+              <a:t>Illustrative, Gradient Maintained — demo data, not the client's holdings or managers</a:t>
+            </a:r>
+          </a:p>
+        </p:txBody>
+      </p:sp>
+      <p:sp>
+        <p:nvSpPr>
+          <p:cNvPr id="5" name="TextBox 4"/>
+          <p:cNvSpPr txBox="1"/>
+          <p:nvPr/>
+        </p:nvSpPr>
+        <p:spPr>
+          <a:xfrm>
             <a:off x="640080" y="566928"/>
             <a:ext cx="10058400" cy="530352"/>
           </a:xfrm>
@@ -8064,7 +8148,7 @@
       </p:sp>
       <p:sp>
         <p:nvSpPr>
-          <p:cNvPr id="5" name="Rectangle 4"/>
+          <p:cNvPr id="6" name="Rectangle 5"/>
           <p:cNvSpPr/>
           <p:nvPr/>
         </p:nvSpPr>
@@ -8113,7 +8197,7 @@
       </p:sp>
       <p:sp>
         <p:nvSpPr>
-          <p:cNvPr id="6" name="Rectangle 5"/>
+          <p:cNvPr id="7" name="Rectangle 6"/>
           <p:cNvSpPr/>
           <p:nvPr/>
         </p:nvSpPr>
@@ -8162,7 +8246,7 @@
       </p:sp>
       <p:sp>
         <p:nvSpPr>
-          <p:cNvPr id="7" name="TextBox 6"/>
+          <p:cNvPr id="8" name="TextBox 7"/>
           <p:cNvSpPr txBox="1"/>
           <p:nvPr/>
         </p:nvSpPr>
@@ -8204,7 +8288,7 @@
       </p:sp>
       <p:sp>
         <p:nvSpPr>
-          <p:cNvPr id="8" name="TextBox 7"/>
+          <p:cNvPr id="9" name="TextBox 8"/>
           <p:cNvSpPr txBox="1"/>
           <p:nvPr/>
         </p:nvSpPr>
@@ -8246,7 +8330,7 @@
       </p:sp>
       <p:graphicFrame>
         <p:nvGraphicFramePr>
-          <p:cNvPr id="9" name="Table 8"/>
+          <p:cNvPr id="10" name="Table 9"/>
           <p:cNvGraphicFramePr>
             <a:graphicFrameLocks noGrp="1"/>
           </p:cNvGraphicFramePr>
@@ -8588,7 +8672,7 @@
                         <a:rPr>
                           <a:latin typeface="Inter"/>
                         </a:rPr>
-                        <a:t>Not stated in the synthetic DDQ [S3]</a:t>
+                        <a:t>Not stated in the manager DDQ [S3]</a:t>
                       </a:r>
                     </a:p>
                   </a:txBody>
@@ -8671,7 +8755,7 @@
                         <a:rPr>
                           <a:latin typeface="Inter"/>
                         </a:rPr>
-                        <a:t>No run ID was returned; this TEST report is the record [S1]</a:t>
+                        <a:t>No saved reconciliation record was returned; this report preserves the review [S1]</a:t>
                       </a:r>
                     </a:p>
                   </a:txBody>
@@ -8688,7 +8772,7 @@
       </p:graphicFrame>
       <p:sp>
         <p:nvSpPr>
-          <p:cNvPr id="10" name="Rectangle 9"/>
+          <p:cNvPr id="11" name="Rectangle 10"/>
           <p:cNvSpPr/>
           <p:nvPr/>
         </p:nvSpPr>
@@ -8737,7 +8821,7 @@
       </p:sp>
       <p:sp>
         <p:nvSpPr>
-          <p:cNvPr id="11" name="Rectangle 10"/>
+          <p:cNvPr id="12" name="Rectangle 11"/>
           <p:cNvSpPr/>
           <p:nvPr/>
         </p:nvSpPr>
@@ -8786,7 +8870,7 @@
       </p:sp>
       <p:sp>
         <p:nvSpPr>
-          <p:cNvPr id="12" name="Rectangle 11"/>
+          <p:cNvPr id="13" name="Rectangle 12"/>
           <p:cNvSpPr/>
           <p:nvPr/>
         </p:nvSpPr>
@@ -8835,7 +8919,7 @@
       </p:sp>
       <p:sp>
         <p:nvSpPr>
-          <p:cNvPr id="13" name="TextBox 12"/>
+          <p:cNvPr id="14" name="TextBox 13"/>
           <p:cNvSpPr txBox="1"/>
           <p:nvPr/>
         </p:nvSpPr>
@@ -8877,7 +8961,7 @@
       </p:sp>
       <p:sp>
         <p:nvSpPr>
-          <p:cNvPr id="14" name="TextBox 13"/>
+          <p:cNvPr id="15" name="TextBox 14"/>
           <p:cNvSpPr txBox="1"/>
           <p:nvPr/>
         </p:nvSpPr>
@@ -8912,14 +8996,14 @@
               <a:rPr>
                 <a:latin typeface="Inter"/>
               </a:rPr>
-              <a:t>Not available — No out-of-scope evidence was identified in the fictional TEST DDQ [S3].</a:t>
-            </a:r>
-          </a:p>
-        </p:txBody>
-      </p:sp>
-      <p:sp>
-        <p:nvSpPr>
-          <p:cNvPr id="15" name="Rectangle 14"/>
+              <a:t>Not available — No out-of-scope evidence was identified in the sample DDQ [S3].</a:t>
+            </a:r>
+          </a:p>
+        </p:txBody>
+      </p:sp>
+      <p:sp>
+        <p:nvSpPr>
+          <p:cNvPr id="16" name="Rectangle 15"/>
           <p:cNvSpPr/>
           <p:nvPr/>
         </p:nvSpPr>
@@ -8968,7 +9052,7 @@
       </p:sp>
       <p:sp>
         <p:nvSpPr>
-          <p:cNvPr id="16" name="TextBox 15"/>
+          <p:cNvPr id="17" name="TextBox 16"/>
           <p:cNvSpPr txBox="1"/>
           <p:nvPr/>
         </p:nvSpPr>
@@ -9010,7 +9094,7 @@
       </p:sp>
       <p:sp>
         <p:nvSpPr>
-          <p:cNvPr id="17" name="TextBox 16"/>
+          <p:cNvPr id="18" name="TextBox 17"/>
           <p:cNvSpPr txBox="1"/>
           <p:nvPr/>
         </p:nvSpPr>
@@ -9045,14 +9129,14 @@
               <a:rPr>
                 <a:latin typeface="Inter"/>
               </a:rPr>
-              <a:t>TEST FIXTURE — synthetic DDQ, not a manager document · Data as of 2026-10-01 (Form ADV); DDQ responses as of 2026-09-30</a:t>
-            </a:r>
-          </a:p>
-        </p:txBody>
-      </p:sp>
-      <p:sp>
-        <p:nvSpPr>
-          <p:cNvPr id="18" name="TextBox 17"/>
+              <a:t>Confidential — manager diligence review · Data as of 2026-10-01 (Form ADV); DDQ responses as of 2026-09-30</a:t>
+            </a:r>
+          </a:p>
+        </p:txBody>
+      </p:sp>
+      <p:sp>
+        <p:nvSpPr>
+          <p:cNvPr id="19" name="TextBox 18"/>
           <p:cNvSpPr txBox="1"/>
           <p:nvPr/>
         </p:nvSpPr>
@@ -9167,6 +9251,48 @@
         </p:nvSpPr>
         <p:spPr>
           <a:xfrm>
+            <a:off x="5897880" y="310896"/>
+            <a:ext cx="4800600" cy="256032"/>
+          </a:xfrm>
+          <a:prstGeom prst="rect">
+            <a:avLst/>
+          </a:prstGeom>
+          <a:noFill/>
+        </p:spPr>
+        <p:txBody>
+          <a:bodyPr wrap="none" lIns="9144" rIns="9144" tIns="9144" bIns="9144" anchor="t">
+            <a:spAutoFit/>
+          </a:bodyPr>
+          <a:lstStyle/>
+          <a:p>
+            <a:pPr algn="r">
+              <a:spcAft>
+                <a:spcPts val="0"/>
+              </a:spcAft>
+              <a:defRPr sz="680" b="1">
+                <a:solidFill>
+                  <a:srgbClr val="4F6B00"/>
+                </a:solidFill>
+                <a:latin typeface="Inter"/>
+              </a:defRPr>
+            </a:pPr>
+            <a:r>
+              <a:rPr>
+                <a:latin typeface="Inter"/>
+              </a:rPr>
+              <a:t>Illustrative, Gradient Maintained — demo data, not the client's holdings or managers</a:t>
+            </a:r>
+          </a:p>
+        </p:txBody>
+      </p:sp>
+      <p:sp>
+        <p:nvSpPr>
+          <p:cNvPr id="4" name="TextBox 3"/>
+          <p:cNvSpPr txBox="1"/>
+          <p:nvPr/>
+        </p:nvSpPr>
+        <p:spPr>
+          <a:xfrm>
             <a:off x="640080" y="566928"/>
             <a:ext cx="10058400" cy="530352"/>
           </a:xfrm>
@@ -9196,14 +9322,14 @@
               <a:rPr>
                 <a:latin typeface="Inter"/>
               </a:rPr>
-              <a:t>Appendix — Sources and method</a:t>
-            </a:r>
-          </a:p>
-        </p:txBody>
-      </p:sp>
-      <p:sp>
-        <p:nvSpPr>
-          <p:cNvPr id="4" name="Rectangle 3"/>
+              <a:t>Appendix — Sources and methods</a:t>
+            </a:r>
+          </a:p>
+        </p:txBody>
+      </p:sp>
+      <p:sp>
+        <p:nvSpPr>
+          <p:cNvPr id="5" name="Rectangle 4"/>
           <p:cNvSpPr/>
           <p:nvPr/>
         </p:nvSpPr>
@@ -9252,7 +9378,7 @@
       </p:sp>
       <p:sp>
         <p:nvSpPr>
-          <p:cNvPr id="5" name="Rectangle 4"/>
+          <p:cNvPr id="6" name="Rectangle 5"/>
           <p:cNvSpPr/>
           <p:nvPr/>
         </p:nvSpPr>
@@ -9301,7 +9427,7 @@
       </p:sp>
       <p:sp>
         <p:nvSpPr>
-          <p:cNvPr id="6" name="TextBox 5"/>
+          <p:cNvPr id="7" name="TextBox 6"/>
           <p:cNvSpPr txBox="1"/>
           <p:nvPr/>
         </p:nvSpPr>
@@ -9336,14 +9462,14 @@
               <a:rPr>
                 <a:latin typeface="Inter"/>
               </a:rPr>
-              <a:t>06</a:t>
-            </a:r>
-          </a:p>
-        </p:txBody>
-      </p:sp>
-      <p:sp>
-        <p:nvSpPr>
-          <p:cNvPr id="7" name="TextBox 6"/>
+              <a:t>A</a:t>
+            </a:r>
+          </a:p>
+        </p:txBody>
+      </p:sp>
+      <p:sp>
+        <p:nvSpPr>
+          <p:cNvPr id="8" name="TextBox 7"/>
           <p:cNvSpPr txBox="1"/>
           <p:nvPr/>
         </p:nvSpPr>
@@ -9385,7 +9511,7 @@
       </p:sp>
       <p:graphicFrame>
         <p:nvGraphicFramePr>
-          <p:cNvPr id="8" name="Table 7"/>
+          <p:cNvPr id="9" name="Table 8"/>
           <p:cNvGraphicFramePr>
             <a:graphicFrameLocks noGrp="1"/>
           </p:cNvGraphicFramePr>
@@ -9393,7 +9519,7 @@
         </p:nvGraphicFramePr>
         <p:xfrm>
           <a:off x="640080" y="1600200"/>
-          <a:ext cx="10908790" cy="1587597"/>
+          <a:ext cx="10908792" cy="1386429"/>
         </p:xfrm>
         <a:graphic>
           <a:graphicData uri="http://schemas.openxmlformats.org/drawingml/2006/table">
@@ -9403,13 +9529,16 @@
               </a:tblPr>
               <a:tblGrid>
                 <a:gridCol w="2011680"/>
-                <a:gridCol w="1779422"/>
-                <a:gridCol w="1779422"/>
-                <a:gridCol w="1779422"/>
-                <a:gridCol w="1779422"/>
-                <a:gridCol w="1779422"/>
+                <a:gridCol w="1112139"/>
+                <a:gridCol w="1112139"/>
+                <a:gridCol w="1112139"/>
+                <a:gridCol w="1112139"/>
+                <a:gridCol w="1112139"/>
+                <a:gridCol w="1112139"/>
+                <a:gridCol w="1112139"/>
+                <a:gridCol w="1112139"/>
               </a:tblGrid>
-              <a:tr h="396899">
+              <a:tr h="346607">
                 <a:tc>
                   <a:txBody>
                     <a:bodyPr/>
@@ -9481,7 +9610,7 @@
                         <a:rPr>
                           <a:latin typeface="Inter"/>
                         </a:rPr>
-                        <a:t>Tool</a:t>
+                        <a:t>Basis</a:t>
                       </a:r>
                     </a:p>
                   </a:txBody>
@@ -9508,6 +9637,60 @@
                         <a:rPr>
                           <a:latin typeface="Inter"/>
                         </a:rPr>
+                        <a:t>Tool / view</a:t>
+                      </a:r>
+                    </a:p>
+                  </a:txBody>
+                  <a:tcPr marL="54864" marR="54864" marT="27432" marB="27432" anchor="ctr">
+                    <a:solidFill>
+                      <a:srgbClr val="0D1117"/>
+                    </a:solidFill>
+                  </a:tcPr>
+                </a:tc>
+                <a:tc>
+                  <a:txBody>
+                    <a:bodyPr/>
+                    <a:lstStyle/>
+                    <a:p>
+                      <a:pPr>
+                        <a:defRPr sz="750" b="1">
+                          <a:solidFill>
+                            <a:srgbClr val="FFFFFF"/>
+                          </a:solidFill>
+                          <a:latin typeface="Inter"/>
+                        </a:defRPr>
+                      </a:pPr>
+                      <a:r>
+                        <a:rPr>
+                          <a:latin typeface="Inter"/>
+                        </a:rPr>
+                        <a:t>Key parameters</a:t>
+                      </a:r>
+                    </a:p>
+                  </a:txBody>
+                  <a:tcPr marL="54864" marR="54864" marT="27432" marB="27432" anchor="ctr">
+                    <a:solidFill>
+                      <a:srgbClr val="0D1117"/>
+                    </a:solidFill>
+                  </a:tcPr>
+                </a:tc>
+                <a:tc>
+                  <a:txBody>
+                    <a:bodyPr/>
+                    <a:lstStyle/>
+                    <a:p>
+                      <a:pPr>
+                        <a:defRPr sz="750" b="1">
+                          <a:solidFill>
+                            <a:srgbClr val="FFFFFF"/>
+                          </a:solidFill>
+                          <a:latin typeface="Inter"/>
+                        </a:defRPr>
+                      </a:pPr>
+                      <a:r>
+                        <a:rPr>
+                          <a:latin typeface="Inter"/>
+                        </a:rPr>
                         <a:t>As of</a:t>
                       </a:r>
                     </a:p>
@@ -9535,6 +9718,33 @@
                         <a:rPr>
                           <a:latin typeface="Inter"/>
                         </a:rPr>
+                        <a:t>Data scope</a:t>
+                      </a:r>
+                    </a:p>
+                  </a:txBody>
+                  <a:tcPr marL="54864" marR="54864" marT="27432" marB="27432" anchor="ctr">
+                    <a:solidFill>
+                      <a:srgbClr val="0D1117"/>
+                    </a:solidFill>
+                  </a:tcPr>
+                </a:tc>
+                <a:tc>
+                  <a:txBody>
+                    <a:bodyPr/>
+                    <a:lstStyle/>
+                    <a:p>
+                      <a:pPr>
+                        <a:defRPr sz="750" b="1">
+                          <a:solidFill>
+                            <a:srgbClr val="FFFFFF"/>
+                          </a:solidFill>
+                          <a:latin typeface="Inter"/>
+                        </a:defRPr>
+                      </a:pPr>
+                      <a:r>
+                        <a:rPr>
+                          <a:latin typeface="Inter"/>
+                        </a:rPr>
                         <a:t>Validation</a:t>
                       </a:r>
                     </a:p>
@@ -9573,7 +9783,7 @@
                   </a:tcPr>
                 </a:tc>
               </a:tr>
-              <a:tr h="396899">
+              <a:tr h="346607">
                 <a:tc>
                   <a:txBody>
                     <a:bodyPr/>
@@ -9645,6 +9855,33 @@
                         <a:rPr>
                           <a:latin typeface="Inter"/>
                         </a:rPr>
+                        <a:t>gradient_tool</a:t>
+                      </a:r>
+                    </a:p>
+                  </a:txBody>
+                  <a:tcPr marL="54864" marR="54864" marT="27432" marB="27432" anchor="ctr">
+                    <a:solidFill>
+                      <a:srgbClr val="FFFFFF"/>
+                    </a:solidFill>
+                  </a:tcPr>
+                </a:tc>
+                <a:tc>
+                  <a:txBody>
+                    <a:bodyPr/>
+                    <a:lstStyle/>
+                    <a:p>
+                      <a:pPr>
+                        <a:defRPr sz="650" b="0">
+                          <a:solidFill>
+                            <a:srgbClr val="0D1117"/>
+                          </a:solidFill>
+                          <a:latin typeface="Inter"/>
+                        </a:defRPr>
+                      </a:pPr>
+                      <a:r>
+                        <a:rPr>
+                          <a:latin typeface="Inter"/>
+                        </a:rPr>
                         <a:t>reconcile_manager_ddq_claims</a:t>
                       </a:r>
                     </a:p>
@@ -9672,6 +9909,33 @@
                         <a:rPr>
                           <a:latin typeface="Inter"/>
                         </a:rPr>
+                        <a:t>illustrative sample</a:t>
+                      </a:r>
+                    </a:p>
+                  </a:txBody>
+                  <a:tcPr marL="54864" marR="54864" marT="27432" marB="27432" anchor="ctr">
+                    <a:solidFill>
+                      <a:srgbClr val="FFFFFF"/>
+                    </a:solidFill>
+                  </a:tcPr>
+                </a:tc>
+                <a:tc>
+                  <a:txBody>
+                    <a:bodyPr/>
+                    <a:lstStyle/>
+                    <a:p>
+                      <a:pPr>
+                        <a:defRPr sz="650" b="0">
+                          <a:solidFill>
+                            <a:srgbClr val="0D1117"/>
+                          </a:solidFill>
+                          <a:latin typeface="Inter"/>
+                        </a:defRPr>
+                      </a:pPr>
+                      <a:r>
+                        <a:rPr>
+                          <a:latin typeface="Inter"/>
+                        </a:rPr>
                         <a:t>2026-10-01</a:t>
                       </a:r>
                     </a:p>
@@ -9688,18 +9952,101 @@
                     <a:lstStyle/>
                     <a:p>
                       <a:pPr>
+                        <a:defRPr sz="650" b="0">
+                          <a:solidFill>
+                            <a:srgbClr val="0D1117"/>
+                          </a:solidFill>
+                          <a:latin typeface="Inter"/>
+                        </a:defRPr>
+                      </a:pPr>
+                      <a:r>
+                        <a:rPr>
+                          <a:latin typeface="Inter"/>
+                        </a:rPr>
+                        <a:t>Gradient-governed review evidence</a:t>
+                      </a:r>
+                    </a:p>
+                  </a:txBody>
+                  <a:tcPr marL="54864" marR="54864" marT="27432" marB="27432" anchor="ctr">
+                    <a:solidFill>
+                      <a:srgbClr val="FFFFFF"/>
+                    </a:solidFill>
+                  </a:tcPr>
+                </a:tc>
+                <a:tc>
+                  <a:txBody>
+                    <a:bodyPr/>
+                    <a:lstStyle/>
+                    <a:p>
+                      <a:pPr>
+                        <a:defRPr sz="650" b="0">
+                          <a:solidFill>
+                            <a:srgbClr val="0D1117"/>
+                          </a:solidFill>
+                          <a:latin typeface="Inter"/>
+                        </a:defRPr>
+                      </a:pPr>
+                      <a:r>
+                        <a:rPr>
+                          <a:latin typeface="Inter"/>
+                        </a:rPr>
+                        <a:t>{'chip': 'passed', 'status': 'passed'}</a:t>
+                      </a:r>
+                    </a:p>
+                  </a:txBody>
+                  <a:tcPr marL="54864" marR="54864" marT="27432" marB="27432" anchor="ctr">
+                    <a:solidFill>
+                      <a:srgbClr val="FFFFFF"/>
+                    </a:solidFill>
+                  </a:tcPr>
+                </a:tc>
+                <a:tc>
+                  <a:txBody>
+                    <a:bodyPr/>
+                    <a:lstStyle/>
+                    <a:p>
+                      <a:pPr>
+                        <a:defRPr sz="650" b="0">
+                          <a:solidFill>
+                            <a:srgbClr val="0D1117"/>
+                          </a:solidFill>
+                          <a:latin typeface="Inter"/>
+                        </a:defRPr>
+                      </a:pPr>
+                      <a:r>
+                        <a:rPr>
+                          <a:latin typeface="Inter"/>
+                        </a:rPr>
+                        <a:t>sha256:f7d651b2f80f66bfed38fc7041a906cab927de85ad580cf8dc38713fbc66bafa</a:t>
+                      </a:r>
+                    </a:p>
+                  </a:txBody>
+                  <a:tcPr marL="54864" marR="54864" marT="27432" marB="27432" anchor="ctr">
+                    <a:solidFill>
+                      <a:srgbClr val="FFFFFF"/>
+                    </a:solidFill>
+                  </a:tcPr>
+                </a:tc>
+              </a:tr>
+              <a:tr h="346607">
+                <a:tc>
+                  <a:txBody>
+                    <a:bodyPr/>
+                    <a:lstStyle/>
+                    <a:p>
+                      <a:pPr>
                         <a:defRPr sz="650" b="1">
                           <a:solidFill>
-                            <a:srgbClr val="C6F432"/>
-                          </a:solidFill>
-                          <a:latin typeface="Inter"/>
-                        </a:defRPr>
-                      </a:pPr>
-                      <a:r>
-                        <a:rPr>
-                          <a:latin typeface="Inter"/>
-                        </a:rPr>
-                        <a:t>● passed</a:t>
+                            <a:srgbClr val="0D1117"/>
+                          </a:solidFill>
+                          <a:latin typeface="Inter"/>
+                        </a:defRPr>
+                      </a:pPr>
+                      <a:r>
+                        <a:rPr>
+                          <a:latin typeface="Inter"/>
+                        </a:rPr>
+                        <a:t>S2</a:t>
                       </a:r>
                     </a:p>
                   </a:txBody>
@@ -9726,7 +10073,225 @@
                         <a:rPr>
                           <a:latin typeface="Inter"/>
                         </a:rPr>
-                        <a:t>7c89a13a</a:t>
+                        <a:t>Form ADV profile incl. Schedule D 7.B.1</a:t>
+                      </a:r>
+                    </a:p>
+                  </a:txBody>
+                  <a:tcPr marL="54864" marR="54864" marT="27432" marB="27432" anchor="ctr">
+                    <a:solidFill>
+                      <a:srgbClr val="F5F7F9"/>
+                    </a:solidFill>
+                  </a:tcPr>
+                </a:tc>
+                <a:tc>
+                  <a:txBody>
+                    <a:bodyPr/>
+                    <a:lstStyle/>
+                    <a:p>
+                      <a:pPr>
+                        <a:defRPr sz="650" b="0">
+                          <a:solidFill>
+                            <a:srgbClr val="0D1117"/>
+                          </a:solidFill>
+                          <a:latin typeface="Inter"/>
+                        </a:defRPr>
+                      </a:pPr>
+                      <a:r>
+                        <a:rPr>
+                          <a:latin typeface="Inter"/>
+                        </a:rPr>
+                        <a:t>gradient_tool</a:t>
+                      </a:r>
+                    </a:p>
+                  </a:txBody>
+                  <a:tcPr marL="54864" marR="54864" marT="27432" marB="27432" anchor="ctr">
+                    <a:solidFill>
+                      <a:srgbClr val="F5F7F9"/>
+                    </a:solidFill>
+                  </a:tcPr>
+                </a:tc>
+                <a:tc>
+                  <a:txBody>
+                    <a:bodyPr/>
+                    <a:lstStyle/>
+                    <a:p>
+                      <a:pPr>
+                        <a:defRPr sz="650" b="0">
+                          <a:solidFill>
+                            <a:srgbClr val="0D1117"/>
+                          </a:solidFill>
+                          <a:latin typeface="Inter"/>
+                        </a:defRPr>
+                      </a:pPr>
+                      <a:r>
+                        <a:rPr>
+                          <a:latin typeface="Inter"/>
+                        </a:rPr>
+                        <a:t>get_manager_odd_profile</a:t>
+                      </a:r>
+                    </a:p>
+                  </a:txBody>
+                  <a:tcPr marL="54864" marR="54864" marT="27432" marB="27432" anchor="ctr">
+                    <a:solidFill>
+                      <a:srgbClr val="F5F7F9"/>
+                    </a:solidFill>
+                  </a:tcPr>
+                </a:tc>
+                <a:tc>
+                  <a:txBody>
+                    <a:bodyPr/>
+                    <a:lstStyle/>
+                    <a:p>
+                      <a:pPr>
+                        <a:defRPr sz="650" b="0">
+                          <a:solidFill>
+                            <a:srgbClr val="0D1117"/>
+                          </a:solidFill>
+                          <a:latin typeface="Inter"/>
+                        </a:defRPr>
+                      </a:pPr>
+                      <a:r>
+                        <a:rPr>
+                          <a:latin typeface="Inter"/>
+                        </a:rPr>
+                        <a:t>illustrative sample</a:t>
+                      </a:r>
+                    </a:p>
+                  </a:txBody>
+                  <a:tcPr marL="54864" marR="54864" marT="27432" marB="27432" anchor="ctr">
+                    <a:solidFill>
+                      <a:srgbClr val="F5F7F9"/>
+                    </a:solidFill>
+                  </a:tcPr>
+                </a:tc>
+                <a:tc>
+                  <a:txBody>
+                    <a:bodyPr/>
+                    <a:lstStyle/>
+                    <a:p>
+                      <a:pPr>
+                        <a:defRPr sz="650" b="0">
+                          <a:solidFill>
+                            <a:srgbClr val="0D1117"/>
+                          </a:solidFill>
+                          <a:latin typeface="Inter"/>
+                        </a:defRPr>
+                      </a:pPr>
+                      <a:r>
+                        <a:rPr>
+                          <a:latin typeface="Inter"/>
+                        </a:rPr>
+                        <a:t>2026-10-01</a:t>
+                      </a:r>
+                    </a:p>
+                  </a:txBody>
+                  <a:tcPr marL="54864" marR="54864" marT="27432" marB="27432" anchor="ctr">
+                    <a:solidFill>
+                      <a:srgbClr val="F5F7F9"/>
+                    </a:solidFill>
+                  </a:tcPr>
+                </a:tc>
+                <a:tc>
+                  <a:txBody>
+                    <a:bodyPr/>
+                    <a:lstStyle/>
+                    <a:p>
+                      <a:pPr>
+                        <a:defRPr sz="650" b="0">
+                          <a:solidFill>
+                            <a:srgbClr val="0D1117"/>
+                          </a:solidFill>
+                          <a:latin typeface="Inter"/>
+                        </a:defRPr>
+                      </a:pPr>
+                      <a:r>
+                        <a:rPr>
+                          <a:latin typeface="Inter"/>
+                        </a:rPr>
+                        <a:t>Gradient-governed review evidence</a:t>
+                      </a:r>
+                    </a:p>
+                  </a:txBody>
+                  <a:tcPr marL="54864" marR="54864" marT="27432" marB="27432" anchor="ctr">
+                    <a:solidFill>
+                      <a:srgbClr val="F5F7F9"/>
+                    </a:solidFill>
+                  </a:tcPr>
+                </a:tc>
+                <a:tc>
+                  <a:txBody>
+                    <a:bodyPr/>
+                    <a:lstStyle/>
+                    <a:p>
+                      <a:pPr>
+                        <a:defRPr sz="650" b="0">
+                          <a:solidFill>
+                            <a:srgbClr val="0D1117"/>
+                          </a:solidFill>
+                          <a:latin typeface="Inter"/>
+                        </a:defRPr>
+                      </a:pPr>
+                      <a:r>
+                        <a:rPr>
+                          <a:latin typeface="Inter"/>
+                        </a:rPr>
+                        <a:t>{'chip': 'not run', 'status': 'not_run'}</a:t>
+                      </a:r>
+                    </a:p>
+                  </a:txBody>
+                  <a:tcPr marL="54864" marR="54864" marT="27432" marB="27432" anchor="ctr">
+                    <a:solidFill>
+                      <a:srgbClr val="F5F7F9"/>
+                    </a:solidFill>
+                  </a:tcPr>
+                </a:tc>
+                <a:tc>
+                  <a:txBody>
+                    <a:bodyPr/>
+                    <a:lstStyle/>
+                    <a:p>
+                      <a:pPr>
+                        <a:defRPr sz="650" b="0">
+                          <a:solidFill>
+                            <a:srgbClr val="0D1117"/>
+                          </a:solidFill>
+                          <a:latin typeface="Inter"/>
+                        </a:defRPr>
+                      </a:pPr>
+                      <a:r>
+                        <a:rPr>
+                          <a:latin typeface="Inter"/>
+                        </a:rPr>
+                        <a:t>sha256:a04715c67d5ce3adfd18b7b78a12cf0cbf791f70803e2feffcd7826418a2b647</a:t>
+                      </a:r>
+                    </a:p>
+                  </a:txBody>
+                  <a:tcPr marL="54864" marR="54864" marT="27432" marB="27432" anchor="ctr">
+                    <a:solidFill>
+                      <a:srgbClr val="F5F7F9"/>
+                    </a:solidFill>
+                  </a:tcPr>
+                </a:tc>
+              </a:tr>
+              <a:tr h="346608">
+                <a:tc>
+                  <a:txBody>
+                    <a:bodyPr/>
+                    <a:lstStyle/>
+                    <a:p>
+                      <a:pPr>
+                        <a:defRPr sz="650" b="1">
+                          <a:solidFill>
+                            <a:srgbClr val="0D1117"/>
+                          </a:solidFill>
+                          <a:latin typeface="Inter"/>
+                        </a:defRPr>
+                      </a:pPr>
+                      <a:r>
+                        <a:rPr>
+                          <a:latin typeface="Inter"/>
+                        </a:rPr>
+                        <a:t>S3</a:t>
                       </a:r>
                     </a:p>
                   </a:txBody>
@@ -9736,15 +10301,13 @@
                     </a:solidFill>
                   </a:tcPr>
                 </a:tc>
-              </a:tr>
-              <a:tr h="396899">
-                <a:tc>
-                  <a:txBody>
-                    <a:bodyPr/>
-                    <a:lstStyle/>
-                    <a:p>
-                      <a:pPr>
-                        <a:defRPr sz="650" b="1">
+                <a:tc>
+                  <a:txBody>
+                    <a:bodyPr/>
+                    <a:lstStyle/>
+                    <a:p>
+                      <a:pPr>
+                        <a:defRPr sz="650" b="0">
                           <a:solidFill>
                             <a:srgbClr val="0D1117"/>
                           </a:solidFill>
@@ -9755,13 +10318,13 @@
                         <a:rPr>
                           <a:latin typeface="Inter"/>
                         </a:rPr>
-                        <a:t>S2</a:t>
-                      </a:r>
-                    </a:p>
-                  </a:txBody>
-                  <a:tcPr marL="54864" marR="54864" marT="27432" marB="27432" anchor="ctr">
-                    <a:solidFill>
-                      <a:srgbClr val="F5F7F9"/>
+                        <a:t>Synthetic DDQ file (sha256)</a:t>
+                      </a:r>
+                    </a:p>
+                  </a:txBody>
+                  <a:tcPr marL="54864" marR="54864" marT="27432" marB="27432" anchor="ctr">
+                    <a:solidFill>
+                      <a:srgbClr val="FFFFFF"/>
                     </a:solidFill>
                   </a:tcPr>
                 </a:tc>
@@ -9782,13 +10345,13 @@
                         <a:rPr>
                           <a:latin typeface="Inter"/>
                         </a:rPr>
-                        <a:t>Form ADV profile incl. Schedule D 7.B.1</a:t>
-                      </a:r>
-                    </a:p>
-                  </a:txBody>
-                  <a:tcPr marL="54864" marR="54864" marT="27432" marB="27432" anchor="ctr">
-                    <a:solidFill>
-                      <a:srgbClr val="F5F7F9"/>
+                        <a:t>user_document</a:t>
+                      </a:r>
+                    </a:p>
+                  </a:txBody>
+                  <a:tcPr marL="54864" marR="54864" marT="27432" marB="27432" anchor="ctr">
+                    <a:solidFill>
+                      <a:srgbClr val="FFFFFF"/>
                     </a:solidFill>
                   </a:tcPr>
                 </a:tc>
@@ -9809,13 +10372,13 @@
                         <a:rPr>
                           <a:latin typeface="Inter"/>
                         </a:rPr>
-                        <a:t>get_manager_odd_profile</a:t>
-                      </a:r>
-                    </a:p>
-                  </a:txBody>
-                  <a:tcPr marL="54864" marR="54864" marT="27432" marB="27432" anchor="ctr">
-                    <a:solidFill>
-                      <a:srgbClr val="F5F7F9"/>
+                        <a:t>User-supplied document</a:t>
+                      </a:r>
+                    </a:p>
+                  </a:txBody>
+                  <a:tcPr marL="54864" marR="54864" marT="27432" marB="27432" anchor="ctr">
+                    <a:solidFill>
+                      <a:srgbClr val="FFFFFF"/>
                     </a:solidFill>
                   </a:tcPr>
                 </a:tc>
@@ -9836,40 +10399,13 @@
                         <a:rPr>
                           <a:latin typeface="Inter"/>
                         </a:rPr>
-                        <a:t>2026-10-01</a:t>
-                      </a:r>
-                    </a:p>
-                  </a:txBody>
-                  <a:tcPr marL="54864" marR="54864" marT="27432" marB="27432" anchor="ctr">
-                    <a:solidFill>
-                      <a:srgbClr val="F5F7F9"/>
-                    </a:solidFill>
-                  </a:tcPr>
-                </a:tc>
-                <a:tc>
-                  <a:txBody>
-                    <a:bodyPr/>
-                    <a:lstStyle/>
-                    <a:p>
-                      <a:pPr>
-                        <a:defRPr sz="650" b="1">
-                          <a:solidFill>
-                            <a:srgbClr val="9AA5B1"/>
-                          </a:solidFill>
-                          <a:latin typeface="Inter"/>
-                        </a:defRPr>
-                      </a:pPr>
-                      <a:r>
-                        <a:rPr>
-                          <a:latin typeface="Inter"/>
-                        </a:rPr>
-                        <a:t>● not run</a:t>
-                      </a:r>
-                    </a:p>
-                  </a:txBody>
-                  <a:tcPr marL="54864" marR="54864" marT="27432" marB="27432" anchor="ctr">
-                    <a:solidFill>
-                      <a:srgbClr val="F5F7F9"/>
+                        <a:t>illustrative sample</a:t>
+                      </a:r>
+                    </a:p>
+                  </a:txBody>
+                  <a:tcPr marL="54864" marR="54864" marT="27432" marB="27432" anchor="ctr">
+                    <a:solidFill>
+                      <a:srgbClr val="FFFFFF"/>
                     </a:solidFill>
                   </a:tcPr>
                 </a:tc>
@@ -9890,25 +10426,23 @@
                         <a:rPr>
                           <a:latin typeface="Inter"/>
                         </a:rPr>
-                        <a:t>091b0cf9</a:t>
-                      </a:r>
-                    </a:p>
-                  </a:txBody>
-                  <a:tcPr marL="54864" marR="54864" marT="27432" marB="27432" anchor="ctr">
-                    <a:solidFill>
-                      <a:srgbClr val="F5F7F9"/>
-                    </a:solidFill>
-                  </a:tcPr>
-                </a:tc>
-              </a:tr>
-              <a:tr h="396900">
-                <a:tc>
-                  <a:txBody>
-                    <a:bodyPr/>
-                    <a:lstStyle/>
-                    <a:p>
-                      <a:pPr>
-                        <a:defRPr sz="650" b="1">
+                        <a:t>2026-09-30</a:t>
+                      </a:r>
+                    </a:p>
+                  </a:txBody>
+                  <a:tcPr marL="54864" marR="54864" marT="27432" marB="27432" anchor="ctr">
+                    <a:solidFill>
+                      <a:srgbClr val="FFFFFF"/>
+                    </a:solidFill>
+                  </a:tcPr>
+                </a:tc>
+                <a:tc>
+                  <a:txBody>
+                    <a:bodyPr/>
+                    <a:lstStyle/>
+                    <a:p>
+                      <a:pPr>
+                        <a:defRPr sz="650" b="0">
                           <a:solidFill>
                             <a:srgbClr val="0D1117"/>
                           </a:solidFill>
@@ -9919,7 +10453,7 @@
                         <a:rPr>
                           <a:latin typeface="Inter"/>
                         </a:rPr>
-                        <a:t>S3</a:t>
+                        <a:t>Gradient-governed review evidence</a:t>
                       </a:r>
                     </a:p>
                   </a:txBody>
@@ -9946,88 +10480,7 @@
                         <a:rPr>
                           <a:latin typeface="Inter"/>
                         </a:rPr>
-                        <a:t>Synthetic DDQ file (sha256)</a:t>
-                      </a:r>
-                    </a:p>
-                  </a:txBody>
-                  <a:tcPr marL="54864" marR="54864" marT="27432" marB="27432" anchor="ctr">
-                    <a:solidFill>
-                      <a:srgbClr val="FFFFFF"/>
-                    </a:solidFill>
-                  </a:tcPr>
-                </a:tc>
-                <a:tc>
-                  <a:txBody>
-                    <a:bodyPr/>
-                    <a:lstStyle/>
-                    <a:p>
-                      <a:pPr>
-                        <a:defRPr sz="650" b="0">
-                          <a:solidFill>
-                            <a:srgbClr val="0D1117"/>
-                          </a:solidFill>
-                          <a:latin typeface="Inter"/>
-                        </a:defRPr>
-                      </a:pPr>
-                      <a:r>
-                        <a:rPr>
-                          <a:latin typeface="Inter"/>
-                        </a:rPr>
-                        <a:t>—</a:t>
-                      </a:r>
-                    </a:p>
-                  </a:txBody>
-                  <a:tcPr marL="54864" marR="54864" marT="27432" marB="27432" anchor="ctr">
-                    <a:solidFill>
-                      <a:srgbClr val="FFFFFF"/>
-                    </a:solidFill>
-                  </a:tcPr>
-                </a:tc>
-                <a:tc>
-                  <a:txBody>
-                    <a:bodyPr/>
-                    <a:lstStyle/>
-                    <a:p>
-                      <a:pPr>
-                        <a:defRPr sz="650" b="0">
-                          <a:solidFill>
-                            <a:srgbClr val="0D1117"/>
-                          </a:solidFill>
-                          <a:latin typeface="Inter"/>
-                        </a:defRPr>
-                      </a:pPr>
-                      <a:r>
-                        <a:rPr>
-                          <a:latin typeface="Inter"/>
-                        </a:rPr>
-                        <a:t>2026-09-30</a:t>
-                      </a:r>
-                    </a:p>
-                  </a:txBody>
-                  <a:tcPr marL="54864" marR="54864" marT="27432" marB="27432" anchor="ctr">
-                    <a:solidFill>
-                      <a:srgbClr val="FFFFFF"/>
-                    </a:solidFill>
-                  </a:tcPr>
-                </a:tc>
-                <a:tc>
-                  <a:txBody>
-                    <a:bodyPr/>
-                    <a:lstStyle/>
-                    <a:p>
-                      <a:pPr>
-                        <a:defRPr sz="650" b="0">
-                          <a:solidFill>
-                            <a:srgbClr val="0D1117"/>
-                          </a:solidFill>
-                          <a:latin typeface="Inter"/>
-                        </a:defRPr>
-                      </a:pPr>
-                      <a:r>
-                        <a:rPr>
-                          <a:latin typeface="Inter"/>
-                        </a:rPr>
-                        <a:t>—</a:t>
+                        <a:t>not_applicable: user document validation is not applicable</a:t>
                       </a:r>
                     </a:p>
                   </a:txBody>
@@ -10071,7 +10524,49 @@
       </p:graphicFrame>
       <p:sp>
         <p:nvSpPr>
-          <p:cNvPr id="9" name="TextBox 8"/>
+          <p:cNvPr id="10" name="TextBox 9"/>
+          <p:cNvSpPr txBox="1"/>
+          <p:nvPr/>
+        </p:nvSpPr>
+        <p:spPr>
+          <a:xfrm>
+            <a:off x="640080" y="3004917"/>
+            <a:ext cx="10908792" cy="164592"/>
+          </a:xfrm>
+          <a:prstGeom prst="rect">
+            <a:avLst/>
+          </a:prstGeom>
+          <a:noFill/>
+        </p:spPr>
+        <p:txBody>
+          <a:bodyPr wrap="none" lIns="9144" rIns="9144" tIns="9144" bIns="9144" anchor="t">
+            <a:spAutoFit/>
+          </a:bodyPr>
+          <a:lstStyle/>
+          <a:p>
+            <a:pPr algn="l">
+              <a:spcAft>
+                <a:spcPts val="0"/>
+              </a:spcAft>
+              <a:defRPr sz="680" b="0">
+                <a:solidFill>
+                  <a:srgbClr val="8A94A1"/>
+                </a:solidFill>
+                <a:latin typeface="Inter"/>
+              </a:defRPr>
+            </a:pPr>
+            <a:r>
+              <a:rPr>
+                <a:latin typeface="Inter"/>
+              </a:rPr>
+              <a:t>Illustrative, Gradient Maintained — demo data, not the client's holdings or managers. All organizations, portfolios, managers and results in this public example are illustrative.</a:t>
+            </a:r>
+          </a:p>
+        </p:txBody>
+      </p:sp>
+      <p:sp>
+        <p:nvSpPr>
+          <p:cNvPr id="11" name="TextBox 10"/>
           <p:cNvSpPr txBox="1"/>
           <p:nvPr/>
         </p:nvSpPr>
@@ -10113,7 +10608,7 @@
       </p:sp>
       <p:graphicFrame>
         <p:nvGraphicFramePr>
-          <p:cNvPr id="10" name="Table 9"/>
+          <p:cNvPr id="12" name="Table 11"/>
           <p:cNvGraphicFramePr>
             <a:graphicFrameLocks noGrp="1"/>
           </p:cNvGraphicFramePr>
@@ -10472,7 +10967,7 @@
       </p:graphicFrame>
       <p:sp>
         <p:nvSpPr>
-          <p:cNvPr id="11" name="Rectangle 10"/>
+          <p:cNvPr id="13" name="Rectangle 12"/>
           <p:cNvSpPr/>
           <p:nvPr/>
         </p:nvSpPr>
@@ -10521,7 +11016,7 @@
       </p:sp>
       <p:sp>
         <p:nvSpPr>
-          <p:cNvPr id="12" name="Rectangle 11"/>
+          <p:cNvPr id="14" name="Rectangle 13"/>
           <p:cNvSpPr/>
           <p:nvPr/>
         </p:nvSpPr>
@@ -10570,7 +11065,7 @@
       </p:sp>
       <p:sp>
         <p:nvSpPr>
-          <p:cNvPr id="13" name="TextBox 12"/>
+          <p:cNvPr id="15" name="TextBox 14"/>
           <p:cNvSpPr txBox="1"/>
           <p:nvPr/>
         </p:nvSpPr>
@@ -10612,7 +11107,7 @@
       </p:sp>
       <p:sp>
         <p:nvSpPr>
-          <p:cNvPr id="14" name="TextBox 13"/>
+          <p:cNvPr id="16" name="TextBox 15"/>
           <p:cNvSpPr txBox="1"/>
           <p:nvPr/>
         </p:nvSpPr>
@@ -10654,7 +11149,7 @@
       </p:sp>
       <p:sp>
         <p:nvSpPr>
-          <p:cNvPr id="15" name="Rectangle 14"/>
+          <p:cNvPr id="17" name="Rectangle 16"/>
           <p:cNvSpPr/>
           <p:nvPr/>
         </p:nvSpPr>
@@ -10703,7 +11198,7 @@
       </p:sp>
       <p:sp>
         <p:nvSpPr>
-          <p:cNvPr id="16" name="TextBox 15"/>
+          <p:cNvPr id="18" name="TextBox 17"/>
           <p:cNvSpPr txBox="1"/>
           <p:nvPr/>
         </p:nvSpPr>
@@ -10745,7 +11240,7 @@
       </p:sp>
       <p:sp>
         <p:nvSpPr>
-          <p:cNvPr id="17" name="TextBox 16"/>
+          <p:cNvPr id="19" name="TextBox 18"/>
           <p:cNvSpPr txBox="1"/>
           <p:nvPr/>
         </p:nvSpPr>
@@ -10780,14 +11275,14 @@
               <a:rPr>
                 <a:latin typeface="Inter"/>
               </a:rPr>
-              <a:t>TEST FIXTURE — synthetic DDQ, not a manager document · Data as of 2026-10-01 (Form ADV); DDQ responses as of 2026-09-30</a:t>
-            </a:r>
-          </a:p>
-        </p:txBody>
-      </p:sp>
-      <p:sp>
-        <p:nvSpPr>
-          <p:cNvPr id="18" name="TextBox 17"/>
+              <a:t>Confidential — manager diligence review · Data as of 2026-10-01 (Form ADV); DDQ responses as of 2026-09-30</a:t>
+            </a:r>
+          </a:p>
+        </p:txBody>
+      </p:sp>
+      <p:sp>
+        <p:nvSpPr>
+          <p:cNvPr id="20" name="TextBox 19"/>
           <p:cNvSpPr txBox="1"/>
           <p:nvPr/>
         </p:nvSpPr>
@@ -10902,6 +11397,48 @@
         </p:nvSpPr>
         <p:spPr>
           <a:xfrm>
+            <a:off x="5897880" y="310896"/>
+            <a:ext cx="4800600" cy="256032"/>
+          </a:xfrm>
+          <a:prstGeom prst="rect">
+            <a:avLst/>
+          </a:prstGeom>
+          <a:noFill/>
+        </p:spPr>
+        <p:txBody>
+          <a:bodyPr wrap="none" lIns="9144" rIns="9144" tIns="9144" bIns="9144" anchor="t">
+            <a:spAutoFit/>
+          </a:bodyPr>
+          <a:lstStyle/>
+          <a:p>
+            <a:pPr algn="r">
+              <a:spcAft>
+                <a:spcPts val="0"/>
+              </a:spcAft>
+              <a:defRPr sz="680" b="1">
+                <a:solidFill>
+                  <a:srgbClr val="4F6B00"/>
+                </a:solidFill>
+                <a:latin typeface="Inter"/>
+              </a:defRPr>
+            </a:pPr>
+            <a:r>
+              <a:rPr>
+                <a:latin typeface="Inter"/>
+              </a:rPr>
+              <a:t>Illustrative, Gradient Maintained — demo data, not the client's holdings or managers</a:t>
+            </a:r>
+          </a:p>
+        </p:txBody>
+      </p:sp>
+      <p:sp>
+        <p:nvSpPr>
+          <p:cNvPr id="4" name="TextBox 3"/>
+          <p:cNvSpPr txBox="1"/>
+          <p:nvPr/>
+        </p:nvSpPr>
+        <p:spPr>
+          <a:xfrm>
             <a:off x="640080" y="566928"/>
             <a:ext cx="10058400" cy="530352"/>
           </a:xfrm>
@@ -10931,14 +11468,14 @@
               <a:rPr>
                 <a:latin typeface="Inter"/>
               </a:rPr>
-              <a:t>Appendix — Sources and method — continued</a:t>
-            </a:r>
-          </a:p>
-        </p:txBody>
-      </p:sp>
-      <p:sp>
-        <p:nvSpPr>
-          <p:cNvPr id="4" name="Rectangle 3"/>
+              <a:t>Appendix — Sources and methods — continued</a:t>
+            </a:r>
+          </a:p>
+        </p:txBody>
+      </p:sp>
+      <p:sp>
+        <p:nvSpPr>
+          <p:cNvPr id="5" name="Rectangle 4"/>
           <p:cNvSpPr/>
           <p:nvPr/>
         </p:nvSpPr>
@@ -10987,7 +11524,7 @@
       </p:sp>
       <p:sp>
         <p:nvSpPr>
-          <p:cNvPr id="5" name="Rectangle 4"/>
+          <p:cNvPr id="6" name="Rectangle 5"/>
           <p:cNvSpPr/>
           <p:nvPr/>
         </p:nvSpPr>
@@ -11036,7 +11573,7 @@
       </p:sp>
       <p:sp>
         <p:nvSpPr>
-          <p:cNvPr id="6" name="TextBox 5"/>
+          <p:cNvPr id="7" name="TextBox 6"/>
           <p:cNvSpPr txBox="1"/>
           <p:nvPr/>
         </p:nvSpPr>
@@ -11071,14 +11608,14 @@
               <a:rPr>
                 <a:latin typeface="Inter"/>
               </a:rPr>
-              <a:t>06</a:t>
-            </a:r>
-          </a:p>
-        </p:txBody>
-      </p:sp>
-      <p:sp>
-        <p:nvSpPr>
-          <p:cNvPr id="7" name="TextBox 6"/>
+              <a:t>A</a:t>
+            </a:r>
+          </a:p>
+        </p:txBody>
+      </p:sp>
+      <p:sp>
+        <p:nvSpPr>
+          <p:cNvPr id="8" name="TextBox 7"/>
           <p:cNvSpPr txBox="1"/>
           <p:nvPr/>
         </p:nvSpPr>
@@ -11120,7 +11657,7 @@
       </p:sp>
       <p:graphicFrame>
         <p:nvGraphicFramePr>
-          <p:cNvPr id="8" name="Table 7"/>
+          <p:cNvPr id="9" name="Table 8"/>
           <p:cNvGraphicFramePr>
             <a:graphicFrameLocks noGrp="1"/>
           </p:cNvGraphicFramePr>
@@ -11128,7 +11665,7 @@
         </p:nvGraphicFramePr>
         <p:xfrm>
           <a:off x="640080" y="1600200"/>
-          <a:ext cx="10908792" cy="2881268"/>
+          <a:ext cx="10908792" cy="2885467"/>
         </p:xfrm>
         <a:graphic>
           <a:graphicData uri="http://schemas.openxmlformats.org/drawingml/2006/table">
@@ -11140,7 +11677,7 @@
                 <a:gridCol w="2011680"/>
                 <a:gridCol w="8897112"/>
               </a:tblGrid>
-              <a:tr h="720317">
+              <a:tr h="721366">
                 <a:tc>
                   <a:txBody>
                     <a:bodyPr/>
@@ -11196,7 +11733,7 @@
                   </a:tcPr>
                 </a:tc>
               </a:tr>
-              <a:tr h="720317">
+              <a:tr h="721366">
                 <a:tc>
                   <a:txBody>
                     <a:bodyPr/>
@@ -11252,7 +11789,7 @@
                   </a:tcPr>
                 </a:tc>
               </a:tr>
-              <a:tr h="720317">
+              <a:tr h="721366">
                 <a:tc>
                   <a:txBody>
                     <a:bodyPr/>
@@ -11308,7 +11845,7 @@
                   </a:tcPr>
                 </a:tc>
               </a:tr>
-              <a:tr h="720317">
+              <a:tr h="721369">
                 <a:tc>
                   <a:txBody>
                     <a:bodyPr/>
@@ -11370,14 +11907,14 @@
       </p:graphicFrame>
       <p:sp>
         <p:nvSpPr>
-          <p:cNvPr id="9" name="Rectangle 8"/>
+          <p:cNvPr id="10" name="Rectangle 9"/>
           <p:cNvSpPr/>
           <p:nvPr/>
         </p:nvSpPr>
         <p:spPr>
           <a:xfrm>
-            <a:off x="640080" y="4591196"/>
-            <a:ext cx="10908792" cy="1626723"/>
+            <a:off x="640080" y="4595395"/>
+            <a:ext cx="10908792" cy="1622524"/>
           </a:xfrm>
           <a:prstGeom prst="rect">
             <a:avLst/>
@@ -11419,14 +11956,14 @@
       </p:sp>
       <p:sp>
         <p:nvSpPr>
-          <p:cNvPr id="10" name="Rectangle 9"/>
+          <p:cNvPr id="11" name="Rectangle 10"/>
           <p:cNvSpPr/>
           <p:nvPr/>
         </p:nvSpPr>
         <p:spPr>
           <a:xfrm>
-            <a:off x="640080" y="4591196"/>
-            <a:ext cx="54864" cy="1626723"/>
+            <a:off x="640080" y="4595395"/>
+            <a:ext cx="54864" cy="1622524"/>
           </a:xfrm>
           <a:prstGeom prst="rect">
             <a:avLst/>
@@ -11468,13 +12005,13 @@
       </p:sp>
       <p:sp>
         <p:nvSpPr>
-          <p:cNvPr id="11" name="TextBox 10"/>
+          <p:cNvPr id="12" name="TextBox 11"/>
           <p:cNvSpPr txBox="1"/>
           <p:nvPr/>
         </p:nvSpPr>
         <p:spPr>
           <a:xfrm>
-            <a:off x="804671" y="4700924"/>
+            <a:off x="804671" y="4705123"/>
             <a:ext cx="10616184" cy="228600"/>
           </a:xfrm>
           <a:prstGeom prst="rect">
@@ -11510,14 +12047,14 @@
       </p:sp>
       <p:sp>
         <p:nvSpPr>
-          <p:cNvPr id="12" name="TextBox 11"/>
+          <p:cNvPr id="13" name="TextBox 12"/>
           <p:cNvSpPr txBox="1"/>
           <p:nvPr/>
         </p:nvSpPr>
         <p:spPr>
           <a:xfrm>
-            <a:off x="804671" y="4984388"/>
-            <a:ext cx="10616184" cy="1142091"/>
+            <a:off x="804671" y="4988587"/>
+            <a:ext cx="10616184" cy="1137892"/>
           </a:xfrm>
           <a:prstGeom prst="rect">
             <a:avLst/>
@@ -11545,14 +12082,14 @@
               <a:rPr>
                 <a:latin typeface="Inter"/>
               </a:rPr>
-              <a:t>TEST FIXTURE. The DDQ is synthetic and was written by Gradient for QA; it was not issued by Ridgeview Example Advisors. Filed values are Form ADV data reported by the adviser and normalized by Gradient; they are not SEC verification. Not investment advice.</a:t>
-            </a:r>
-          </a:p>
-        </p:txBody>
-      </p:sp>
-      <p:sp>
-        <p:nvSpPr>
-          <p:cNvPr id="13" name="Rectangle 12"/>
+              <a:t>Illustrative sample. The DDQ is synthetic and was written by Gradient for QA; it was not issued by Ridgeview Advisors. Filed values are Form ADV data reported by the adviser and normalized by Gradient; they are not SEC verification. Not investment advice.</a:t>
+            </a:r>
+          </a:p>
+        </p:txBody>
+      </p:sp>
+      <p:sp>
+        <p:nvSpPr>
+          <p:cNvPr id="14" name="Rectangle 13"/>
           <p:cNvSpPr/>
           <p:nvPr/>
         </p:nvSpPr>
@@ -11601,7 +12138,7 @@
       </p:sp>
       <p:sp>
         <p:nvSpPr>
-          <p:cNvPr id="14" name="TextBox 13"/>
+          <p:cNvPr id="15" name="TextBox 14"/>
           <p:cNvSpPr txBox="1"/>
           <p:nvPr/>
         </p:nvSpPr>
@@ -11643,7 +12180,7 @@
       </p:sp>
       <p:sp>
         <p:nvSpPr>
-          <p:cNvPr id="15" name="TextBox 14"/>
+          <p:cNvPr id="16" name="TextBox 15"/>
           <p:cNvSpPr txBox="1"/>
           <p:nvPr/>
         </p:nvSpPr>
@@ -11678,14 +12215,14 @@
               <a:rPr>
                 <a:latin typeface="Inter"/>
               </a:rPr>
-              <a:t>TEST FIXTURE — synthetic DDQ, not a manager document · Data as of 2026-10-01 (Form ADV); DDQ responses as of 2026-09-30</a:t>
-            </a:r>
-          </a:p>
-        </p:txBody>
-      </p:sp>
-      <p:sp>
-        <p:nvSpPr>
-          <p:cNvPr id="16" name="TextBox 15"/>
+              <a:t>Confidential — manager diligence review · Data as of 2026-10-01 (Form ADV); DDQ responses as of 2026-09-30</a:t>
+            </a:r>
+          </a:p>
+        </p:txBody>
+      </p:sp>
+      <p:sp>
+        <p:nvSpPr>
+          <p:cNvPr id="17" name="TextBox 16"/>
           <p:cNvSpPr txBox="1"/>
           <p:nvPr/>
         </p:nvSpPr>
@@ -11801,7 +12338,7 @@
         <p:spPr>
           <a:xfrm>
             <a:off x="640080" y="329184"/>
-            <a:ext cx="9875520" cy="182880"/>
+            <a:ext cx="5303520" cy="182880"/>
           </a:xfrm>
           <a:prstGeom prst="rect">
             <a:avLst/>
@@ -11842,6 +12379,48 @@
         </p:nvSpPr>
         <p:spPr>
           <a:xfrm>
+            <a:off x="5897880" y="310896"/>
+            <a:ext cx="4800600" cy="256032"/>
+          </a:xfrm>
+          <a:prstGeom prst="rect">
+            <a:avLst/>
+          </a:prstGeom>
+          <a:noFill/>
+        </p:spPr>
+        <p:txBody>
+          <a:bodyPr wrap="none" lIns="9144" rIns="9144" tIns="9144" bIns="9144" anchor="t">
+            <a:spAutoFit/>
+          </a:bodyPr>
+          <a:lstStyle/>
+          <a:p>
+            <a:pPr algn="r">
+              <a:spcAft>
+                <a:spcPts val="0"/>
+              </a:spcAft>
+              <a:defRPr sz="680" b="1">
+                <a:solidFill>
+                  <a:srgbClr val="4F6B00"/>
+                </a:solidFill>
+                <a:latin typeface="Inter"/>
+              </a:defRPr>
+            </a:pPr>
+            <a:r>
+              <a:rPr>
+                <a:latin typeface="Inter"/>
+              </a:rPr>
+              <a:t>Illustrative, Gradient Maintained — demo data, not the client's holdings or managers</a:t>
+            </a:r>
+          </a:p>
+        </p:txBody>
+      </p:sp>
+      <p:sp>
+        <p:nvSpPr>
+          <p:cNvPr id="5" name="TextBox 4"/>
+          <p:cNvSpPr txBox="1"/>
+          <p:nvPr/>
+        </p:nvSpPr>
+        <p:spPr>
+          <a:xfrm>
             <a:off x="640080" y="566928"/>
             <a:ext cx="10058400" cy="530352"/>
           </a:xfrm>
@@ -11878,7 +12457,7 @@
       </p:sp>
       <p:sp>
         <p:nvSpPr>
-          <p:cNvPr id="5" name="Rectangle 4"/>
+          <p:cNvPr id="6" name="Rectangle 5"/>
           <p:cNvSpPr/>
           <p:nvPr/>
         </p:nvSpPr>
@@ -11927,7 +12506,7 @@
       </p:sp>
       <p:sp>
         <p:nvSpPr>
-          <p:cNvPr id="6" name="Rectangle 5"/>
+          <p:cNvPr id="7" name="Rectangle 6"/>
           <p:cNvSpPr/>
           <p:nvPr/>
         </p:nvSpPr>
@@ -11976,7 +12555,7 @@
       </p:sp>
       <p:sp>
         <p:nvSpPr>
-          <p:cNvPr id="7" name="TextBox 6"/>
+          <p:cNvPr id="8" name="TextBox 7"/>
           <p:cNvSpPr txBox="1"/>
           <p:nvPr/>
         </p:nvSpPr>
@@ -12018,7 +12597,7 @@
       </p:sp>
       <p:sp>
         <p:nvSpPr>
-          <p:cNvPr id="8" name="Rectangle 7"/>
+          <p:cNvPr id="9" name="Rectangle 8"/>
           <p:cNvSpPr/>
           <p:nvPr/>
         </p:nvSpPr>
@@ -12067,7 +12646,7 @@
       </p:sp>
       <p:sp>
         <p:nvSpPr>
-          <p:cNvPr id="9" name="Rectangle 8"/>
+          <p:cNvPr id="10" name="Rectangle 9"/>
           <p:cNvSpPr/>
           <p:nvPr/>
         </p:nvSpPr>
@@ -12116,7 +12695,7 @@
       </p:sp>
       <p:sp>
         <p:nvSpPr>
-          <p:cNvPr id="10" name="TextBox 9"/>
+          <p:cNvPr id="11" name="TextBox 10"/>
           <p:cNvSpPr txBox="1"/>
           <p:nvPr/>
         </p:nvSpPr>
@@ -12158,7 +12737,7 @@
       </p:sp>
       <p:sp>
         <p:nvSpPr>
-          <p:cNvPr id="11" name="TextBox 10"/>
+          <p:cNvPr id="12" name="TextBox 11"/>
           <p:cNvSpPr txBox="1"/>
           <p:nvPr/>
         </p:nvSpPr>
@@ -12200,7 +12779,7 @@
       </p:sp>
       <p:sp>
         <p:nvSpPr>
-          <p:cNvPr id="12" name="Rectangle 11"/>
+          <p:cNvPr id="13" name="Rectangle 12"/>
           <p:cNvSpPr/>
           <p:nvPr/>
         </p:nvSpPr>
@@ -12249,7 +12828,7 @@
       </p:sp>
       <p:sp>
         <p:nvSpPr>
-          <p:cNvPr id="13" name="Rectangle 12"/>
+          <p:cNvPr id="14" name="Rectangle 13"/>
           <p:cNvSpPr/>
           <p:nvPr/>
         </p:nvSpPr>
@@ -12298,7 +12877,7 @@
       </p:sp>
       <p:sp>
         <p:nvSpPr>
-          <p:cNvPr id="14" name="TextBox 13"/>
+          <p:cNvPr id="15" name="TextBox 14"/>
           <p:cNvSpPr txBox="1"/>
           <p:nvPr/>
         </p:nvSpPr>
@@ -12340,7 +12919,7 @@
       </p:sp>
       <p:sp>
         <p:nvSpPr>
-          <p:cNvPr id="15" name="TextBox 14"/>
+          <p:cNvPr id="16" name="TextBox 15"/>
           <p:cNvSpPr txBox="1"/>
           <p:nvPr/>
         </p:nvSpPr>
@@ -12382,7 +12961,7 @@
       </p:sp>
       <p:sp>
         <p:nvSpPr>
-          <p:cNvPr id="16" name="TextBox 15"/>
+          <p:cNvPr id="17" name="TextBox 16"/>
           <p:cNvSpPr txBox="1"/>
           <p:nvPr/>
         </p:nvSpPr>
@@ -12424,7 +13003,7 @@
       </p:sp>
       <p:sp>
         <p:nvSpPr>
-          <p:cNvPr id="17" name="Rectangle 16"/>
+          <p:cNvPr id="18" name="Rectangle 17"/>
           <p:cNvSpPr/>
           <p:nvPr/>
         </p:nvSpPr>
@@ -12473,7 +13052,7 @@
       </p:sp>
       <p:sp>
         <p:nvSpPr>
-          <p:cNvPr id="18" name="Rectangle 17"/>
+          <p:cNvPr id="19" name="Rectangle 18"/>
           <p:cNvSpPr/>
           <p:nvPr/>
         </p:nvSpPr>
@@ -12522,7 +13101,7 @@
       </p:sp>
       <p:sp>
         <p:nvSpPr>
-          <p:cNvPr id="19" name="TextBox 18"/>
+          <p:cNvPr id="20" name="TextBox 19"/>
           <p:cNvSpPr txBox="1"/>
           <p:nvPr/>
         </p:nvSpPr>
@@ -12564,7 +13143,7 @@
       </p:sp>
       <p:sp>
         <p:nvSpPr>
-          <p:cNvPr id="20" name="TextBox 19"/>
+          <p:cNvPr id="21" name="TextBox 20"/>
           <p:cNvSpPr txBox="1"/>
           <p:nvPr/>
         </p:nvSpPr>
@@ -12606,7 +13185,7 @@
       </p:sp>
       <p:sp>
         <p:nvSpPr>
-          <p:cNvPr id="21" name="TextBox 20"/>
+          <p:cNvPr id="22" name="TextBox 21"/>
           <p:cNvSpPr txBox="1"/>
           <p:nvPr/>
         </p:nvSpPr>
@@ -12648,7 +13227,7 @@
       </p:sp>
       <p:sp>
         <p:nvSpPr>
-          <p:cNvPr id="22" name="Rectangle 21"/>
+          <p:cNvPr id="23" name="Rectangle 22"/>
           <p:cNvSpPr/>
           <p:nvPr/>
         </p:nvSpPr>
@@ -12697,7 +13276,7 @@
       </p:sp>
       <p:sp>
         <p:nvSpPr>
-          <p:cNvPr id="23" name="Rectangle 22"/>
+          <p:cNvPr id="24" name="Rectangle 23"/>
           <p:cNvSpPr/>
           <p:nvPr/>
         </p:nvSpPr>
@@ -12746,7 +13325,7 @@
       </p:sp>
       <p:sp>
         <p:nvSpPr>
-          <p:cNvPr id="24" name="TextBox 23"/>
+          <p:cNvPr id="25" name="TextBox 24"/>
           <p:cNvSpPr txBox="1"/>
           <p:nvPr/>
         </p:nvSpPr>
@@ -12788,7 +13367,7 @@
       </p:sp>
       <p:sp>
         <p:nvSpPr>
-          <p:cNvPr id="25" name="TextBox 24"/>
+          <p:cNvPr id="26" name="TextBox 25"/>
           <p:cNvSpPr txBox="1"/>
           <p:nvPr/>
         </p:nvSpPr>
@@ -12830,7 +13409,7 @@
       </p:sp>
       <p:sp>
         <p:nvSpPr>
-          <p:cNvPr id="26" name="TextBox 25"/>
+          <p:cNvPr id="27" name="TextBox 26"/>
           <p:cNvSpPr txBox="1"/>
           <p:nvPr/>
         </p:nvSpPr>
@@ -12872,7 +13451,7 @@
       </p:sp>
       <p:sp>
         <p:nvSpPr>
-          <p:cNvPr id="27" name="Rectangle 26"/>
+          <p:cNvPr id="28" name="Rectangle 27"/>
           <p:cNvSpPr/>
           <p:nvPr/>
         </p:nvSpPr>
@@ -12921,7 +13500,7 @@
       </p:sp>
       <p:sp>
         <p:nvSpPr>
-          <p:cNvPr id="28" name="Rectangle 27"/>
+          <p:cNvPr id="29" name="Rectangle 28"/>
           <p:cNvSpPr/>
           <p:nvPr/>
         </p:nvSpPr>
@@ -12970,7 +13549,7 @@
       </p:sp>
       <p:sp>
         <p:nvSpPr>
-          <p:cNvPr id="29" name="TextBox 28"/>
+          <p:cNvPr id="30" name="TextBox 29"/>
           <p:cNvSpPr txBox="1"/>
           <p:nvPr/>
         </p:nvSpPr>
@@ -13012,7 +13591,7 @@
       </p:sp>
       <p:sp>
         <p:nvSpPr>
-          <p:cNvPr id="30" name="TextBox 29"/>
+          <p:cNvPr id="31" name="TextBox 30"/>
           <p:cNvSpPr txBox="1"/>
           <p:nvPr/>
         </p:nvSpPr>
@@ -13054,7 +13633,7 @@
       </p:sp>
       <p:sp>
         <p:nvSpPr>
-          <p:cNvPr id="31" name="TextBox 30"/>
+          <p:cNvPr id="32" name="TextBox 31"/>
           <p:cNvSpPr txBox="1"/>
           <p:nvPr/>
         </p:nvSpPr>
@@ -13096,7 +13675,7 @@
       </p:sp>
       <p:sp>
         <p:nvSpPr>
-          <p:cNvPr id="32" name="Rectangle 31"/>
+          <p:cNvPr id="33" name="Rectangle 32"/>
           <p:cNvSpPr/>
           <p:nvPr/>
         </p:nvSpPr>
@@ -13145,7 +13724,7 @@
       </p:sp>
       <p:sp>
         <p:nvSpPr>
-          <p:cNvPr id="33" name="Rectangle 32"/>
+          <p:cNvPr id="34" name="Rectangle 33"/>
           <p:cNvSpPr/>
           <p:nvPr/>
         </p:nvSpPr>
@@ -13194,7 +13773,7 @@
       </p:sp>
       <p:sp>
         <p:nvSpPr>
-          <p:cNvPr id="34" name="Rectangle 33"/>
+          <p:cNvPr id="35" name="Rectangle 34"/>
           <p:cNvSpPr/>
           <p:nvPr/>
         </p:nvSpPr>
@@ -13243,7 +13822,7 @@
       </p:sp>
       <p:sp>
         <p:nvSpPr>
-          <p:cNvPr id="35" name="TextBox 34"/>
+          <p:cNvPr id="36" name="TextBox 35"/>
           <p:cNvSpPr txBox="1"/>
           <p:nvPr/>
         </p:nvSpPr>
@@ -13285,7 +13864,7 @@
       </p:sp>
       <p:sp>
         <p:nvSpPr>
-          <p:cNvPr id="36" name="TextBox 35"/>
+          <p:cNvPr id="37" name="TextBox 36"/>
           <p:cNvSpPr txBox="1"/>
           <p:nvPr/>
         </p:nvSpPr>
@@ -13327,7 +13906,7 @@
       </p:sp>
       <p:sp>
         <p:nvSpPr>
-          <p:cNvPr id="37" name="Rectangle 36"/>
+          <p:cNvPr id="38" name="Rectangle 37"/>
           <p:cNvSpPr/>
           <p:nvPr/>
         </p:nvSpPr>
@@ -13376,7 +13955,7 @@
       </p:sp>
       <p:sp>
         <p:nvSpPr>
-          <p:cNvPr id="38" name="TextBox 37"/>
+          <p:cNvPr id="39" name="TextBox 38"/>
           <p:cNvSpPr txBox="1"/>
           <p:nvPr/>
         </p:nvSpPr>
@@ -13418,7 +13997,7 @@
       </p:sp>
       <p:sp>
         <p:nvSpPr>
-          <p:cNvPr id="39" name="TextBox 38"/>
+          <p:cNvPr id="40" name="TextBox 39"/>
           <p:cNvSpPr txBox="1"/>
           <p:nvPr/>
         </p:nvSpPr>
@@ -13453,14 +14032,14 @@
               <a:rPr>
                 <a:latin typeface="Inter"/>
               </a:rPr>
-              <a:t>TEST FIXTURE — synthetic DDQ, not a manager document · Data as of 2026-10-01 (Form ADV); DDQ responses as of 2026-09-30</a:t>
-            </a:r>
-          </a:p>
-        </p:txBody>
-      </p:sp>
-      <p:sp>
-        <p:nvSpPr>
-          <p:cNvPr id="40" name="TextBox 39"/>
+              <a:t>Confidential — manager diligence review · Data as of 2026-10-01 (Form ADV); DDQ responses as of 2026-09-30</a:t>
+            </a:r>
+          </a:p>
+        </p:txBody>
+      </p:sp>
+      <p:sp>
+        <p:nvSpPr>
+          <p:cNvPr id="41" name="TextBox 40"/>
           <p:cNvSpPr txBox="1"/>
           <p:nvPr/>
         </p:nvSpPr>
@@ -13576,7 +14155,7 @@
         <p:spPr>
           <a:xfrm>
             <a:off x="640080" y="329184"/>
-            <a:ext cx="9875520" cy="182880"/>
+            <a:ext cx="5303520" cy="182880"/>
           </a:xfrm>
           <a:prstGeom prst="rect">
             <a:avLst/>
@@ -13617,6 +14196,48 @@
         </p:nvSpPr>
         <p:spPr>
           <a:xfrm>
+            <a:off x="5897880" y="310896"/>
+            <a:ext cx="4800600" cy="256032"/>
+          </a:xfrm>
+          <a:prstGeom prst="rect">
+            <a:avLst/>
+          </a:prstGeom>
+          <a:noFill/>
+        </p:spPr>
+        <p:txBody>
+          <a:bodyPr wrap="none" lIns="9144" rIns="9144" tIns="9144" bIns="9144" anchor="t">
+            <a:spAutoFit/>
+          </a:bodyPr>
+          <a:lstStyle/>
+          <a:p>
+            <a:pPr algn="r">
+              <a:spcAft>
+                <a:spcPts val="0"/>
+              </a:spcAft>
+              <a:defRPr sz="680" b="1">
+                <a:solidFill>
+                  <a:srgbClr val="4F6B00"/>
+                </a:solidFill>
+                <a:latin typeface="Inter"/>
+              </a:defRPr>
+            </a:pPr>
+            <a:r>
+              <a:rPr>
+                <a:latin typeface="Inter"/>
+              </a:rPr>
+              <a:t>Illustrative, Gradient Maintained — demo data, not the client's holdings or managers</a:t>
+            </a:r>
+          </a:p>
+        </p:txBody>
+      </p:sp>
+      <p:sp>
+        <p:nvSpPr>
+          <p:cNvPr id="5" name="TextBox 4"/>
+          <p:cNvSpPr txBox="1"/>
+          <p:nvPr/>
+        </p:nvSpPr>
+        <p:spPr>
+          <a:xfrm>
             <a:off x="640080" y="566928"/>
             <a:ext cx="10058400" cy="530352"/>
           </a:xfrm>
@@ -13653,7 +14274,7 @@
       </p:sp>
       <p:sp>
         <p:nvSpPr>
-          <p:cNvPr id="5" name="Rectangle 4"/>
+          <p:cNvPr id="6" name="Rectangle 5"/>
           <p:cNvSpPr/>
           <p:nvPr/>
         </p:nvSpPr>
@@ -13702,7 +14323,7 @@
       </p:sp>
       <p:sp>
         <p:nvSpPr>
-          <p:cNvPr id="6" name="Rectangle 5"/>
+          <p:cNvPr id="7" name="Rectangle 6"/>
           <p:cNvSpPr/>
           <p:nvPr/>
         </p:nvSpPr>
@@ -13751,7 +14372,7 @@
       </p:sp>
       <p:sp>
         <p:nvSpPr>
-          <p:cNvPr id="7" name="TextBox 6"/>
+          <p:cNvPr id="8" name="TextBox 7"/>
           <p:cNvSpPr txBox="1"/>
           <p:nvPr/>
         </p:nvSpPr>
@@ -13793,14 +14414,14 @@
       </p:sp>
       <p:sp>
         <p:nvSpPr>
-          <p:cNvPr id="8" name="Rectangle 7"/>
+          <p:cNvPr id="9" name="Rectangle 8"/>
           <p:cNvSpPr/>
           <p:nvPr/>
         </p:nvSpPr>
         <p:spPr>
           <a:xfrm>
             <a:off x="640080" y="1325880"/>
-            <a:ext cx="10908792" cy="1666773"/>
+            <a:ext cx="10908792" cy="1621195"/>
           </a:xfrm>
           <a:prstGeom prst="rect">
             <a:avLst/>
@@ -13842,14 +14463,14 @@
       </p:sp>
       <p:sp>
         <p:nvSpPr>
-          <p:cNvPr id="9" name="Rectangle 8"/>
+          <p:cNvPr id="10" name="Rectangle 9"/>
           <p:cNvSpPr/>
           <p:nvPr/>
         </p:nvSpPr>
         <p:spPr>
           <a:xfrm>
             <a:off x="640080" y="1325880"/>
-            <a:ext cx="54864" cy="1666773"/>
+            <a:ext cx="54864" cy="1621195"/>
           </a:xfrm>
           <a:prstGeom prst="rect">
             <a:avLst/>
@@ -13891,7 +14512,7 @@
       </p:sp>
       <p:sp>
         <p:nvSpPr>
-          <p:cNvPr id="10" name="TextBox 9"/>
+          <p:cNvPr id="11" name="TextBox 10"/>
           <p:cNvSpPr txBox="1"/>
           <p:nvPr/>
         </p:nvSpPr>
@@ -13933,14 +14554,14 @@
       </p:sp>
       <p:sp>
         <p:nvSpPr>
-          <p:cNvPr id="11" name="TextBox 10"/>
+          <p:cNvPr id="12" name="TextBox 11"/>
           <p:cNvSpPr txBox="1"/>
           <p:nvPr/>
         </p:nvSpPr>
         <p:spPr>
           <a:xfrm>
             <a:off x="804671" y="1719072"/>
-            <a:ext cx="10616184" cy="1182141"/>
+            <a:ext cx="10616184" cy="1136563"/>
           </a:xfrm>
           <a:prstGeom prst="rect">
             <a:avLst/>
@@ -13968,21 +14589,21 @@
               <a:rPr>
                 <a:latin typeface="Inter"/>
               </a:rPr>
-              <a:t>Observation: The fictional TEST report carries a 4 discrepancies found signal [S1]. Why it matters: This signal focuses oversight on the report's most decision-relevant condition. Uncertainty: Evidence coverage may exclude newer or more detailed observations. What would change the view: A governed refresh showing a different signal or breached threshold.</a:t>
-            </a:r>
-          </a:p>
-        </p:txBody>
-      </p:sp>
-      <p:sp>
-        <p:nvSpPr>
-          <p:cNvPr id="12" name="Rectangle 11"/>
+              <a:t>Observation: The sample report carries a 4 discrepancies found signal [S1]. Why it matters: This signal focuses oversight on the report's most decision-relevant condition. Uncertainty: Evidence coverage may exclude newer or more detailed observations. What would change the view: A governed refresh showing a different signal or breached threshold.</a:t>
+            </a:r>
+          </a:p>
+        </p:txBody>
+      </p:sp>
+      <p:sp>
+        <p:nvSpPr>
+          <p:cNvPr id="13" name="Rectangle 12"/>
           <p:cNvSpPr/>
           <p:nvPr/>
         </p:nvSpPr>
         <p:spPr>
           <a:xfrm>
-            <a:off x="640080" y="3102381"/>
-            <a:ext cx="10908792" cy="1451403"/>
+            <a:off x="640080" y="3056803"/>
+            <a:ext cx="10908792" cy="1495413"/>
           </a:xfrm>
           <a:prstGeom prst="rect">
             <a:avLst/>
@@ -14024,14 +14645,14 @@
       </p:sp>
       <p:sp>
         <p:nvSpPr>
-          <p:cNvPr id="13" name="Rectangle 12"/>
+          <p:cNvPr id="14" name="Rectangle 13"/>
           <p:cNvSpPr/>
           <p:nvPr/>
         </p:nvSpPr>
         <p:spPr>
           <a:xfrm>
-            <a:off x="640080" y="3102381"/>
-            <a:ext cx="54864" cy="1451403"/>
+            <a:off x="640080" y="3056803"/>
+            <a:ext cx="54864" cy="1495413"/>
           </a:xfrm>
           <a:prstGeom prst="rect">
             <a:avLst/>
@@ -14073,13 +14694,13 @@
       </p:sp>
       <p:sp>
         <p:nvSpPr>
-          <p:cNvPr id="14" name="TextBox 13"/>
+          <p:cNvPr id="15" name="TextBox 14"/>
           <p:cNvSpPr txBox="1"/>
           <p:nvPr/>
         </p:nvSpPr>
         <p:spPr>
           <a:xfrm>
-            <a:off x="804671" y="3212109"/>
+            <a:off x="804671" y="3166531"/>
             <a:ext cx="10616184" cy="228600"/>
           </a:xfrm>
           <a:prstGeom prst="rect">
@@ -14115,14 +14736,14 @@
       </p:sp>
       <p:sp>
         <p:nvSpPr>
-          <p:cNvPr id="15" name="TextBox 14"/>
+          <p:cNvPr id="16" name="TextBox 15"/>
           <p:cNvSpPr txBox="1"/>
           <p:nvPr/>
         </p:nvSpPr>
         <p:spPr>
           <a:xfrm>
-            <a:off x="804671" y="3495573"/>
-            <a:ext cx="10616184" cy="966771"/>
+            <a:off x="804671" y="3449995"/>
+            <a:ext cx="10616184" cy="1010781"/>
           </a:xfrm>
           <a:prstGeom prst="rect">
             <a:avLst/>
@@ -14150,21 +14771,21 @@
               <a:rPr>
                 <a:latin typeface="Inter"/>
               </a:rPr>
-              <a:t>Observation: Contradicted is 4 in the TEST evidence [S2]. Why it matters: This measure establishes the baseline for comparing later governed results. Uncertainty: The source basis may omit newer observations outside this fixture. What would change the view: A refreshed source report showing a change above 1%.</a:t>
-            </a:r>
-          </a:p>
-        </p:txBody>
-      </p:sp>
-      <p:sp>
-        <p:nvSpPr>
-          <p:cNvPr id="16" name="Rectangle 15"/>
+              <a:t>Observation: Contradicted is 4 in the review evidence [S2]. Why it matters: This measure establishes the baseline for comparing later governed results. Uncertainty: The source basis may omit newer observations outside the reviewed evidence. What would change the view: A refreshed source report showing a change above 1%.</a:t>
+            </a:r>
+          </a:p>
+        </p:txBody>
+      </p:sp>
+      <p:sp>
+        <p:nvSpPr>
+          <p:cNvPr id="17" name="Rectangle 16"/>
           <p:cNvSpPr/>
           <p:nvPr/>
         </p:nvSpPr>
         <p:spPr>
           <a:xfrm>
-            <a:off x="640080" y="4663513"/>
-            <a:ext cx="10908792" cy="1554406"/>
+            <a:off x="640080" y="4661944"/>
+            <a:ext cx="10908792" cy="1555975"/>
           </a:xfrm>
           <a:prstGeom prst="rect">
             <a:avLst/>
@@ -14206,14 +14827,14 @@
       </p:sp>
       <p:sp>
         <p:nvSpPr>
-          <p:cNvPr id="17" name="Rectangle 16"/>
+          <p:cNvPr id="18" name="Rectangle 17"/>
           <p:cNvSpPr/>
           <p:nvPr/>
         </p:nvSpPr>
         <p:spPr>
           <a:xfrm>
-            <a:off x="640080" y="4663513"/>
-            <a:ext cx="54864" cy="1554406"/>
+            <a:off x="640080" y="4661944"/>
+            <a:ext cx="54864" cy="1555975"/>
           </a:xfrm>
           <a:prstGeom prst="rect">
             <a:avLst/>
@@ -14255,13 +14876,13 @@
       </p:sp>
       <p:sp>
         <p:nvSpPr>
-          <p:cNvPr id="18" name="TextBox 17"/>
+          <p:cNvPr id="19" name="TextBox 18"/>
           <p:cNvSpPr txBox="1"/>
           <p:nvPr/>
         </p:nvSpPr>
         <p:spPr>
           <a:xfrm>
-            <a:off x="804671" y="4773241"/>
+            <a:off x="804671" y="4771672"/>
             <a:ext cx="10616184" cy="228600"/>
           </a:xfrm>
           <a:prstGeom prst="rect">
@@ -14297,14 +14918,14 @@
       </p:sp>
       <p:sp>
         <p:nvSpPr>
-          <p:cNvPr id="19" name="TextBox 18"/>
+          <p:cNvPr id="20" name="TextBox 19"/>
           <p:cNvSpPr txBox="1"/>
           <p:nvPr/>
         </p:nvSpPr>
         <p:spPr>
           <a:xfrm>
-            <a:off x="804671" y="5056705"/>
-            <a:ext cx="10616184" cy="1069774"/>
+            <a:off x="804671" y="5055136"/>
+            <a:ext cx="10616184" cy="1071343"/>
           </a:xfrm>
           <a:prstGeom prst="rect">
             <a:avLst/>
@@ -14332,14 +14953,14 @@
               <a:rPr>
                 <a:latin typeface="Inter"/>
               </a:rPr>
-              <a:t>Observation: Not checkable is 0 in the TEST evidence [S3]. Why it matters: This result determines which item receives priority in the next monitoring cycle. Uncertainty: Supporting coverage may omit later filings or corroborating detail. What would change the view: A new filing or report that resolves the item or changes it by 1%.</a:t>
-            </a:r>
-          </a:p>
-        </p:txBody>
-      </p:sp>
-      <p:sp>
-        <p:nvSpPr>
-          <p:cNvPr id="20" name="Rectangle 19"/>
+              <a:t>Observation: Not checkable is 0 in the review evidence [S3]. Why it matters: This result determines which item receives priority in the next monitoring cycle. Uncertainty: Supporting coverage may omit later filings or corroborating detail. What would change the view: A new filing or report that resolves the item or changes it by 1%.</a:t>
+            </a:r>
+          </a:p>
+        </p:txBody>
+      </p:sp>
+      <p:sp>
+        <p:nvSpPr>
+          <p:cNvPr id="21" name="Rectangle 20"/>
           <p:cNvSpPr/>
           <p:nvPr/>
         </p:nvSpPr>
@@ -14388,7 +15009,7 @@
       </p:sp>
       <p:sp>
         <p:nvSpPr>
-          <p:cNvPr id="21" name="TextBox 20"/>
+          <p:cNvPr id="22" name="TextBox 21"/>
           <p:cNvSpPr txBox="1"/>
           <p:nvPr/>
         </p:nvSpPr>
@@ -14430,7 +15051,7 @@
       </p:sp>
       <p:sp>
         <p:nvSpPr>
-          <p:cNvPr id="22" name="TextBox 21"/>
+          <p:cNvPr id="23" name="TextBox 22"/>
           <p:cNvSpPr txBox="1"/>
           <p:nvPr/>
         </p:nvSpPr>
@@ -14465,14 +15086,14 @@
               <a:rPr>
                 <a:latin typeface="Inter"/>
               </a:rPr>
-              <a:t>TEST FIXTURE — synthetic DDQ, not a manager document · Data as of 2026-10-01 (Form ADV); DDQ responses as of 2026-09-30</a:t>
-            </a:r>
-          </a:p>
-        </p:txBody>
-      </p:sp>
-      <p:sp>
-        <p:nvSpPr>
-          <p:cNvPr id="23" name="TextBox 22"/>
+              <a:t>Confidential — manager diligence review · Data as of 2026-10-01 (Form ADV); DDQ responses as of 2026-09-30</a:t>
+            </a:r>
+          </a:p>
+        </p:txBody>
+      </p:sp>
+      <p:sp>
+        <p:nvSpPr>
+          <p:cNvPr id="24" name="TextBox 23"/>
           <p:cNvSpPr txBox="1"/>
           <p:nvPr/>
         </p:nvSpPr>
@@ -14588,7 +15209,7 @@
         <p:spPr>
           <a:xfrm>
             <a:off x="640080" y="329184"/>
-            <a:ext cx="9875520" cy="182880"/>
+            <a:ext cx="5303520" cy="182880"/>
           </a:xfrm>
           <a:prstGeom prst="rect">
             <a:avLst/>
@@ -14629,6 +15250,48 @@
         </p:nvSpPr>
         <p:spPr>
           <a:xfrm>
+            <a:off x="5897880" y="310896"/>
+            <a:ext cx="4800600" cy="256032"/>
+          </a:xfrm>
+          <a:prstGeom prst="rect">
+            <a:avLst/>
+          </a:prstGeom>
+          <a:noFill/>
+        </p:spPr>
+        <p:txBody>
+          <a:bodyPr wrap="none" lIns="9144" rIns="9144" tIns="9144" bIns="9144" anchor="t">
+            <a:spAutoFit/>
+          </a:bodyPr>
+          <a:lstStyle/>
+          <a:p>
+            <a:pPr algn="r">
+              <a:spcAft>
+                <a:spcPts val="0"/>
+              </a:spcAft>
+              <a:defRPr sz="680" b="1">
+                <a:solidFill>
+                  <a:srgbClr val="4F6B00"/>
+                </a:solidFill>
+                <a:latin typeface="Inter"/>
+              </a:defRPr>
+            </a:pPr>
+            <a:r>
+              <a:rPr>
+                <a:latin typeface="Inter"/>
+              </a:rPr>
+              <a:t>Illustrative, Gradient Maintained — demo data, not the client's holdings or managers</a:t>
+            </a:r>
+          </a:p>
+        </p:txBody>
+      </p:sp>
+      <p:sp>
+        <p:nvSpPr>
+          <p:cNvPr id="5" name="TextBox 4"/>
+          <p:cNvSpPr txBox="1"/>
+          <p:nvPr/>
+        </p:nvSpPr>
+        <p:spPr>
+          <a:xfrm>
             <a:off x="640080" y="566928"/>
             <a:ext cx="10058400" cy="530352"/>
           </a:xfrm>
@@ -14665,7 +15328,7 @@
       </p:sp>
       <p:sp>
         <p:nvSpPr>
-          <p:cNvPr id="5" name="Rectangle 4"/>
+          <p:cNvPr id="6" name="Rectangle 5"/>
           <p:cNvSpPr/>
           <p:nvPr/>
         </p:nvSpPr>
@@ -14714,7 +15377,7 @@
       </p:sp>
       <p:sp>
         <p:nvSpPr>
-          <p:cNvPr id="6" name="Rectangle 5"/>
+          <p:cNvPr id="7" name="Rectangle 6"/>
           <p:cNvSpPr/>
           <p:nvPr/>
         </p:nvSpPr>
@@ -14763,7 +15426,7 @@
       </p:sp>
       <p:sp>
         <p:nvSpPr>
-          <p:cNvPr id="7" name="TextBox 6"/>
+          <p:cNvPr id="8" name="TextBox 7"/>
           <p:cNvSpPr txBox="1"/>
           <p:nvPr/>
         </p:nvSpPr>
@@ -14805,7 +15468,7 @@
       </p:sp>
       <p:sp>
         <p:nvSpPr>
-          <p:cNvPr id="8" name="TextBox 7"/>
+          <p:cNvPr id="9" name="TextBox 8"/>
           <p:cNvSpPr txBox="1"/>
           <p:nvPr/>
         </p:nvSpPr>
@@ -14847,7 +15510,7 @@
       </p:sp>
       <p:graphicFrame>
         <p:nvGraphicFramePr>
-          <p:cNvPr id="9" name="Chart 8"/>
+          <p:cNvPr id="10" name="Chart 9"/>
           <p:cNvGraphicFramePr>
             <a:graphicFrameLocks noGrp="1"/>
           </p:cNvGraphicFramePr>
@@ -14865,7 +15528,7 @@
       </p:graphicFrame>
       <p:sp>
         <p:nvSpPr>
-          <p:cNvPr id="10" name="Rectangle 9"/>
+          <p:cNvPr id="11" name="Rectangle 10"/>
           <p:cNvSpPr/>
           <p:nvPr/>
         </p:nvSpPr>
@@ -14914,7 +15577,7 @@
       </p:sp>
       <p:sp>
         <p:nvSpPr>
-          <p:cNvPr id="11" name="TextBox 10"/>
+          <p:cNvPr id="12" name="TextBox 11"/>
           <p:cNvSpPr txBox="1"/>
           <p:nvPr/>
         </p:nvSpPr>
@@ -14956,7 +15619,7 @@
       </p:sp>
       <p:sp>
         <p:nvSpPr>
-          <p:cNvPr id="12" name="TextBox 11"/>
+          <p:cNvPr id="13" name="TextBox 12"/>
           <p:cNvSpPr txBox="1"/>
           <p:nvPr/>
         </p:nvSpPr>
@@ -14991,14 +15654,14 @@
               <a:rPr>
                 <a:latin typeface="Inter"/>
               </a:rPr>
-              <a:t>TEST FIXTURE — synthetic DDQ, not a manager document · Data as of 2026-10-01 (Form ADV); DDQ responses as of 2026-09-30</a:t>
-            </a:r>
-          </a:p>
-        </p:txBody>
-      </p:sp>
-      <p:sp>
-        <p:nvSpPr>
-          <p:cNvPr id="13" name="TextBox 12"/>
+              <a:t>Confidential — manager diligence review · Data as of 2026-10-01 (Form ADV); DDQ responses as of 2026-09-30</a:t>
+            </a:r>
+          </a:p>
+        </p:txBody>
+      </p:sp>
+      <p:sp>
+        <p:nvSpPr>
+          <p:cNvPr id="14" name="TextBox 13"/>
           <p:cNvSpPr txBox="1"/>
           <p:nvPr/>
         </p:nvSpPr>
@@ -15114,7 +15777,7 @@
         <p:spPr>
           <a:xfrm>
             <a:off x="640080" y="329184"/>
-            <a:ext cx="9875520" cy="182880"/>
+            <a:ext cx="5303520" cy="182880"/>
           </a:xfrm>
           <a:prstGeom prst="rect">
             <a:avLst/>
@@ -15155,6 +15818,48 @@
         </p:nvSpPr>
         <p:spPr>
           <a:xfrm>
+            <a:off x="5897880" y="310896"/>
+            <a:ext cx="4800600" cy="256032"/>
+          </a:xfrm>
+          <a:prstGeom prst="rect">
+            <a:avLst/>
+          </a:prstGeom>
+          <a:noFill/>
+        </p:spPr>
+        <p:txBody>
+          <a:bodyPr wrap="none" lIns="9144" rIns="9144" tIns="9144" bIns="9144" anchor="t">
+            <a:spAutoFit/>
+          </a:bodyPr>
+          <a:lstStyle/>
+          <a:p>
+            <a:pPr algn="r">
+              <a:spcAft>
+                <a:spcPts val="0"/>
+              </a:spcAft>
+              <a:defRPr sz="680" b="1">
+                <a:solidFill>
+                  <a:srgbClr val="4F6B00"/>
+                </a:solidFill>
+                <a:latin typeface="Inter"/>
+              </a:defRPr>
+            </a:pPr>
+            <a:r>
+              <a:rPr>
+                <a:latin typeface="Inter"/>
+              </a:rPr>
+              <a:t>Illustrative, Gradient Maintained — demo data, not the client's holdings or managers</a:t>
+            </a:r>
+          </a:p>
+        </p:txBody>
+      </p:sp>
+      <p:sp>
+        <p:nvSpPr>
+          <p:cNvPr id="5" name="TextBox 4"/>
+          <p:cNvSpPr txBox="1"/>
+          <p:nvPr/>
+        </p:nvSpPr>
+        <p:spPr>
+          <a:xfrm>
             <a:off x="640080" y="566928"/>
             <a:ext cx="10058400" cy="530352"/>
           </a:xfrm>
@@ -15191,7 +15896,7 @@
       </p:sp>
       <p:sp>
         <p:nvSpPr>
-          <p:cNvPr id="5" name="Rectangle 4"/>
+          <p:cNvPr id="6" name="Rectangle 5"/>
           <p:cNvSpPr/>
           <p:nvPr/>
         </p:nvSpPr>
@@ -15240,7 +15945,7 @@
       </p:sp>
       <p:sp>
         <p:nvSpPr>
-          <p:cNvPr id="6" name="Rectangle 5"/>
+          <p:cNvPr id="7" name="Rectangle 6"/>
           <p:cNvSpPr/>
           <p:nvPr/>
         </p:nvSpPr>
@@ -15289,7 +15994,7 @@
       </p:sp>
       <p:sp>
         <p:nvSpPr>
-          <p:cNvPr id="7" name="TextBox 6"/>
+          <p:cNvPr id="8" name="TextBox 7"/>
           <p:cNvSpPr txBox="1"/>
           <p:nvPr/>
         </p:nvSpPr>
@@ -15331,7 +16036,7 @@
       </p:sp>
       <p:graphicFrame>
         <p:nvGraphicFramePr>
-          <p:cNvPr id="8" name="Table 7"/>
+          <p:cNvPr id="9" name="Table 8"/>
           <p:cNvGraphicFramePr>
             <a:graphicFrameLocks noGrp="1"/>
           </p:cNvGraphicFramePr>
@@ -15856,7 +16561,7 @@
       </p:graphicFrame>
       <p:sp>
         <p:nvSpPr>
-          <p:cNvPr id="9" name="Rectangle 8"/>
+          <p:cNvPr id="10" name="Rectangle 9"/>
           <p:cNvSpPr/>
           <p:nvPr/>
         </p:nvSpPr>
@@ -15905,7 +16610,7 @@
       </p:sp>
       <p:sp>
         <p:nvSpPr>
-          <p:cNvPr id="10" name="Rectangle 9"/>
+          <p:cNvPr id="11" name="Rectangle 10"/>
           <p:cNvSpPr/>
           <p:nvPr/>
         </p:nvSpPr>
@@ -15954,7 +16659,7 @@
       </p:sp>
       <p:sp>
         <p:nvSpPr>
-          <p:cNvPr id="11" name="TextBox 10"/>
+          <p:cNvPr id="12" name="TextBox 11"/>
           <p:cNvSpPr txBox="1"/>
           <p:nvPr/>
         </p:nvSpPr>
@@ -15996,7 +16701,7 @@
       </p:sp>
       <p:sp>
         <p:nvSpPr>
-          <p:cNvPr id="12" name="TextBox 11"/>
+          <p:cNvPr id="13" name="TextBox 12"/>
           <p:cNvSpPr txBox="1"/>
           <p:nvPr/>
         </p:nvSpPr>
@@ -16038,7 +16743,7 @@
       </p:sp>
       <p:sp>
         <p:nvSpPr>
-          <p:cNvPr id="13" name="Rectangle 12"/>
+          <p:cNvPr id="14" name="Rectangle 13"/>
           <p:cNvSpPr/>
           <p:nvPr/>
         </p:nvSpPr>
@@ -16087,7 +16792,7 @@
       </p:sp>
       <p:sp>
         <p:nvSpPr>
-          <p:cNvPr id="14" name="TextBox 13"/>
+          <p:cNvPr id="15" name="TextBox 14"/>
           <p:cNvSpPr txBox="1"/>
           <p:nvPr/>
         </p:nvSpPr>
@@ -16129,7 +16834,7 @@
       </p:sp>
       <p:sp>
         <p:nvSpPr>
-          <p:cNvPr id="15" name="TextBox 14"/>
+          <p:cNvPr id="16" name="TextBox 15"/>
           <p:cNvSpPr txBox="1"/>
           <p:nvPr/>
         </p:nvSpPr>
@@ -16164,14 +16869,14 @@
               <a:rPr>
                 <a:latin typeface="Inter"/>
               </a:rPr>
-              <a:t>TEST FIXTURE — synthetic DDQ, not a manager document · Data as of 2026-10-01 (Form ADV); DDQ responses as of 2026-09-30</a:t>
-            </a:r>
-          </a:p>
-        </p:txBody>
-      </p:sp>
-      <p:sp>
-        <p:nvSpPr>
-          <p:cNvPr id="16" name="TextBox 15"/>
+              <a:t>Confidential — manager diligence review · Data as of 2026-10-01 (Form ADV); DDQ responses as of 2026-09-30</a:t>
+            </a:r>
+          </a:p>
+        </p:txBody>
+      </p:sp>
+      <p:sp>
+        <p:nvSpPr>
+          <p:cNvPr id="17" name="TextBox 16"/>
           <p:cNvSpPr txBox="1"/>
           <p:nvPr/>
         </p:nvSpPr>
@@ -16287,7 +16992,7 @@
         <p:spPr>
           <a:xfrm>
             <a:off x="640080" y="329184"/>
-            <a:ext cx="9875520" cy="182880"/>
+            <a:ext cx="5303520" cy="182880"/>
           </a:xfrm>
           <a:prstGeom prst="rect">
             <a:avLst/>
@@ -16328,6 +17033,48 @@
         </p:nvSpPr>
         <p:spPr>
           <a:xfrm>
+            <a:off x="5897880" y="310896"/>
+            <a:ext cx="4800600" cy="256032"/>
+          </a:xfrm>
+          <a:prstGeom prst="rect">
+            <a:avLst/>
+          </a:prstGeom>
+          <a:noFill/>
+        </p:spPr>
+        <p:txBody>
+          <a:bodyPr wrap="none" lIns="9144" rIns="9144" tIns="9144" bIns="9144" anchor="t">
+            <a:spAutoFit/>
+          </a:bodyPr>
+          <a:lstStyle/>
+          <a:p>
+            <a:pPr algn="r">
+              <a:spcAft>
+                <a:spcPts val="0"/>
+              </a:spcAft>
+              <a:defRPr sz="680" b="1">
+                <a:solidFill>
+                  <a:srgbClr val="4F6B00"/>
+                </a:solidFill>
+                <a:latin typeface="Inter"/>
+              </a:defRPr>
+            </a:pPr>
+            <a:r>
+              <a:rPr>
+                <a:latin typeface="Inter"/>
+              </a:rPr>
+              <a:t>Illustrative, Gradient Maintained — demo data, not the client's holdings or managers</a:t>
+            </a:r>
+          </a:p>
+        </p:txBody>
+      </p:sp>
+      <p:sp>
+        <p:nvSpPr>
+          <p:cNvPr id="5" name="TextBox 4"/>
+          <p:cNvSpPr txBox="1"/>
+          <p:nvPr/>
+        </p:nvSpPr>
+        <p:spPr>
+          <a:xfrm>
             <a:off x="640080" y="566928"/>
             <a:ext cx="10058400" cy="530352"/>
           </a:xfrm>
@@ -16364,7 +17111,7 @@
       </p:sp>
       <p:sp>
         <p:nvSpPr>
-          <p:cNvPr id="5" name="Rectangle 4"/>
+          <p:cNvPr id="6" name="Rectangle 5"/>
           <p:cNvSpPr/>
           <p:nvPr/>
         </p:nvSpPr>
@@ -16413,7 +17160,7 @@
       </p:sp>
       <p:sp>
         <p:nvSpPr>
-          <p:cNvPr id="6" name="Rectangle 5"/>
+          <p:cNvPr id="7" name="Rectangle 6"/>
           <p:cNvSpPr/>
           <p:nvPr/>
         </p:nvSpPr>
@@ -16462,7 +17209,7 @@
       </p:sp>
       <p:sp>
         <p:nvSpPr>
-          <p:cNvPr id="7" name="TextBox 6"/>
+          <p:cNvPr id="8" name="TextBox 7"/>
           <p:cNvSpPr txBox="1"/>
           <p:nvPr/>
         </p:nvSpPr>
@@ -16504,7 +17251,7 @@
       </p:sp>
       <p:sp>
         <p:nvSpPr>
-          <p:cNvPr id="8" name="TextBox 7"/>
+          <p:cNvPr id="9" name="TextBox 8"/>
           <p:cNvSpPr txBox="1"/>
           <p:nvPr/>
         </p:nvSpPr>
@@ -16657,7 +17404,7 @@
       </p:sp>
       <p:sp>
         <p:nvSpPr>
-          <p:cNvPr id="9" name="Rectangle 8"/>
+          <p:cNvPr id="10" name="Rectangle 9"/>
           <p:cNvSpPr/>
           <p:nvPr/>
         </p:nvSpPr>
@@ -16706,7 +17453,7 @@
       </p:sp>
       <p:sp>
         <p:nvSpPr>
-          <p:cNvPr id="10" name="TextBox 9"/>
+          <p:cNvPr id="11" name="TextBox 10"/>
           <p:cNvSpPr txBox="1"/>
           <p:nvPr/>
         </p:nvSpPr>
@@ -16748,7 +17495,7 @@
       </p:sp>
       <p:sp>
         <p:nvSpPr>
-          <p:cNvPr id="11" name="TextBox 10"/>
+          <p:cNvPr id="12" name="TextBox 11"/>
           <p:cNvSpPr txBox="1"/>
           <p:nvPr/>
         </p:nvSpPr>
@@ -16783,14 +17530,14 @@
               <a:rPr>
                 <a:latin typeface="Inter"/>
               </a:rPr>
-              <a:t>TEST FIXTURE — synthetic DDQ, not a manager document · Data as of 2026-10-01 (Form ADV); DDQ responses as of 2026-09-30</a:t>
-            </a:r>
-          </a:p>
-        </p:txBody>
-      </p:sp>
-      <p:sp>
-        <p:nvSpPr>
-          <p:cNvPr id="12" name="TextBox 11"/>
+              <a:t>Confidential — manager diligence review · Data as of 2026-10-01 (Form ADV); DDQ responses as of 2026-09-30</a:t>
+            </a:r>
+          </a:p>
+        </p:txBody>
+      </p:sp>
+      <p:sp>
+        <p:nvSpPr>
+          <p:cNvPr id="13" name="TextBox 12"/>
           <p:cNvSpPr txBox="1"/>
           <p:nvPr/>
         </p:nvSpPr>
@@ -16906,7 +17653,7 @@
         <p:spPr>
           <a:xfrm>
             <a:off x="640080" y="329184"/>
-            <a:ext cx="9875520" cy="182880"/>
+            <a:ext cx="5303520" cy="182880"/>
           </a:xfrm>
           <a:prstGeom prst="rect">
             <a:avLst/>
@@ -16947,6 +17694,48 @@
         </p:nvSpPr>
         <p:spPr>
           <a:xfrm>
+            <a:off x="5897880" y="310896"/>
+            <a:ext cx="4800600" cy="256032"/>
+          </a:xfrm>
+          <a:prstGeom prst="rect">
+            <a:avLst/>
+          </a:prstGeom>
+          <a:noFill/>
+        </p:spPr>
+        <p:txBody>
+          <a:bodyPr wrap="none" lIns="9144" rIns="9144" tIns="9144" bIns="9144" anchor="t">
+            <a:spAutoFit/>
+          </a:bodyPr>
+          <a:lstStyle/>
+          <a:p>
+            <a:pPr algn="r">
+              <a:spcAft>
+                <a:spcPts val="0"/>
+              </a:spcAft>
+              <a:defRPr sz="680" b="1">
+                <a:solidFill>
+                  <a:srgbClr val="4F6B00"/>
+                </a:solidFill>
+                <a:latin typeface="Inter"/>
+              </a:defRPr>
+            </a:pPr>
+            <a:r>
+              <a:rPr>
+                <a:latin typeface="Inter"/>
+              </a:rPr>
+              <a:t>Illustrative, Gradient Maintained — demo data, not the client's holdings or managers</a:t>
+            </a:r>
+          </a:p>
+        </p:txBody>
+      </p:sp>
+      <p:sp>
+        <p:nvSpPr>
+          <p:cNvPr id="5" name="TextBox 4"/>
+          <p:cNvSpPr txBox="1"/>
+          <p:nvPr/>
+        </p:nvSpPr>
+        <p:spPr>
+          <a:xfrm>
             <a:off x="640080" y="566928"/>
             <a:ext cx="10058400" cy="530352"/>
           </a:xfrm>
@@ -16983,7 +17772,7 @@
       </p:sp>
       <p:sp>
         <p:nvSpPr>
-          <p:cNvPr id="5" name="Rectangle 4"/>
+          <p:cNvPr id="6" name="Rectangle 5"/>
           <p:cNvSpPr/>
           <p:nvPr/>
         </p:nvSpPr>
@@ -17032,7 +17821,7 @@
       </p:sp>
       <p:sp>
         <p:nvSpPr>
-          <p:cNvPr id="6" name="Rectangle 5"/>
+          <p:cNvPr id="7" name="Rectangle 6"/>
           <p:cNvSpPr/>
           <p:nvPr/>
         </p:nvSpPr>
@@ -17081,7 +17870,7 @@
       </p:sp>
       <p:sp>
         <p:nvSpPr>
-          <p:cNvPr id="7" name="TextBox 6"/>
+          <p:cNvPr id="8" name="TextBox 7"/>
           <p:cNvSpPr txBox="1"/>
           <p:nvPr/>
         </p:nvSpPr>
@@ -17123,7 +17912,7 @@
       </p:sp>
       <p:sp>
         <p:nvSpPr>
-          <p:cNvPr id="8" name="TextBox 7"/>
+          <p:cNvPr id="9" name="TextBox 8"/>
           <p:cNvSpPr txBox="1"/>
           <p:nvPr/>
         </p:nvSpPr>
@@ -17165,7 +17954,7 @@
       </p:sp>
       <p:graphicFrame>
         <p:nvGraphicFramePr>
-          <p:cNvPr id="9" name="Table 8"/>
+          <p:cNvPr id="10" name="Table 9"/>
           <p:cNvGraphicFramePr>
             <a:graphicFrameLocks noGrp="1"/>
           </p:cNvGraphicFramePr>
@@ -17736,7 +18525,7 @@
       </p:graphicFrame>
       <p:sp>
         <p:nvSpPr>
-          <p:cNvPr id="10" name="Rectangle 9"/>
+          <p:cNvPr id="11" name="Rectangle 10"/>
           <p:cNvSpPr/>
           <p:nvPr/>
         </p:nvSpPr>
@@ -17785,7 +18574,7 @@
       </p:sp>
       <p:sp>
         <p:nvSpPr>
-          <p:cNvPr id="11" name="TextBox 10"/>
+          <p:cNvPr id="12" name="TextBox 11"/>
           <p:cNvSpPr txBox="1"/>
           <p:nvPr/>
         </p:nvSpPr>
@@ -17827,7 +18616,7 @@
       </p:sp>
       <p:sp>
         <p:nvSpPr>
-          <p:cNvPr id="12" name="TextBox 11"/>
+          <p:cNvPr id="13" name="TextBox 12"/>
           <p:cNvSpPr txBox="1"/>
           <p:nvPr/>
         </p:nvSpPr>
@@ -17862,14 +18651,14 @@
               <a:rPr>
                 <a:latin typeface="Inter"/>
               </a:rPr>
-              <a:t>TEST FIXTURE — synthetic DDQ, not a manager document · Data as of 2026-10-01 (Form ADV); DDQ responses as of 2026-09-30</a:t>
-            </a:r>
-          </a:p>
-        </p:txBody>
-      </p:sp>
-      <p:sp>
-        <p:nvSpPr>
-          <p:cNvPr id="13" name="TextBox 12"/>
+              <a:t>Confidential — manager diligence review · Data as of 2026-10-01 (Form ADV); DDQ responses as of 2026-09-30</a:t>
+            </a:r>
+          </a:p>
+        </p:txBody>
+      </p:sp>
+      <p:sp>
+        <p:nvSpPr>
+          <p:cNvPr id="14" name="TextBox 13"/>
           <p:cNvSpPr txBox="1"/>
           <p:nvPr/>
         </p:nvSpPr>
@@ -17985,7 +18774,7 @@
         <p:spPr>
           <a:xfrm>
             <a:off x="640080" y="329184"/>
-            <a:ext cx="9875520" cy="182880"/>
+            <a:ext cx="5303520" cy="182880"/>
           </a:xfrm>
           <a:prstGeom prst="rect">
             <a:avLst/>
@@ -18026,6 +18815,48 @@
         </p:nvSpPr>
         <p:spPr>
           <a:xfrm>
+            <a:off x="5897880" y="310896"/>
+            <a:ext cx="4800600" cy="256032"/>
+          </a:xfrm>
+          <a:prstGeom prst="rect">
+            <a:avLst/>
+          </a:prstGeom>
+          <a:noFill/>
+        </p:spPr>
+        <p:txBody>
+          <a:bodyPr wrap="none" lIns="9144" rIns="9144" tIns="9144" bIns="9144" anchor="t">
+            <a:spAutoFit/>
+          </a:bodyPr>
+          <a:lstStyle/>
+          <a:p>
+            <a:pPr algn="r">
+              <a:spcAft>
+                <a:spcPts val="0"/>
+              </a:spcAft>
+              <a:defRPr sz="680" b="1">
+                <a:solidFill>
+                  <a:srgbClr val="4F6B00"/>
+                </a:solidFill>
+                <a:latin typeface="Inter"/>
+              </a:defRPr>
+            </a:pPr>
+            <a:r>
+              <a:rPr>
+                <a:latin typeface="Inter"/>
+              </a:rPr>
+              <a:t>Illustrative, Gradient Maintained — demo data, not the client's holdings or managers</a:t>
+            </a:r>
+          </a:p>
+        </p:txBody>
+      </p:sp>
+      <p:sp>
+        <p:nvSpPr>
+          <p:cNvPr id="5" name="TextBox 4"/>
+          <p:cNvSpPr txBox="1"/>
+          <p:nvPr/>
+        </p:nvSpPr>
+        <p:spPr>
+          <a:xfrm>
             <a:off x="640080" y="566928"/>
             <a:ext cx="10058400" cy="530352"/>
           </a:xfrm>
@@ -18062,7 +18893,7 @@
       </p:sp>
       <p:sp>
         <p:nvSpPr>
-          <p:cNvPr id="5" name="Rectangle 4"/>
+          <p:cNvPr id="6" name="Rectangle 5"/>
           <p:cNvSpPr/>
           <p:nvPr/>
         </p:nvSpPr>
@@ -18111,7 +18942,7 @@
       </p:sp>
       <p:sp>
         <p:nvSpPr>
-          <p:cNvPr id="6" name="Rectangle 5"/>
+          <p:cNvPr id="7" name="Rectangle 6"/>
           <p:cNvSpPr/>
           <p:nvPr/>
         </p:nvSpPr>
@@ -18160,7 +18991,7 @@
       </p:sp>
       <p:sp>
         <p:nvSpPr>
-          <p:cNvPr id="7" name="TextBox 6"/>
+          <p:cNvPr id="8" name="TextBox 7"/>
           <p:cNvSpPr txBox="1"/>
           <p:nvPr/>
         </p:nvSpPr>
@@ -18202,7 +19033,7 @@
       </p:sp>
       <p:sp>
         <p:nvSpPr>
-          <p:cNvPr id="8" name="Rectangle 7"/>
+          <p:cNvPr id="9" name="Rectangle 8"/>
           <p:cNvSpPr/>
           <p:nvPr/>
         </p:nvSpPr>
@@ -18251,7 +19082,7 @@
       </p:sp>
       <p:sp>
         <p:nvSpPr>
-          <p:cNvPr id="9" name="Rectangle 8"/>
+          <p:cNvPr id="10" name="Rectangle 9"/>
           <p:cNvSpPr/>
           <p:nvPr/>
         </p:nvSpPr>
@@ -18300,7 +19131,7 @@
       </p:sp>
       <p:sp>
         <p:nvSpPr>
-          <p:cNvPr id="10" name="TextBox 9"/>
+          <p:cNvPr id="11" name="TextBox 10"/>
           <p:cNvSpPr txBox="1"/>
           <p:nvPr/>
         </p:nvSpPr>
@@ -18342,7 +19173,7 @@
       </p:sp>
       <p:sp>
         <p:nvSpPr>
-          <p:cNvPr id="11" name="TextBox 10"/>
+          <p:cNvPr id="12" name="TextBox 11"/>
           <p:cNvSpPr txBox="1"/>
           <p:nvPr/>
         </p:nvSpPr>
@@ -18384,7 +19215,7 @@
       </p:sp>
       <p:sp>
         <p:nvSpPr>
-          <p:cNvPr id="12" name="Rectangle 11"/>
+          <p:cNvPr id="13" name="Rectangle 12"/>
           <p:cNvSpPr/>
           <p:nvPr/>
         </p:nvSpPr>
@@ -18433,7 +19264,7 @@
       </p:sp>
       <p:sp>
         <p:nvSpPr>
-          <p:cNvPr id="13" name="TextBox 12"/>
+          <p:cNvPr id="14" name="TextBox 13"/>
           <p:cNvSpPr txBox="1"/>
           <p:nvPr/>
         </p:nvSpPr>
@@ -18475,7 +19306,7 @@
       </p:sp>
       <p:sp>
         <p:nvSpPr>
-          <p:cNvPr id="14" name="TextBox 13"/>
+          <p:cNvPr id="15" name="TextBox 14"/>
           <p:cNvSpPr txBox="1"/>
           <p:nvPr/>
         </p:nvSpPr>
@@ -18510,14 +19341,14 @@
               <a:rPr>
                 <a:latin typeface="Inter"/>
               </a:rPr>
-              <a:t>TEST FIXTURE — synthetic DDQ, not a manager document · Data as of 2026-10-01 (Form ADV); DDQ responses as of 2026-09-30</a:t>
-            </a:r>
-          </a:p>
-        </p:txBody>
-      </p:sp>
-      <p:sp>
-        <p:nvSpPr>
-          <p:cNvPr id="15" name="TextBox 14"/>
+              <a:t>Confidential — manager diligence review · Data as of 2026-10-01 (Form ADV); DDQ responses as of 2026-09-30</a:t>
+            </a:r>
+          </a:p>
+        </p:txBody>
+      </p:sp>
+      <p:sp>
+        <p:nvSpPr>
+          <p:cNvPr id="16" name="TextBox 15"/>
           <p:cNvSpPr txBox="1"/>
           <p:nvPr/>
         </p:nvSpPr>
@@ -18633,7 +19464,7 @@
         <p:spPr>
           <a:xfrm>
             <a:off x="640080" y="329184"/>
-            <a:ext cx="9875520" cy="182880"/>
+            <a:ext cx="5303520" cy="182880"/>
           </a:xfrm>
           <a:prstGeom prst="rect">
             <a:avLst/>
@@ -18674,6 +19505,48 @@
         </p:nvSpPr>
         <p:spPr>
           <a:xfrm>
+            <a:off x="5897880" y="310896"/>
+            <a:ext cx="4800600" cy="256032"/>
+          </a:xfrm>
+          <a:prstGeom prst="rect">
+            <a:avLst/>
+          </a:prstGeom>
+          <a:noFill/>
+        </p:spPr>
+        <p:txBody>
+          <a:bodyPr wrap="none" lIns="9144" rIns="9144" tIns="9144" bIns="9144" anchor="t">
+            <a:spAutoFit/>
+          </a:bodyPr>
+          <a:lstStyle/>
+          <a:p>
+            <a:pPr algn="r">
+              <a:spcAft>
+                <a:spcPts val="0"/>
+              </a:spcAft>
+              <a:defRPr sz="680" b="1">
+                <a:solidFill>
+                  <a:srgbClr val="4F6B00"/>
+                </a:solidFill>
+                <a:latin typeface="Inter"/>
+              </a:defRPr>
+            </a:pPr>
+            <a:r>
+              <a:rPr>
+                <a:latin typeface="Inter"/>
+              </a:rPr>
+              <a:t>Illustrative, Gradient Maintained — demo data, not the client's holdings or managers</a:t>
+            </a:r>
+          </a:p>
+        </p:txBody>
+      </p:sp>
+      <p:sp>
+        <p:nvSpPr>
+          <p:cNvPr id="5" name="TextBox 4"/>
+          <p:cNvSpPr txBox="1"/>
+          <p:nvPr/>
+        </p:nvSpPr>
+        <p:spPr>
+          <a:xfrm>
             <a:off x="640080" y="566928"/>
             <a:ext cx="10058400" cy="530352"/>
           </a:xfrm>
@@ -18710,7 +19583,7 @@
       </p:sp>
       <p:sp>
         <p:nvSpPr>
-          <p:cNvPr id="5" name="Rectangle 4"/>
+          <p:cNvPr id="6" name="Rectangle 5"/>
           <p:cNvSpPr/>
           <p:nvPr/>
         </p:nvSpPr>
@@ -18759,7 +19632,7 @@
       </p:sp>
       <p:sp>
         <p:nvSpPr>
-          <p:cNvPr id="6" name="Rectangle 5"/>
+          <p:cNvPr id="7" name="Rectangle 6"/>
           <p:cNvSpPr/>
           <p:nvPr/>
         </p:nvSpPr>
@@ -18808,7 +19681,7 @@
       </p:sp>
       <p:sp>
         <p:nvSpPr>
-          <p:cNvPr id="7" name="TextBox 6"/>
+          <p:cNvPr id="8" name="TextBox 7"/>
           <p:cNvSpPr txBox="1"/>
           <p:nvPr/>
         </p:nvSpPr>
@@ -18850,7 +19723,7 @@
       </p:sp>
       <p:graphicFrame>
         <p:nvGraphicFramePr>
-          <p:cNvPr id="8" name="Table 7"/>
+          <p:cNvPr id="9" name="Table 8"/>
           <p:cNvGraphicFramePr>
             <a:graphicFrameLocks noGrp="1"/>
           </p:cNvGraphicFramePr>
@@ -20112,7 +20985,7 @@
       </p:graphicFrame>
       <p:sp>
         <p:nvSpPr>
-          <p:cNvPr id="9" name="TextBox 8"/>
+          <p:cNvPr id="10" name="TextBox 9"/>
           <p:cNvSpPr txBox="1"/>
           <p:nvPr/>
         </p:nvSpPr>
@@ -20154,7 +21027,7 @@
       </p:sp>
       <p:sp>
         <p:nvSpPr>
-          <p:cNvPr id="10" name="Rectangle 9"/>
+          <p:cNvPr id="11" name="Rectangle 10"/>
           <p:cNvSpPr/>
           <p:nvPr/>
         </p:nvSpPr>
@@ -20203,7 +21076,7 @@
       </p:sp>
       <p:sp>
         <p:nvSpPr>
-          <p:cNvPr id="11" name="TextBox 10"/>
+          <p:cNvPr id="12" name="TextBox 11"/>
           <p:cNvSpPr txBox="1"/>
           <p:nvPr/>
         </p:nvSpPr>
@@ -20245,7 +21118,7 @@
       </p:sp>
       <p:sp>
         <p:nvSpPr>
-          <p:cNvPr id="12" name="TextBox 11"/>
+          <p:cNvPr id="13" name="TextBox 12"/>
           <p:cNvSpPr txBox="1"/>
           <p:nvPr/>
         </p:nvSpPr>
@@ -20280,14 +21153,14 @@
               <a:rPr>
                 <a:latin typeface="Inter"/>
               </a:rPr>
-              <a:t>TEST FIXTURE — synthetic DDQ, not a manager document · Data as of 2026-10-01 (Form ADV); DDQ responses as of 2026-09-30</a:t>
-            </a:r>
-          </a:p>
-        </p:txBody>
-      </p:sp>
-      <p:sp>
-        <p:nvSpPr>
-          <p:cNvPr id="13" name="TextBox 12"/>
+              <a:t>Confidential — manager diligence review · Data as of 2026-10-01 (Form ADV); DDQ responses as of 2026-09-30</a:t>
+            </a:r>
+          </a:p>
+        </p:txBody>
+      </p:sp>
+      <p:sp>
+        <p:nvSpPr>
+          <p:cNvPr id="14" name="TextBox 13"/>
           <p:cNvSpPr txBox="1"/>
           <p:nvPr/>
         </p:nvSpPr>

--- a/plugins/gradient-cio/assets/examples/gradient-odd-ddq-reconcile.pptx
+++ b/plugins/gradient-cio/assets/examples/gradient-odd-ddq-reconcile.pptx
@@ -18,6 +18,7 @@
     <ns0:sldId id="266" ns1:id="rId17"/>
     <ns0:sldId id="267" ns1:id="rId18"/>
     <ns0:sldId id="268" ns1:id="rId19"/>
+    <ns0:sldId id="269" ns1:id="rId20"/>
   </ns0:sldIdLst>
   <ns0:sldSz cx="12191695" cy="6858000" type="screen16x9"/>
   <ns0:notesSz cx="6858000" cy="9144000"/>
@@ -938,7 +939,7 @@
           </a:p>
           <a:p>
             <a:r>
-              <a:t>Observation: The fund resolves only to pfid:805-5927286713, so its rows are analyst comparisons [S2]. Why it matters: Those comparisons are not governed reconciliation verdicts. Uncertainty: A canonical catalog fund ID remains unavailable. What would change the view: Catalog resolution followed by governed reconciliation results.</a:t>
+              <a:t>Observation: The fund resolves only to pfid:805-5927286713, so its rows are analyst comparisons [S2]. Why it matters: Those comparisons are not Gradient reconciliation verdicts. Uncertainty: The fund is not yet matched in the catalog. What would change the view: A catalog match followed by Gradient reconciliation results.</a:t>
             </a:r>
           </a:p>
         </p:txBody>
@@ -3713,224 +3714,7 @@
       </p:sp>
       <p:sp>
         <p:nvSpPr>
-          <p:cNvPr id="17" name="Rectangle 16"/>
-          <p:cNvSpPr/>
-          <p:nvPr/>
-        </p:nvSpPr>
-        <p:spPr>
-          <a:xfrm>
-            <a:off x="685800" y="5687568"/>
-            <a:ext cx="3337560" cy="530352"/>
-          </a:xfrm>
-          <a:prstGeom prst="rect">
-            <a:avLst/>
-          </a:prstGeom>
-          <a:solidFill>
-            <a:srgbClr val="FF6B5E"/>
-          </a:solidFill>
-          <a:ln>
-            <a:solidFill>
-              <a:srgbClr val="FF6B5E"/>
-            </a:solidFill>
-          </a:ln>
-        </p:spPr>
-        <p:style>
-          <a:lnRef idx="1">
-            <a:schemeClr val="accent1"/>
-          </a:lnRef>
-          <a:fillRef idx="3">
-            <a:schemeClr val="accent1"/>
-          </a:fillRef>
-          <a:effectRef idx="2">
-            <a:schemeClr val="accent1"/>
-          </a:effectRef>
-          <a:fontRef idx="minor">
-            <a:schemeClr val="lt1"/>
-          </a:fontRef>
-        </p:style>
-        <p:txBody>
-          <a:bodyPr rtlCol="0" anchor="ctr"/>
-          <a:lstStyle/>
-          <a:p>
-            <a:pPr algn="ctr">
-              <a:defRPr>
-                <a:latin typeface="Inter"/>
-              </a:defRPr>
-            </a:pPr>
-          </a:p>
-        </p:txBody>
-      </p:sp>
-      <p:sp>
-        <p:nvSpPr>
-          <p:cNvPr id="18" name="TextBox 17"/>
-          <p:cNvSpPr txBox="1"/>
-          <p:nvPr/>
-        </p:nvSpPr>
-        <p:spPr>
-          <a:xfrm>
-            <a:off x="822960" y="5760720"/>
-            <a:ext cx="3063240" cy="128016"/>
-          </a:xfrm>
-          <a:prstGeom prst="rect">
-            <a:avLst/>
-          </a:prstGeom>
-          <a:noFill/>
-        </p:spPr>
-        <p:txBody>
-          <a:bodyPr wrap="none" lIns="9144" rIns="9144" tIns="9144" bIns="9144" anchor="t">
-            <a:spAutoFit/>
-          </a:bodyPr>
-          <a:lstStyle/>
-          <a:p>
-            <a:pPr algn="l">
-              <a:spcAft>
-                <a:spcPts val="0"/>
-              </a:spcAft>
-              <a:defRPr sz="620" b="1">
-                <a:solidFill>
-                  <a:srgbClr val="0D1117"/>
-                </a:solidFill>
-                <a:latin typeface="Inter"/>
-              </a:defRPr>
-            </a:pPr>
-            <a:r>
-              <a:rPr>
-                <a:latin typeface="Inter"/>
-              </a:rPr>
-              <a:t>OVERALL VIEW</a:t>
-            </a:r>
-          </a:p>
-        </p:txBody>
-      </p:sp>
-      <p:sp>
-        <p:nvSpPr>
-          <p:cNvPr id="19" name="TextBox 18"/>
-          <p:cNvSpPr txBox="1"/>
-          <p:nvPr/>
-        </p:nvSpPr>
-        <p:spPr>
-          <a:xfrm>
-            <a:off x="822960" y="5916168"/>
-            <a:ext cx="3063240" cy="182880"/>
-          </a:xfrm>
-          <a:prstGeom prst="rect">
-            <a:avLst/>
-          </a:prstGeom>
-          <a:noFill/>
-        </p:spPr>
-        <p:txBody>
-          <a:bodyPr wrap="none" lIns="9144" rIns="9144" tIns="9144" bIns="9144" anchor="t">
-            <a:spAutoFit/>
-          </a:bodyPr>
-          <a:lstStyle/>
-          <a:p>
-            <a:pPr algn="l">
-              <a:spcAft>
-                <a:spcPts val="0"/>
-              </a:spcAft>
-              <a:defRPr sz="900" b="1">
-                <a:solidFill>
-                  <a:srgbClr val="0D1117"/>
-                </a:solidFill>
-                <a:latin typeface="Inter"/>
-              </a:defRPr>
-            </a:pPr>
-            <a:r>
-              <a:rPr>
-                <a:latin typeface="Inter"/>
-              </a:rPr>
-              <a:t>4 discrepancies found</a:t>
-            </a:r>
-          </a:p>
-        </p:txBody>
-      </p:sp>
-      <p:sp>
-        <p:nvSpPr>
-          <p:cNvPr id="20" name="TextBox 19"/>
-          <p:cNvSpPr txBox="1"/>
-          <p:nvPr/>
-        </p:nvSpPr>
-        <p:spPr>
-          <a:xfrm>
-            <a:off x="4297680" y="5733288"/>
-            <a:ext cx="3108960" cy="164592"/>
-          </a:xfrm>
-          <a:prstGeom prst="rect">
-            <a:avLst/>
-          </a:prstGeom>
-          <a:noFill/>
-        </p:spPr>
-        <p:txBody>
-          <a:bodyPr wrap="none" lIns="9144" rIns="9144" tIns="9144" bIns="9144" anchor="t">
-            <a:spAutoFit/>
-          </a:bodyPr>
-          <a:lstStyle/>
-          <a:p>
-            <a:pPr algn="l">
-              <a:spcAft>
-                <a:spcPts val="0"/>
-              </a:spcAft>
-              <a:defRPr sz="650" b="1">
-                <a:solidFill>
-                  <a:srgbClr val="8A94A1"/>
-                </a:solidFill>
-                <a:latin typeface="Inter"/>
-              </a:defRPr>
-            </a:pPr>
-            <a:r>
-              <a:rPr>
-                <a:latin typeface="Inter"/>
-              </a:rPr>
-              <a:t>SCOPE REVIEWED</a:t>
-            </a:r>
-          </a:p>
-        </p:txBody>
-      </p:sp>
-      <p:sp>
-        <p:nvSpPr>
-          <p:cNvPr id="21" name="TextBox 20"/>
-          <p:cNvSpPr txBox="1"/>
-          <p:nvPr/>
-        </p:nvSpPr>
-        <p:spPr>
-          <a:xfrm>
-            <a:off x="4297680" y="5934456"/>
-            <a:ext cx="3108960" cy="201168"/>
-          </a:xfrm>
-          <a:prstGeom prst="rect">
-            <a:avLst/>
-          </a:prstGeom>
-          <a:noFill/>
-        </p:spPr>
-        <p:txBody>
-          <a:bodyPr wrap="none" lIns="9144" rIns="9144" tIns="9144" bIns="9144" anchor="t">
-            <a:spAutoFit/>
-          </a:bodyPr>
-          <a:lstStyle/>
-          <a:p>
-            <a:pPr algn="l">
-              <a:spcAft>
-                <a:spcPts val="0"/>
-              </a:spcAft>
-              <a:defRPr sz="800" b="1">
-                <a:solidFill>
-                  <a:srgbClr val="FFFFFF"/>
-                </a:solidFill>
-                <a:latin typeface="Inter"/>
-              </a:defRPr>
-            </a:pPr>
-            <a:r>
-              <a:rPr>
-                <a:latin typeface="Inter"/>
-              </a:rPr>
-              <a:t>20 of 21 · Partial</a:t>
-            </a:r>
-          </a:p>
-        </p:txBody>
-      </p:sp>
-      <p:sp>
-        <p:nvSpPr>
-          <p:cNvPr id="22" name="TextBox 21"/>
+          <p:cNvPr id="17" name="TextBox 16"/>
           <p:cNvSpPr txBox="1"/>
           <p:nvPr/>
         </p:nvSpPr>
@@ -3972,7 +3756,7 @@
       </p:sp>
       <p:sp>
         <p:nvSpPr>
-          <p:cNvPr id="23" name="TextBox 22"/>
+          <p:cNvPr id="18" name="TextBox 17"/>
           <p:cNvSpPr txBox="1"/>
           <p:nvPr/>
         </p:nvSpPr>
@@ -4014,7 +3798,7 @@
       </p:sp>
       <p:sp>
         <p:nvSpPr>
-          <p:cNvPr id="24" name="TextBox 23"/>
+          <p:cNvPr id="19" name="TextBox 18"/>
           <p:cNvSpPr txBox="1"/>
           <p:nvPr/>
         </p:nvSpPr>
@@ -4130,7 +3914,7 @@
         <p:spPr>
           <a:xfrm>
             <a:off x="640080" y="329184"/>
-            <a:ext cx="5303520" cy="182880"/>
+            <a:ext cx="9875520" cy="182880"/>
           </a:xfrm>
           <a:prstGeom prst="rect">
             <a:avLst/>
@@ -4171,48 +3955,6 @@
         </p:nvSpPr>
         <p:spPr>
           <a:xfrm>
-            <a:off x="5897880" y="310896"/>
-            <a:ext cx="4800600" cy="256032"/>
-          </a:xfrm>
-          <a:prstGeom prst="rect">
-            <a:avLst/>
-          </a:prstGeom>
-          <a:noFill/>
-        </p:spPr>
-        <p:txBody>
-          <a:bodyPr wrap="none" lIns="9144" rIns="9144" tIns="9144" bIns="9144" anchor="t">
-            <a:spAutoFit/>
-          </a:bodyPr>
-          <a:lstStyle/>
-          <a:p>
-            <a:pPr algn="r">
-              <a:spcAft>
-                <a:spcPts val="0"/>
-              </a:spcAft>
-              <a:defRPr sz="680" b="1">
-                <a:solidFill>
-                  <a:srgbClr val="4F6B00"/>
-                </a:solidFill>
-                <a:latin typeface="Inter"/>
-              </a:defRPr>
-            </a:pPr>
-            <a:r>
-              <a:rPr>
-                <a:latin typeface="Inter"/>
-              </a:rPr>
-              <a:t>Illustrative, Gradient Maintained — demo data, not the client's holdings or managers</a:t>
-            </a:r>
-          </a:p>
-        </p:txBody>
-      </p:sp>
-      <p:sp>
-        <p:nvSpPr>
-          <p:cNvPr id="5" name="TextBox 4"/>
-          <p:cNvSpPr txBox="1"/>
-          <p:nvPr/>
-        </p:nvSpPr>
-        <p:spPr>
-          <a:xfrm>
             <a:off x="640080" y="566928"/>
             <a:ext cx="10058400" cy="530352"/>
           </a:xfrm>
@@ -4249,7 +3991,7 @@
       </p:sp>
       <p:sp>
         <p:nvSpPr>
-          <p:cNvPr id="6" name="Rectangle 5"/>
+          <p:cNvPr id="5" name="Rectangle 4"/>
           <p:cNvSpPr/>
           <p:nvPr/>
         </p:nvSpPr>
@@ -4298,7 +4040,7 @@
       </p:sp>
       <p:sp>
         <p:nvSpPr>
-          <p:cNvPr id="7" name="Rectangle 6"/>
+          <p:cNvPr id="6" name="Rectangle 5"/>
           <p:cNvSpPr/>
           <p:nvPr/>
         </p:nvSpPr>
@@ -4347,7 +4089,7 @@
       </p:sp>
       <p:sp>
         <p:nvSpPr>
-          <p:cNvPr id="8" name="TextBox 7"/>
+          <p:cNvPr id="7" name="TextBox 6"/>
           <p:cNvSpPr txBox="1"/>
           <p:nvPr/>
         </p:nvSpPr>
@@ -4389,7 +4131,7 @@
       </p:sp>
       <p:sp>
         <p:nvSpPr>
-          <p:cNvPr id="9" name="TextBox 8"/>
+          <p:cNvPr id="8" name="TextBox 7"/>
           <p:cNvSpPr txBox="1"/>
           <p:nvPr/>
         </p:nvSpPr>
@@ -4431,7 +4173,7 @@
       </p:sp>
       <p:graphicFrame>
         <p:nvGraphicFramePr>
-          <p:cNvPr id="10" name="Table 9"/>
+          <p:cNvPr id="9" name="Table 8"/>
           <p:cNvGraphicFramePr>
             <a:graphicFrameLocks noGrp="1"/>
           </p:cNvGraphicFramePr>
@@ -4690,7 +4432,7 @@
                         <a:rPr>
                           <a:latin typeface="Inter"/>
                         </a:rPr>
-                        <a:t>● consistent</a:t>
+                        <a:t>● Consistent</a:t>
                       </a:r>
                     </a:p>
                   </a:txBody>
@@ -4827,7 +4569,7 @@
                         <a:rPr>
                           <a:latin typeface="Inter"/>
                         </a:rPr>
-                        <a:t>● consistent</a:t>
+                        <a:t>● Consistent</a:t>
                       </a:r>
                     </a:p>
                   </a:txBody>
@@ -4964,7 +4706,7 @@
                         <a:rPr>
                           <a:latin typeface="Inter"/>
                         </a:rPr>
-                        <a:t>● contradicted</a:t>
+                        <a:t>● Contradicted</a:t>
                       </a:r>
                     </a:p>
                   </a:txBody>
@@ -5101,7 +4843,7 @@
                         <a:rPr>
                           <a:latin typeface="Inter"/>
                         </a:rPr>
-                        <a:t>● consistent</a:t>
+                        <a:t>● Consistent</a:t>
                       </a:r>
                     </a:p>
                   </a:txBody>
@@ -5238,7 +4980,7 @@
                         <a:rPr>
                           <a:latin typeface="Inter"/>
                         </a:rPr>
-                        <a:t>● consistent</a:t>
+                        <a:t>● Consistent</a:t>
                       </a:r>
                     </a:p>
                   </a:txBody>
@@ -5375,7 +5117,7 @@
                         <a:rPr>
                           <a:latin typeface="Inter"/>
                         </a:rPr>
-                        <a:t>● needs review</a:t>
+                        <a:t>● Needs review</a:t>
                       </a:r>
                     </a:p>
                   </a:txBody>
@@ -5512,7 +5254,7 @@
                         <a:rPr>
                           <a:latin typeface="Inter"/>
                         </a:rPr>
-                        <a:t>● consistent</a:t>
+                        <a:t>● Consistent</a:t>
                       </a:r>
                     </a:p>
                   </a:txBody>
@@ -5649,7 +5391,7 @@
                         <a:rPr>
                           <a:latin typeface="Inter"/>
                         </a:rPr>
-                        <a:t>● consistent</a:t>
+                        <a:t>● Consistent</a:t>
                       </a:r>
                     </a:p>
                   </a:txBody>
@@ -5786,7 +5528,7 @@
                         <a:rPr>
                           <a:latin typeface="Inter"/>
                         </a:rPr>
-                        <a:t>● contradicted</a:t>
+                        <a:t>● Contradicted</a:t>
                       </a:r>
                     </a:p>
                   </a:txBody>
@@ -5923,7 +5665,7 @@
                         <a:rPr>
                           <a:latin typeface="Inter"/>
                         </a:rPr>
-                        <a:t>● consistent</a:t>
+                        <a:t>● Consistent</a:t>
                       </a:r>
                     </a:p>
                   </a:txBody>
@@ -6060,7 +5802,7 @@
                         <a:rPr>
                           <a:latin typeface="Inter"/>
                         </a:rPr>
-                        <a:t>● needs review</a:t>
+                        <a:t>● Needs review</a:t>
                       </a:r>
                     </a:p>
                   </a:txBody>
@@ -6197,7 +5939,7 @@
                         <a:rPr>
                           <a:latin typeface="Inter"/>
                         </a:rPr>
-                        <a:t>● needs review</a:t>
+                        <a:t>● Needs review</a:t>
                       </a:r>
                     </a:p>
                   </a:txBody>
@@ -6241,7 +5983,7 @@
       </p:graphicFrame>
       <p:sp>
         <p:nvSpPr>
-          <p:cNvPr id="11" name="Rectangle 10"/>
+          <p:cNvPr id="10" name="Rectangle 9"/>
           <p:cNvSpPr/>
           <p:nvPr/>
         </p:nvSpPr>
@@ -6290,7 +6032,7 @@
       </p:sp>
       <p:sp>
         <p:nvSpPr>
-          <p:cNvPr id="12" name="TextBox 11"/>
+          <p:cNvPr id="11" name="TextBox 10"/>
           <p:cNvSpPr txBox="1"/>
           <p:nvPr/>
         </p:nvSpPr>
@@ -6332,7 +6074,7 @@
       </p:sp>
       <p:sp>
         <p:nvSpPr>
-          <p:cNvPr id="13" name="TextBox 12"/>
+          <p:cNvPr id="12" name="TextBox 11"/>
           <p:cNvSpPr txBox="1"/>
           <p:nvPr/>
         </p:nvSpPr>
@@ -6374,7 +6116,7 @@
       </p:sp>
       <p:sp>
         <p:nvSpPr>
-          <p:cNvPr id="14" name="TextBox 13"/>
+          <p:cNvPr id="13" name="TextBox 12"/>
           <p:cNvSpPr txBox="1"/>
           <p:nvPr/>
         </p:nvSpPr>
@@ -6490,7 +6232,7 @@
         <p:spPr>
           <a:xfrm>
             <a:off x="640080" y="329184"/>
-            <a:ext cx="5303520" cy="182880"/>
+            <a:ext cx="9875520" cy="182880"/>
           </a:xfrm>
           <a:prstGeom prst="rect">
             <a:avLst/>
@@ -6518,7 +6260,7 @@
               <a:rPr>
                 <a:latin typeface="Inter"/>
               </a:rPr>
-              <a:t>GOVERNED FIRM EVIDENCE IS COMPLETE; FUND GOVERNANCE REMAINS PARTIAL</a:t>
+              <a:t>FIRM CLAIMS ARE FULLY CHECKED; FUND CLAIMS ARE PARTLY CHECKED</a:t>
             </a:r>
           </a:p>
         </p:txBody>
@@ -6526,48 +6268,6 @@
       <p:sp>
         <p:nvSpPr>
           <p:cNvPr id="4" name="TextBox 3"/>
-          <p:cNvSpPr txBox="1"/>
-          <p:nvPr/>
-        </p:nvSpPr>
-        <p:spPr>
-          <a:xfrm>
-            <a:off x="5897880" y="310896"/>
-            <a:ext cx="4800600" cy="256032"/>
-          </a:xfrm>
-          <a:prstGeom prst="rect">
-            <a:avLst/>
-          </a:prstGeom>
-          <a:noFill/>
-        </p:spPr>
-        <p:txBody>
-          <a:bodyPr wrap="none" lIns="9144" rIns="9144" tIns="9144" bIns="9144" anchor="t">
-            <a:spAutoFit/>
-          </a:bodyPr>
-          <a:lstStyle/>
-          <a:p>
-            <a:pPr algn="r">
-              <a:spcAft>
-                <a:spcPts val="0"/>
-              </a:spcAft>
-              <a:defRPr sz="680" b="1">
-                <a:solidFill>
-                  <a:srgbClr val="4F6B00"/>
-                </a:solidFill>
-                <a:latin typeface="Inter"/>
-              </a:defRPr>
-            </a:pPr>
-            <a:r>
-              <a:rPr>
-                <a:latin typeface="Inter"/>
-              </a:rPr>
-              <a:t>Illustrative, Gradient Maintained — demo data, not the client's holdings or managers</a:t>
-            </a:r>
-          </a:p>
-        </p:txBody>
-      </p:sp>
-      <p:sp>
-        <p:nvSpPr>
-          <p:cNvPr id="5" name="TextBox 4"/>
           <p:cNvSpPr txBox="1"/>
           <p:nvPr/>
         </p:nvSpPr>
@@ -6609,7 +6309,7 @@
       </p:sp>
       <p:sp>
         <p:nvSpPr>
-          <p:cNvPr id="6" name="Rectangle 5"/>
+          <p:cNvPr id="5" name="Rectangle 4"/>
           <p:cNvSpPr/>
           <p:nvPr/>
         </p:nvSpPr>
@@ -6658,7 +6358,7 @@
       </p:sp>
       <p:sp>
         <p:nvSpPr>
-          <p:cNvPr id="7" name="Rectangle 6"/>
+          <p:cNvPr id="6" name="Rectangle 5"/>
           <p:cNvSpPr/>
           <p:nvPr/>
         </p:nvSpPr>
@@ -6707,7 +6407,7 @@
       </p:sp>
       <p:sp>
         <p:nvSpPr>
-          <p:cNvPr id="8" name="TextBox 7"/>
+          <p:cNvPr id="7" name="TextBox 6"/>
           <p:cNvSpPr txBox="1"/>
           <p:nvPr/>
         </p:nvSpPr>
@@ -6749,7 +6449,7 @@
       </p:sp>
       <p:sp>
         <p:nvSpPr>
-          <p:cNvPr id="9" name="TextBox 8"/>
+          <p:cNvPr id="8" name="TextBox 7"/>
           <p:cNvSpPr txBox="1"/>
           <p:nvPr/>
         </p:nvSpPr>
@@ -6791,7 +6491,7 @@
       </p:sp>
       <p:graphicFrame>
         <p:nvGraphicFramePr>
-          <p:cNvPr id="10" name="Table 9"/>
+          <p:cNvPr id="9" name="Table 8"/>
           <p:cNvGraphicFramePr>
             <a:graphicFrameLocks noGrp="1"/>
           </p:cNvGraphicFramePr>
@@ -6940,7 +6640,7 @@
                         <a:rPr>
                           <a:latin typeface="Inter"/>
                         </a:rPr>
-                        <a:t>● available</a:t>
+                        <a:t>● Available</a:t>
                       </a:r>
                     </a:p>
                   </a:txBody>
@@ -6967,7 +6667,7 @@
                         <a:rPr>
                           <a:latin typeface="Inter"/>
                         </a:rPr>
-                        <a:t>Governed reconciliation, verdicts from Gradient [S1]</a:t>
+                        <a:t>Verdicts from the Gradient reconciliation [S1]</a:t>
                       </a:r>
                     </a:p>
                   </a:txBody>
@@ -7023,7 +6723,7 @@
                         <a:rPr>
                           <a:latin typeface="Inter"/>
                         </a:rPr>
-                        <a:t>● partial</a:t>
+                        <a:t>● Partly available</a:t>
                       </a:r>
                     </a:p>
                   </a:txBody>
@@ -7050,7 +6750,7 @@
                         <a:rPr>
                           <a:latin typeface="Inter"/>
                         </a:rPr>
-                        <a:t>Analyst comparison against Schedule D; canonical fund ID unavailable [S2]</a:t>
+                        <a:t>Compared by hand against Schedule D; the fund is not yet matched in the catalog [S2]</a:t>
                       </a:r>
                     </a:p>
                   </a:txBody>
@@ -7106,7 +6806,7 @@
                         <a:rPr>
                           <a:latin typeface="Inter"/>
                         </a:rPr>
-                        <a:t>● not assessed</a:t>
+                        <a:t>● Not assessed</a:t>
                       </a:r>
                     </a:p>
                   </a:txBody>
@@ -7189,7 +6889,7 @@
                         <a:rPr>
                           <a:latin typeface="Inter"/>
                         </a:rPr>
-                        <a:t>● not run</a:t>
+                        <a:t>● Not checked</a:t>
                       </a:r>
                     </a:p>
                   </a:txBody>
@@ -7233,7 +6933,7 @@
       </p:graphicFrame>
       <p:sp>
         <p:nvSpPr>
-          <p:cNvPr id="11" name="Rectangle 10"/>
+          <p:cNvPr id="10" name="Rectangle 9"/>
           <p:cNvSpPr/>
           <p:nvPr/>
         </p:nvSpPr>
@@ -7282,7 +6982,7 @@
       </p:sp>
       <p:sp>
         <p:nvSpPr>
-          <p:cNvPr id="12" name="Rectangle 11"/>
+          <p:cNvPr id="11" name="Rectangle 10"/>
           <p:cNvSpPr/>
           <p:nvPr/>
         </p:nvSpPr>
@@ -7331,7 +7031,7 @@
       </p:sp>
       <p:sp>
         <p:nvSpPr>
-          <p:cNvPr id="13" name="Rectangle 12"/>
+          <p:cNvPr id="12" name="Rectangle 11"/>
           <p:cNvSpPr/>
           <p:nvPr/>
         </p:nvSpPr>
@@ -7380,7 +7080,7 @@
       </p:sp>
       <p:sp>
         <p:nvSpPr>
-          <p:cNvPr id="14" name="TextBox 13"/>
+          <p:cNvPr id="13" name="TextBox 12"/>
           <p:cNvSpPr txBox="1"/>
           <p:nvPr/>
         </p:nvSpPr>
@@ -7422,7 +7122,7 @@
       </p:sp>
       <p:sp>
         <p:nvSpPr>
-          <p:cNvPr id="15" name="TextBox 14"/>
+          <p:cNvPr id="14" name="TextBox 13"/>
           <p:cNvSpPr txBox="1"/>
           <p:nvPr/>
         </p:nvSpPr>
@@ -7457,14 +7157,14 @@
               <a:rPr>
                 <a:latin typeface="Inter"/>
               </a:rPr>
-              <a:t>Not available — No out-of-scope evidence was identified in the sample DDQ [S3].</a:t>
+              <a:t>Not available — every claim in the sample DDQ maps to a Form ADV or Schedule D field, so none fell outside the check [S3].</a:t>
             </a:r>
           </a:p>
         </p:txBody>
       </p:sp>
       <p:sp>
         <p:nvSpPr>
-          <p:cNvPr id="16" name="Rectangle 15"/>
+          <p:cNvPr id="15" name="Rectangle 14"/>
           <p:cNvSpPr/>
           <p:nvPr/>
         </p:nvSpPr>
@@ -7513,7 +7213,7 @@
       </p:sp>
       <p:sp>
         <p:nvSpPr>
-          <p:cNvPr id="17" name="TextBox 16"/>
+          <p:cNvPr id="16" name="TextBox 15"/>
           <p:cNvSpPr txBox="1"/>
           <p:nvPr/>
         </p:nvSpPr>
@@ -7555,7 +7255,7 @@
       </p:sp>
       <p:sp>
         <p:nvSpPr>
-          <p:cNvPr id="18" name="TextBox 17"/>
+          <p:cNvPr id="17" name="TextBox 16"/>
           <p:cNvSpPr txBox="1"/>
           <p:nvPr/>
         </p:nvSpPr>
@@ -7597,7 +7297,7 @@
       </p:sp>
       <p:sp>
         <p:nvSpPr>
-          <p:cNvPr id="19" name="TextBox 18"/>
+          <p:cNvPr id="18" name="TextBox 17"/>
           <p:cNvSpPr txBox="1"/>
           <p:nvPr/>
         </p:nvSpPr>
@@ -7712,48 +7412,6 @@
         </p:nvSpPr>
         <p:spPr>
           <a:xfrm>
-            <a:off x="5897880" y="310896"/>
-            <a:ext cx="4800600" cy="256032"/>
-          </a:xfrm>
-          <a:prstGeom prst="rect">
-            <a:avLst/>
-          </a:prstGeom>
-          <a:noFill/>
-        </p:spPr>
-        <p:txBody>
-          <a:bodyPr wrap="none" lIns="9144" rIns="9144" tIns="9144" bIns="9144" anchor="t">
-            <a:spAutoFit/>
-          </a:bodyPr>
-          <a:lstStyle/>
-          <a:p>
-            <a:pPr algn="r">
-              <a:spcAft>
-                <a:spcPts val="0"/>
-              </a:spcAft>
-              <a:defRPr sz="680" b="1">
-                <a:solidFill>
-                  <a:srgbClr val="4F6B00"/>
-                </a:solidFill>
-                <a:latin typeface="Inter"/>
-              </a:defRPr>
-            </a:pPr>
-            <a:r>
-              <a:rPr>
-                <a:latin typeface="Inter"/>
-              </a:rPr>
-              <a:t>Illustrative, Gradient Maintained — demo data, not the client's holdings or managers</a:t>
-            </a:r>
-          </a:p>
-        </p:txBody>
-      </p:sp>
-      <p:sp>
-        <p:nvSpPr>
-          <p:cNvPr id="4" name="TextBox 3"/>
-          <p:cNvSpPr txBox="1"/>
-          <p:nvPr/>
-        </p:nvSpPr>
-        <p:spPr>
-          <a:xfrm>
             <a:off x="640080" y="566928"/>
             <a:ext cx="10058400" cy="530352"/>
           </a:xfrm>
@@ -7790,7 +7448,7 @@
       </p:sp>
       <p:sp>
         <p:nvSpPr>
-          <p:cNvPr id="5" name="Rectangle 4"/>
+          <p:cNvPr id="4" name="Rectangle 3"/>
           <p:cNvSpPr/>
           <p:nvPr/>
         </p:nvSpPr>
@@ -7839,7 +7497,7 @@
       </p:sp>
       <p:sp>
         <p:nvSpPr>
-          <p:cNvPr id="6" name="Rectangle 5"/>
+          <p:cNvPr id="5" name="Rectangle 4"/>
           <p:cNvSpPr/>
           <p:nvPr/>
         </p:nvSpPr>
@@ -7888,7 +7546,7 @@
       </p:sp>
       <p:sp>
         <p:nvSpPr>
-          <p:cNvPr id="7" name="TextBox 6"/>
+          <p:cNvPr id="6" name="TextBox 5"/>
           <p:cNvSpPr txBox="1"/>
           <p:nvPr/>
         </p:nvSpPr>
@@ -7930,7 +7588,7 @@
       </p:sp>
       <p:sp>
         <p:nvSpPr>
-          <p:cNvPr id="8" name="TextBox 7"/>
+          <p:cNvPr id="7" name="TextBox 6"/>
           <p:cNvSpPr txBox="1"/>
           <p:nvPr/>
         </p:nvSpPr>
@@ -7972,7 +7630,7 @@
       </p:sp>
       <p:graphicFrame>
         <p:nvGraphicFramePr>
-          <p:cNvPr id="9" name="Table 8"/>
+          <p:cNvPr id="8" name="Table 7"/>
           <p:cNvGraphicFramePr>
             <a:graphicFrameLocks noGrp="1"/>
           </p:cNvGraphicFramePr>
@@ -7980,7 +7638,7 @@
         </p:nvGraphicFramePr>
         <p:xfrm>
           <a:off x="640080" y="1600200"/>
-          <a:ext cx="10908792" cy="1410362"/>
+          <a:ext cx="10908792" cy="1915667"/>
         </p:xfrm>
         <a:graphic>
           <a:graphicData uri="http://schemas.openxmlformats.org/drawingml/2006/table">
@@ -7990,16 +7648,12 @@
               </a:tblPr>
               <a:tblGrid>
                 <a:gridCol w="2011680"/>
-                <a:gridCol w="1112139"/>
-                <a:gridCol w="1112139"/>
-                <a:gridCol w="1112139"/>
-                <a:gridCol w="1112139"/>
-                <a:gridCol w="1112139"/>
-                <a:gridCol w="1112139"/>
-                <a:gridCol w="1112139"/>
-                <a:gridCol w="1112139"/>
+                <a:gridCol w="2224278"/>
+                <a:gridCol w="2224278"/>
+                <a:gridCol w="2224278"/>
+                <a:gridCol w="2224278"/>
               </a:tblGrid>
-              <a:tr h="352590">
+              <a:tr h="478916">
                 <a:tc>
                   <a:txBody>
                     <a:bodyPr/>
@@ -8071,61 +7725,7 @@
                         <a:rPr>
                           <a:latin typeface="Inter"/>
                         </a:rPr>
-                        <a:t>Basis</a:t>
-                      </a:r>
-                    </a:p>
-                  </a:txBody>
-                  <a:tcPr marL="54864" marR="54864" marT="27432" marB="27432" anchor="ctr">
-                    <a:solidFill>
-                      <a:srgbClr val="0D1117"/>
-                    </a:solidFill>
-                  </a:tcPr>
-                </a:tc>
-                <a:tc>
-                  <a:txBody>
-                    <a:bodyPr/>
-                    <a:lstStyle/>
-                    <a:p>
-                      <a:pPr>
-                        <a:defRPr sz="750" b="1">
-                          <a:solidFill>
-                            <a:srgbClr val="FFFFFF"/>
-                          </a:solidFill>
-                          <a:latin typeface="Inter"/>
-                        </a:defRPr>
-                      </a:pPr>
-                      <a:r>
-                        <a:rPr>
-                          <a:latin typeface="Inter"/>
-                        </a:rPr>
-                        <a:t>Tool / view</a:t>
-                      </a:r>
-                    </a:p>
-                  </a:txBody>
-                  <a:tcPr marL="54864" marR="54864" marT="27432" marB="27432" anchor="ctr">
-                    <a:solidFill>
-                      <a:srgbClr val="0D1117"/>
-                    </a:solidFill>
-                  </a:tcPr>
-                </a:tc>
-                <a:tc>
-                  <a:txBody>
-                    <a:bodyPr/>
-                    <a:lstStyle/>
-                    <a:p>
-                      <a:pPr>
-                        <a:defRPr sz="750" b="1">
-                          <a:solidFill>
-                            <a:srgbClr val="FFFFFF"/>
-                          </a:solidFill>
-                          <a:latin typeface="Inter"/>
-                        </a:defRPr>
-                      </a:pPr>
-                      <a:r>
-                        <a:rPr>
-                          <a:latin typeface="Inter"/>
-                        </a:rPr>
-                        <a:t>Key parameters</a:t>
+                        <a:t>Source</a:t>
                       </a:r>
                     </a:p>
                   </a:txBody>
@@ -8179,7 +7779,7 @@
                         <a:rPr>
                           <a:latin typeface="Inter"/>
                         </a:rPr>
-                        <a:t>Data scope</a:t>
+                        <a:t>Check</a:t>
                       </a:r>
                     </a:p>
                   </a:txBody>
@@ -8189,69 +7789,15 @@
                     </a:solidFill>
                   </a:tcPr>
                 </a:tc>
-                <a:tc>
-                  <a:txBody>
-                    <a:bodyPr/>
-                    <a:lstStyle/>
-                    <a:p>
-                      <a:pPr>
-                        <a:defRPr sz="750" b="1">
-                          <a:solidFill>
-                            <a:srgbClr val="FFFFFF"/>
-                          </a:solidFill>
-                          <a:latin typeface="Inter"/>
-                        </a:defRPr>
-                      </a:pPr>
-                      <a:r>
-                        <a:rPr>
-                          <a:latin typeface="Inter"/>
-                        </a:rPr>
-                        <a:t>Validation</a:t>
-                      </a:r>
-                    </a:p>
-                  </a:txBody>
-                  <a:tcPr marL="54864" marR="54864" marT="27432" marB="27432" anchor="ctr">
-                    <a:solidFill>
-                      <a:srgbClr val="0D1117"/>
-                    </a:solidFill>
-                  </a:tcPr>
-                </a:tc>
-                <a:tc>
-                  <a:txBody>
-                    <a:bodyPr/>
-                    <a:lstStyle/>
-                    <a:p>
-                      <a:pPr>
-                        <a:defRPr sz="750" b="1">
-                          <a:solidFill>
-                            <a:srgbClr val="FFFFFF"/>
-                          </a:solidFill>
-                          <a:latin typeface="Inter"/>
-                        </a:defRPr>
-                      </a:pPr>
-                      <a:r>
-                        <a:rPr>
-                          <a:latin typeface="Inter"/>
-                        </a:rPr>
-                        <a:t>Digest</a:t>
-                      </a:r>
-                    </a:p>
-                  </a:txBody>
-                  <a:tcPr marL="54864" marR="54864" marT="27432" marB="27432" anchor="ctr">
-                    <a:solidFill>
-                      <a:srgbClr val="0D1117"/>
-                    </a:solidFill>
-                  </a:tcPr>
-                </a:tc>
               </a:tr>
-              <a:tr h="352590">
-                <a:tc>
-                  <a:txBody>
-                    <a:bodyPr/>
-                    <a:lstStyle/>
-                    <a:p>
-                      <a:pPr>
-                        <a:defRPr sz="650" b="1">
+              <a:tr h="478916">
+                <a:tc>
+                  <a:txBody>
+                    <a:bodyPr/>
+                    <a:lstStyle/>
+                    <a:p>
+                      <a:pPr>
+                        <a:defRPr sz="720" b="1">
                           <a:solidFill>
                             <a:srgbClr val="0D1117"/>
                           </a:solidFill>
@@ -8278,7 +7824,7 @@
                     <a:lstStyle/>
                     <a:p>
                       <a:pPr>
-                        <a:defRPr sz="650" b="0">
+                        <a:defRPr sz="720" b="0">
                           <a:solidFill>
                             <a:srgbClr val="0D1117"/>
                           </a:solidFill>
@@ -8289,7 +7835,7 @@
                         <a:rPr>
                           <a:latin typeface="Inter"/>
                         </a:rPr>
-                        <a:t>DDQ reconciliation, 20 claims with governed numeric gaps</a:t>
+                        <a:t>DDQ reconciliation, 20 claims with numeric gaps</a:t>
                       </a:r>
                     </a:p>
                   </a:txBody>
@@ -8305,34 +7851,7 @@
                     <a:lstStyle/>
                     <a:p>
                       <a:pPr>
-                        <a:defRPr sz="650" b="0">
-                          <a:solidFill>
-                            <a:srgbClr val="0D1117"/>
-                          </a:solidFill>
-                          <a:latin typeface="Inter"/>
-                        </a:defRPr>
-                      </a:pPr>
-                      <a:r>
-                        <a:rPr>
-                          <a:latin typeface="Inter"/>
-                        </a:rPr>
-                        <a:t>gradient_tool</a:t>
-                      </a:r>
-                    </a:p>
-                  </a:txBody>
-                  <a:tcPr marL="54864" marR="54864" marT="27432" marB="27432" anchor="ctr">
-                    <a:solidFill>
-                      <a:srgbClr val="FFFFFF"/>
-                    </a:solidFill>
-                  </a:tcPr>
-                </a:tc>
-                <a:tc>
-                  <a:txBody>
-                    <a:bodyPr/>
-                    <a:lstStyle/>
-                    <a:p>
-                      <a:pPr>
-                        <a:defRPr sz="650" b="0">
+                        <a:defRPr sz="720" b="0">
                           <a:solidFill>
                             <a:srgbClr val="0D1117"/>
                           </a:solidFill>
@@ -8359,34 +7878,7 @@
                     <a:lstStyle/>
                     <a:p>
                       <a:pPr>
-                        <a:defRPr sz="650" b="0">
-                          <a:solidFill>
-                            <a:srgbClr val="0D1117"/>
-                          </a:solidFill>
-                          <a:latin typeface="Inter"/>
-                        </a:defRPr>
-                      </a:pPr>
-                      <a:r>
-                        <a:rPr>
-                          <a:latin typeface="Inter"/>
-                        </a:rPr>
-                        <a:t>illustrative sample</a:t>
-                      </a:r>
-                    </a:p>
-                  </a:txBody>
-                  <a:tcPr marL="54864" marR="54864" marT="27432" marB="27432" anchor="ctr">
-                    <a:solidFill>
-                      <a:srgbClr val="FFFFFF"/>
-                    </a:solidFill>
-                  </a:tcPr>
-                </a:tc>
-                <a:tc>
-                  <a:txBody>
-                    <a:bodyPr/>
-                    <a:lstStyle/>
-                    <a:p>
-                      <a:pPr>
-                        <a:defRPr sz="650" b="0">
+                        <a:defRPr sz="720" b="0">
                           <a:solidFill>
                             <a:srgbClr val="0D1117"/>
                           </a:solidFill>
@@ -8413,9 +7905,9 @@
                     <a:lstStyle/>
                     <a:p>
                       <a:pPr>
-                        <a:defRPr sz="650" b="0">
-                          <a:solidFill>
-                            <a:srgbClr val="0D1117"/>
+                        <a:defRPr sz="720" b="1">
+                          <a:solidFill>
+                            <a:srgbClr val="C6F432"/>
                           </a:solidFill>
                           <a:latin typeface="Inter"/>
                         </a:defRPr>
@@ -8424,79 +7916,25 @@
                         <a:rPr>
                           <a:latin typeface="Inter"/>
                         </a:rPr>
-                        <a:t>Gradient-governed review evidence</a:t>
+                        <a:t>● Passed</a:t>
                       </a:r>
                     </a:p>
                   </a:txBody>
                   <a:tcPr marL="54864" marR="54864" marT="27432" marB="27432" anchor="ctr">
                     <a:solidFill>
-                      <a:srgbClr val="FFFFFF"/>
-                    </a:solidFill>
-                  </a:tcPr>
-                </a:tc>
-                <a:tc>
-                  <a:txBody>
-                    <a:bodyPr/>
-                    <a:lstStyle/>
-                    <a:p>
-                      <a:pPr>
-                        <a:defRPr sz="650" b="0">
-                          <a:solidFill>
-                            <a:srgbClr val="0D1117"/>
-                          </a:solidFill>
-                          <a:latin typeface="Inter"/>
-                        </a:defRPr>
-                      </a:pPr>
-                      <a:r>
-                        <a:rPr>
-                          <a:latin typeface="Inter"/>
-                        </a:rPr>
-                        <a:t>{'chip': 'passed', 'status': 'passed'}</a:t>
-                      </a:r>
-                    </a:p>
-                  </a:txBody>
-                  <a:tcPr marL="54864" marR="54864" marT="27432" marB="27432" anchor="ctr">
-                    <a:solidFill>
-                      <a:srgbClr val="FFFFFF"/>
-                    </a:solidFill>
-                  </a:tcPr>
-                </a:tc>
-                <a:tc>
-                  <a:txBody>
-                    <a:bodyPr/>
-                    <a:lstStyle/>
-                    <a:p>
-                      <a:pPr>
-                        <a:defRPr sz="650" b="0">
-                          <a:solidFill>
-                            <a:srgbClr val="0D1117"/>
-                          </a:solidFill>
-                          <a:latin typeface="Inter"/>
-                        </a:defRPr>
-                      </a:pPr>
-                      <a:r>
-                        <a:rPr>
-                          <a:latin typeface="Inter"/>
-                        </a:rPr>
-                        <a:t>sha256:f7d651b2f80f66bfed38fc7041a906cab927de85ad580cf8dc38713fbc66bafa</a:t>
-                      </a:r>
-                    </a:p>
-                  </a:txBody>
-                  <a:tcPr marL="54864" marR="54864" marT="27432" marB="27432" anchor="ctr">
-                    <a:solidFill>
-                      <a:srgbClr val="FFFFFF"/>
+                      <a:srgbClr val="F5F7F9"/>
                     </a:solidFill>
                   </a:tcPr>
                 </a:tc>
               </a:tr>
-              <a:tr h="352590">
-                <a:tc>
-                  <a:txBody>
-                    <a:bodyPr/>
-                    <a:lstStyle/>
-                    <a:p>
-                      <a:pPr>
-                        <a:defRPr sz="650" b="1">
+              <a:tr h="478916">
+                <a:tc>
+                  <a:txBody>
+                    <a:bodyPr/>
+                    <a:lstStyle/>
+                    <a:p>
+                      <a:pPr>
+                        <a:defRPr sz="720" b="1">
                           <a:solidFill>
                             <a:srgbClr val="0D1117"/>
                           </a:solidFill>
@@ -8523,7 +7961,7 @@
                     <a:lstStyle/>
                     <a:p>
                       <a:pPr>
-                        <a:defRPr sz="650" b="0">
+                        <a:defRPr sz="720" b="0">
                           <a:solidFill>
                             <a:srgbClr val="0D1117"/>
                           </a:solidFill>
@@ -8550,34 +7988,7 @@
                     <a:lstStyle/>
                     <a:p>
                       <a:pPr>
-                        <a:defRPr sz="650" b="0">
-                          <a:solidFill>
-                            <a:srgbClr val="0D1117"/>
-                          </a:solidFill>
-                          <a:latin typeface="Inter"/>
-                        </a:defRPr>
-                      </a:pPr>
-                      <a:r>
-                        <a:rPr>
-                          <a:latin typeface="Inter"/>
-                        </a:rPr>
-                        <a:t>gradient_tool</a:t>
-                      </a:r>
-                    </a:p>
-                  </a:txBody>
-                  <a:tcPr marL="54864" marR="54864" marT="27432" marB="27432" anchor="ctr">
-                    <a:solidFill>
-                      <a:srgbClr val="F5F7F9"/>
-                    </a:solidFill>
-                  </a:tcPr>
-                </a:tc>
-                <a:tc>
-                  <a:txBody>
-                    <a:bodyPr/>
-                    <a:lstStyle/>
-                    <a:p>
-                      <a:pPr>
-                        <a:defRPr sz="650" b="0">
+                        <a:defRPr sz="720" b="0">
                           <a:solidFill>
                             <a:srgbClr val="0D1117"/>
                           </a:solidFill>
@@ -8604,34 +8015,7 @@
                     <a:lstStyle/>
                     <a:p>
                       <a:pPr>
-                        <a:defRPr sz="650" b="0">
-                          <a:solidFill>
-                            <a:srgbClr val="0D1117"/>
-                          </a:solidFill>
-                          <a:latin typeface="Inter"/>
-                        </a:defRPr>
-                      </a:pPr>
-                      <a:r>
-                        <a:rPr>
-                          <a:latin typeface="Inter"/>
-                        </a:rPr>
-                        <a:t>illustrative sample</a:t>
-                      </a:r>
-                    </a:p>
-                  </a:txBody>
-                  <a:tcPr marL="54864" marR="54864" marT="27432" marB="27432" anchor="ctr">
-                    <a:solidFill>
-                      <a:srgbClr val="F5F7F9"/>
-                    </a:solidFill>
-                  </a:tcPr>
-                </a:tc>
-                <a:tc>
-                  <a:txBody>
-                    <a:bodyPr/>
-                    <a:lstStyle/>
-                    <a:p>
-                      <a:pPr>
-                        <a:defRPr sz="650" b="0">
+                        <a:defRPr sz="720" b="0">
                           <a:solidFill>
                             <a:srgbClr val="0D1117"/>
                           </a:solidFill>
@@ -8658,9 +8042,9 @@
                     <a:lstStyle/>
                     <a:p>
                       <a:pPr>
-                        <a:defRPr sz="650" b="0">
-                          <a:solidFill>
-                            <a:srgbClr val="0D1117"/>
+                        <a:defRPr sz="720" b="1">
+                          <a:solidFill>
+                            <a:srgbClr val="9AA5B1"/>
                           </a:solidFill>
                           <a:latin typeface="Inter"/>
                         </a:defRPr>
@@ -8669,7 +8053,7 @@
                         <a:rPr>
                           <a:latin typeface="Inter"/>
                         </a:rPr>
-                        <a:t>Gradient-governed review evidence</a:t>
+                        <a:t>● Not checked</a:t>
                       </a:r>
                     </a:p>
                   </a:txBody>
@@ -8679,69 +8063,15 @@
                     </a:solidFill>
                   </a:tcPr>
                 </a:tc>
-                <a:tc>
-                  <a:txBody>
-                    <a:bodyPr/>
-                    <a:lstStyle/>
-                    <a:p>
-                      <a:pPr>
-                        <a:defRPr sz="650" b="0">
-                          <a:solidFill>
-                            <a:srgbClr val="0D1117"/>
-                          </a:solidFill>
-                          <a:latin typeface="Inter"/>
-                        </a:defRPr>
-                      </a:pPr>
-                      <a:r>
-                        <a:rPr>
-                          <a:latin typeface="Inter"/>
-                        </a:rPr>
-                        <a:t>{'chip': 'not run', 'status': 'not_run'}</a:t>
-                      </a:r>
-                    </a:p>
-                  </a:txBody>
-                  <a:tcPr marL="54864" marR="54864" marT="27432" marB="27432" anchor="ctr">
-                    <a:solidFill>
-                      <a:srgbClr val="F5F7F9"/>
-                    </a:solidFill>
-                  </a:tcPr>
-                </a:tc>
-                <a:tc>
-                  <a:txBody>
-                    <a:bodyPr/>
-                    <a:lstStyle/>
-                    <a:p>
-                      <a:pPr>
-                        <a:defRPr sz="650" b="0">
-                          <a:solidFill>
-                            <a:srgbClr val="0D1117"/>
-                          </a:solidFill>
-                          <a:latin typeface="Inter"/>
-                        </a:defRPr>
-                      </a:pPr>
-                      <a:r>
-                        <a:rPr>
-                          <a:latin typeface="Inter"/>
-                        </a:rPr>
-                        <a:t>sha256:a04715c67d5ce3adfd18b7b78a12cf0cbf791f70803e2feffcd7826418a2b647</a:t>
-                      </a:r>
-                    </a:p>
-                  </a:txBody>
-                  <a:tcPr marL="54864" marR="54864" marT="27432" marB="27432" anchor="ctr">
-                    <a:solidFill>
-                      <a:srgbClr val="F5F7F9"/>
-                    </a:solidFill>
-                  </a:tcPr>
-                </a:tc>
               </a:tr>
-              <a:tr h="352592">
-                <a:tc>
-                  <a:txBody>
-                    <a:bodyPr/>
-                    <a:lstStyle/>
-                    <a:p>
-                      <a:pPr>
-                        <a:defRPr sz="650" b="1">
+              <a:tr h="478919">
+                <a:tc>
+                  <a:txBody>
+                    <a:bodyPr/>
+                    <a:lstStyle/>
+                    <a:p>
+                      <a:pPr>
+                        <a:defRPr sz="720" b="1">
                           <a:solidFill>
                             <a:srgbClr val="0D1117"/>
                           </a:solidFill>
@@ -8768,7 +8098,7 @@
                     <a:lstStyle/>
                     <a:p>
                       <a:pPr>
-                        <a:defRPr sz="650" b="0">
+                        <a:defRPr sz="720" b="0">
                           <a:solidFill>
                             <a:srgbClr val="0D1117"/>
                           </a:solidFill>
@@ -8795,7 +8125,7 @@
                     <a:lstStyle/>
                     <a:p>
                       <a:pPr>
-                        <a:defRPr sz="650" b="0">
+                        <a:defRPr sz="720" b="0">
                           <a:solidFill>
                             <a:srgbClr val="0D1117"/>
                           </a:solidFill>
@@ -8806,7 +8136,7 @@
                         <a:rPr>
                           <a:latin typeface="Inter"/>
                         </a:rPr>
-                        <a:t>user_document</a:t>
+                        <a:t>Client document · User-supplied document</a:t>
                       </a:r>
                     </a:p>
                   </a:txBody>
@@ -8822,61 +8152,7 @@
                     <a:lstStyle/>
                     <a:p>
                       <a:pPr>
-                        <a:defRPr sz="650" b="0">
-                          <a:solidFill>
-                            <a:srgbClr val="0D1117"/>
-                          </a:solidFill>
-                          <a:latin typeface="Inter"/>
-                        </a:defRPr>
-                      </a:pPr>
-                      <a:r>
-                        <a:rPr>
-                          <a:latin typeface="Inter"/>
-                        </a:rPr>
-                        <a:t>User-supplied document</a:t>
-                      </a:r>
-                    </a:p>
-                  </a:txBody>
-                  <a:tcPr marL="54864" marR="54864" marT="27432" marB="27432" anchor="ctr">
-                    <a:solidFill>
-                      <a:srgbClr val="FFFFFF"/>
-                    </a:solidFill>
-                  </a:tcPr>
-                </a:tc>
-                <a:tc>
-                  <a:txBody>
-                    <a:bodyPr/>
-                    <a:lstStyle/>
-                    <a:p>
-                      <a:pPr>
-                        <a:defRPr sz="650" b="0">
-                          <a:solidFill>
-                            <a:srgbClr val="0D1117"/>
-                          </a:solidFill>
-                          <a:latin typeface="Inter"/>
-                        </a:defRPr>
-                      </a:pPr>
-                      <a:r>
-                        <a:rPr>
-                          <a:latin typeface="Inter"/>
-                        </a:rPr>
-                        <a:t>illustrative sample</a:t>
-                      </a:r>
-                    </a:p>
-                  </a:txBody>
-                  <a:tcPr marL="54864" marR="54864" marT="27432" marB="27432" anchor="ctr">
-                    <a:solidFill>
-                      <a:srgbClr val="FFFFFF"/>
-                    </a:solidFill>
-                  </a:tcPr>
-                </a:tc>
-                <a:tc>
-                  <a:txBody>
-                    <a:bodyPr/>
-                    <a:lstStyle/>
-                    <a:p>
-                      <a:pPr>
-                        <a:defRPr sz="650" b="0">
+                        <a:defRPr sz="720" b="0">
                           <a:solidFill>
                             <a:srgbClr val="0D1117"/>
                           </a:solidFill>
@@ -8903,9 +8179,9 @@
                     <a:lstStyle/>
                     <a:p>
                       <a:pPr>
-                        <a:defRPr sz="650" b="0">
-                          <a:solidFill>
-                            <a:srgbClr val="0D1117"/>
+                        <a:defRPr sz="720" b="1">
+                          <a:solidFill>
+                            <a:srgbClr val="9AA5B1"/>
                           </a:solidFill>
                           <a:latin typeface="Inter"/>
                         </a:defRPr>
@@ -8914,67 +8190,13 @@
                         <a:rPr>
                           <a:latin typeface="Inter"/>
                         </a:rPr>
-                        <a:t>Gradient-governed review evidence</a:t>
+                        <a:t>● Not applicable</a:t>
                       </a:r>
                     </a:p>
                   </a:txBody>
                   <a:tcPr marL="54864" marR="54864" marT="27432" marB="27432" anchor="ctr">
                     <a:solidFill>
-                      <a:srgbClr val="FFFFFF"/>
-                    </a:solidFill>
-                  </a:tcPr>
-                </a:tc>
-                <a:tc>
-                  <a:txBody>
-                    <a:bodyPr/>
-                    <a:lstStyle/>
-                    <a:p>
-                      <a:pPr>
-                        <a:defRPr sz="650" b="0">
-                          <a:solidFill>
-                            <a:srgbClr val="0D1117"/>
-                          </a:solidFill>
-                          <a:latin typeface="Inter"/>
-                        </a:defRPr>
-                      </a:pPr>
-                      <a:r>
-                        <a:rPr>
-                          <a:latin typeface="Inter"/>
-                        </a:rPr>
-                        <a:t>not_applicable: user document validation is not applicable</a:t>
-                      </a:r>
-                    </a:p>
-                  </a:txBody>
-                  <a:tcPr marL="54864" marR="54864" marT="27432" marB="27432" anchor="ctr">
-                    <a:solidFill>
-                      <a:srgbClr val="FFFFFF"/>
-                    </a:solidFill>
-                  </a:tcPr>
-                </a:tc>
-                <a:tc>
-                  <a:txBody>
-                    <a:bodyPr/>
-                    <a:lstStyle/>
-                    <a:p>
-                      <a:pPr>
-                        <a:defRPr sz="650" b="0">
-                          <a:solidFill>
-                            <a:srgbClr val="0D1117"/>
-                          </a:solidFill>
-                          <a:latin typeface="Inter"/>
-                        </a:defRPr>
-                      </a:pPr>
-                      <a:r>
-                        <a:rPr>
-                          <a:latin typeface="Inter"/>
-                        </a:rPr>
-                        <a:t>1b448613</a:t>
-                      </a:r>
-                    </a:p>
-                  </a:txBody>
-                  <a:tcPr marL="54864" marR="54864" marT="27432" marB="27432" anchor="ctr">
-                    <a:solidFill>
-                      <a:srgbClr val="FFFFFF"/>
+                      <a:srgbClr val="F5F7F9"/>
                     </a:solidFill>
                   </a:tcPr>
                 </a:tc>
@@ -8985,13 +8207,13 @@
       </p:graphicFrame>
       <p:sp>
         <p:nvSpPr>
-          <p:cNvPr id="10" name="TextBox 9"/>
+          <p:cNvPr id="9" name="TextBox 8"/>
           <p:cNvSpPr txBox="1"/>
           <p:nvPr/>
         </p:nvSpPr>
         <p:spPr>
           <a:xfrm>
-            <a:off x="640080" y="3028850"/>
+            <a:off x="640080" y="3534155"/>
             <a:ext cx="10908792" cy="164592"/>
           </a:xfrm>
           <a:prstGeom prst="rect">
@@ -9027,13 +8249,13 @@
       </p:sp>
       <p:sp>
         <p:nvSpPr>
-          <p:cNvPr id="11" name="TextBox 10"/>
+          <p:cNvPr id="10" name="TextBox 9"/>
           <p:cNvSpPr txBox="1"/>
           <p:nvPr/>
         </p:nvSpPr>
         <p:spPr>
           <a:xfrm>
-            <a:off x="640080" y="3321458"/>
+            <a:off x="640080" y="3826763"/>
             <a:ext cx="10908792" cy="201168"/>
           </a:xfrm>
           <a:prstGeom prst="rect">
@@ -9062,22 +8284,22 @@
               <a:rPr>
                 <a:latin typeface="Inter"/>
               </a:rPr>
-              <a:t>SERVER METRIC METHODS</a:t>
+              <a:t>SOURCE AUDIT TRAIL</a:t>
             </a:r>
           </a:p>
         </p:txBody>
       </p:sp>
       <p:graphicFrame>
         <p:nvGraphicFramePr>
-          <p:cNvPr id="12" name="Table 11"/>
+          <p:cNvPr id="11" name="Table 10"/>
           <p:cNvGraphicFramePr>
             <a:graphicFrameLocks noGrp="1"/>
           </p:cNvGraphicFramePr>
           <p:nvPr/>
         </p:nvGraphicFramePr>
         <p:xfrm>
-          <a:off x="640080" y="3595778"/>
-          <a:ext cx="10908792" cy="1611530"/>
+          <a:off x="640080" y="4101083"/>
+          <a:ext cx="10908792" cy="1915667"/>
         </p:xfrm>
         <a:graphic>
           <a:graphicData uri="http://schemas.openxmlformats.org/drawingml/2006/table">
@@ -9087,10 +8309,9 @@
               </a:tblPr>
               <a:tblGrid>
                 <a:gridCol w="2011680"/>
-                <a:gridCol w="4448556"/>
-                <a:gridCol w="4448556"/>
+                <a:gridCol w="8897112"/>
               </a:tblGrid>
-              <a:tr h="402882">
+              <a:tr h="478916">
                 <a:tc>
                   <a:txBody>
                     <a:bodyPr/>
@@ -9108,7 +8329,7 @@
                         <a:rPr>
                           <a:latin typeface="Inter"/>
                         </a:rPr>
-                        <a:t>Metric</a:t>
+                        <a:t>Tag</a:t>
                       </a:r>
                     </a:p>
                   </a:txBody>
@@ -9135,7 +8356,7 @@
                         <a:rPr>
                           <a:latin typeface="Inter"/>
                         </a:rPr>
-                        <a:t>Server formula identity</a:t>
+                        <a:t>Digest</a:t>
                       </a:r>
                     </a:p>
                   </a:txBody>
@@ -9145,15 +8366,17 @@
                     </a:solidFill>
                   </a:tcPr>
                 </a:tc>
-                <a:tc>
-                  <a:txBody>
-                    <a:bodyPr/>
-                    <a:lstStyle/>
-                    <a:p>
-                      <a:pPr>
-                        <a:defRPr sz="750" b="1">
-                          <a:solidFill>
-                            <a:srgbClr val="FFFFFF"/>
+              </a:tr>
+              <a:tr h="478916">
+                <a:tc>
+                  <a:txBody>
+                    <a:bodyPr/>
+                    <a:lstStyle/>
+                    <a:p>
+                      <a:pPr>
+                        <a:defRPr sz="800" b="1">
+                          <a:solidFill>
+                            <a:srgbClr val="0D1117"/>
                           </a:solidFill>
                           <a:latin typeface="Inter"/>
                         </a:defRPr>
@@ -9162,25 +8385,23 @@
                         <a:rPr>
                           <a:latin typeface="Inter"/>
                         </a:rPr>
-                        <a:t>Result</a:t>
+                        <a:t>S1</a:t>
                       </a:r>
                     </a:p>
                   </a:txBody>
                   <a:tcPr marL="54864" marR="54864" marT="27432" marB="27432" anchor="ctr">
                     <a:solidFill>
-                      <a:srgbClr val="0D1117"/>
-                    </a:solidFill>
-                  </a:tcPr>
-                </a:tc>
-              </a:tr>
-              <a:tr h="402882">
-                <a:tc>
-                  <a:txBody>
-                    <a:bodyPr/>
-                    <a:lstStyle/>
-                    <a:p>
-                      <a:pPr>
-                        <a:defRPr sz="800" b="1">
+                      <a:srgbClr val="FFFFFF"/>
+                    </a:solidFill>
+                  </a:tcPr>
+                </a:tc>
+                <a:tc>
+                  <a:txBody>
+                    <a:bodyPr/>
+                    <a:lstStyle/>
+                    <a:p>
+                      <a:pPr>
+                        <a:defRPr sz="800" b="0">
                           <a:solidFill>
                             <a:srgbClr val="0D1117"/>
                           </a:solidFill>
@@ -9191,7 +8412,7 @@
                         <a:rPr>
                           <a:latin typeface="Inter"/>
                         </a:rPr>
-                        <a:t>Headcount gap</a:t>
+                        <a:t>sha256:f7d651b2f80f66bfed38fc7041a906cab927de85ad580cf8dc38713fbc66bafa</a:t>
                       </a:r>
                     </a:p>
                   </a:txBody>
@@ -9201,13 +8422,15 @@
                     </a:solidFill>
                   </a:tcPr>
                 </a:tc>
-                <a:tc>
-                  <a:txBody>
-                    <a:bodyPr/>
-                    <a:lstStyle/>
-                    <a:p>
-                      <a:pPr>
-                        <a:defRPr sz="800" b="0">
+              </a:tr>
+              <a:tr h="478916">
+                <a:tc>
+                  <a:txBody>
+                    <a:bodyPr/>
+                    <a:lstStyle/>
+                    <a:p>
+                      <a:pPr>
+                        <a:defRPr sz="800" b="1">
                           <a:solidFill>
                             <a:srgbClr val="0D1117"/>
                           </a:solidFill>
@@ -9218,13 +8441,13 @@
                         <a:rPr>
                           <a:latin typeface="Inter"/>
                         </a:rPr>
-                        <a:t>ddq-claim-filed-numeric-gap/v1 [S1]</a:t>
+                        <a:t>S2</a:t>
                       </a:r>
                     </a:p>
                   </a:txBody>
                   <a:tcPr marL="54864" marR="54864" marT="27432" marB="27432" anchor="ctr">
                     <a:solidFill>
-                      <a:srgbClr val="FFFFFF"/>
+                      <a:srgbClr val="F5F7F9"/>
                     </a:solidFill>
                   </a:tcPr>
                 </a:tc>
@@ -9245,18 +8468,18 @@
                         <a:rPr>
                           <a:latin typeface="Inter"/>
                         </a:rPr>
-                        <a:t>+9.3%</a:t>
+                        <a:t>sha256:a04715c67d5ce3adfd18b7b78a12cf0cbf791f70803e2feffcd7826418a2b647</a:t>
                       </a:r>
                     </a:p>
                   </a:txBody>
                   <a:tcPr marL="54864" marR="54864" marT="27432" marB="27432" anchor="ctr">
                     <a:solidFill>
-                      <a:srgbClr val="FFFFFF"/>
+                      <a:srgbClr val="F5F7F9"/>
                     </a:solidFill>
                   </a:tcPr>
                 </a:tc>
               </a:tr>
-              <a:tr h="402882">
+              <a:tr h="478919">
                 <a:tc>
                   <a:txBody>
                     <a:bodyPr/>
@@ -9274,13 +8497,13 @@
                         <a:rPr>
                           <a:latin typeface="Inter"/>
                         </a:rPr>
-                        <a:t>Gross asset value gap</a:t>
+                        <a:t>S3</a:t>
                       </a:r>
                     </a:p>
                   </a:txBody>
                   <a:tcPr marL="54864" marR="54864" marT="27432" marB="27432" anchor="ctr">
                     <a:solidFill>
-                      <a:srgbClr val="F5F7F9"/>
+                      <a:srgbClr val="FFFFFF"/>
                     </a:solidFill>
                   </a:tcPr>
                 </a:tc>
@@ -9301,117 +8524,7 @@
                         <a:rPr>
                           <a:latin typeface="Inter"/>
                         </a:rPr>
-                        <a:t>ddq-claim-filed-numeric-gap/v1 [S1]</a:t>
-                      </a:r>
-                    </a:p>
-                  </a:txBody>
-                  <a:tcPr marL="54864" marR="54864" marT="27432" marB="27432" anchor="ctr">
-                    <a:solidFill>
-                      <a:srgbClr val="F5F7F9"/>
-                    </a:solidFill>
-                  </a:tcPr>
-                </a:tc>
-                <a:tc>
-                  <a:txBody>
-                    <a:bodyPr/>
-                    <a:lstStyle/>
-                    <a:p>
-                      <a:pPr>
-                        <a:defRPr sz="800" b="0">
-                          <a:solidFill>
-                            <a:srgbClr val="0D1117"/>
-                          </a:solidFill>
-                          <a:latin typeface="Inter"/>
-                        </a:defRPr>
-                      </a:pPr>
-                      <a:r>
-                        <a:rPr>
-                          <a:latin typeface="Inter"/>
-                        </a:rPr>
-                        <a:t>+0.4%</a:t>
-                      </a:r>
-                    </a:p>
-                  </a:txBody>
-                  <a:tcPr marL="54864" marR="54864" marT="27432" marB="27432" anchor="ctr">
-                    <a:solidFill>
-                      <a:srgbClr val="F5F7F9"/>
-                    </a:solidFill>
-                  </a:tcPr>
-                </a:tc>
-              </a:tr>
-              <a:tr h="402884">
-                <a:tc>
-                  <a:txBody>
-                    <a:bodyPr/>
-                    <a:lstStyle/>
-                    <a:p>
-                      <a:pPr>
-                        <a:defRPr sz="800" b="1">
-                          <a:solidFill>
-                            <a:srgbClr val="0D1117"/>
-                          </a:solidFill>
-                          <a:latin typeface="Inter"/>
-                        </a:defRPr>
-                      </a:pPr>
-                      <a:r>
-                        <a:rPr>
-                          <a:latin typeface="Inter"/>
-                        </a:rPr>
-                        <a:t>Minimum investment gap</a:t>
-                      </a:r>
-                    </a:p>
-                  </a:txBody>
-                  <a:tcPr marL="54864" marR="54864" marT="27432" marB="27432" anchor="ctr">
-                    <a:solidFill>
-                      <a:srgbClr val="FFFFFF"/>
-                    </a:solidFill>
-                  </a:tcPr>
-                </a:tc>
-                <a:tc>
-                  <a:txBody>
-                    <a:bodyPr/>
-                    <a:lstStyle/>
-                    <a:p>
-                      <a:pPr>
-                        <a:defRPr sz="800" b="0">
-                          <a:solidFill>
-                            <a:srgbClr val="0D1117"/>
-                          </a:solidFill>
-                          <a:latin typeface="Inter"/>
-                        </a:defRPr>
-                      </a:pPr>
-                      <a:r>
-                        <a:rPr>
-                          <a:latin typeface="Inter"/>
-                        </a:rPr>
-                        <a:t>ddq-claim-filed-numeric-gap/v1 [S1]</a:t>
-                      </a:r>
-                    </a:p>
-                  </a:txBody>
-                  <a:tcPr marL="54864" marR="54864" marT="27432" marB="27432" anchor="ctr">
-                    <a:solidFill>
-                      <a:srgbClr val="FFFFFF"/>
-                    </a:solidFill>
-                  </a:tcPr>
-                </a:tc>
-                <a:tc>
-                  <a:txBody>
-                    <a:bodyPr/>
-                    <a:lstStyle/>
-                    <a:p>
-                      <a:pPr>
-                        <a:defRPr sz="800" b="0">
-                          <a:solidFill>
-                            <a:srgbClr val="0D1117"/>
-                          </a:solidFill>
-                          <a:latin typeface="Inter"/>
-                        </a:defRPr>
-                      </a:pPr>
-                      <a:r>
-                        <a:rPr>
-                          <a:latin typeface="Inter"/>
-                        </a:rPr>
-                        <a:t>−25.0%</a:t>
+                        <a:t>1b448613</a:t>
                       </a:r>
                     </a:p>
                   </a:txBody>
@@ -9428,112 +8541,14 @@
       </p:graphicFrame>
       <p:sp>
         <p:nvSpPr>
-          <p:cNvPr id="13" name="Rectangle 12"/>
-          <p:cNvSpPr/>
-          <p:nvPr/>
-        </p:nvSpPr>
-        <p:spPr>
-          <a:xfrm>
-            <a:off x="640080" y="5317036"/>
-            <a:ext cx="10908792" cy="900883"/>
-          </a:xfrm>
-          <a:prstGeom prst="rect">
-            <a:avLst/>
-          </a:prstGeom>
-          <a:solidFill>
-            <a:srgbClr val="F5F7F9"/>
-          </a:solidFill>
-          <a:ln>
-            <a:solidFill>
-              <a:srgbClr val="E3E7EC"/>
-            </a:solidFill>
-          </a:ln>
-        </p:spPr>
-        <p:style>
-          <a:lnRef idx="1">
-            <a:schemeClr val="accent1"/>
-          </a:lnRef>
-          <a:fillRef idx="3">
-            <a:schemeClr val="accent1"/>
-          </a:fillRef>
-          <a:effectRef idx="2">
-            <a:schemeClr val="accent1"/>
-          </a:effectRef>
-          <a:fontRef idx="minor">
-            <a:schemeClr val="lt1"/>
-          </a:fontRef>
-        </p:style>
-        <p:txBody>
-          <a:bodyPr rtlCol="0" anchor="ctr"/>
-          <a:lstStyle/>
-          <a:p>
-            <a:pPr algn="ctr">
-              <a:defRPr>
-                <a:latin typeface="Inter"/>
-              </a:defRPr>
-            </a:pPr>
-          </a:p>
-        </p:txBody>
-      </p:sp>
-      <p:sp>
-        <p:nvSpPr>
-          <p:cNvPr id="14" name="Rectangle 13"/>
-          <p:cNvSpPr/>
-          <p:nvPr/>
-        </p:nvSpPr>
-        <p:spPr>
-          <a:xfrm>
-            <a:off x="640080" y="5317036"/>
-            <a:ext cx="54864" cy="900883"/>
-          </a:xfrm>
-          <a:prstGeom prst="rect">
-            <a:avLst/>
-          </a:prstGeom>
-          <a:solidFill>
-            <a:srgbClr val="0D1117"/>
-          </a:solidFill>
-          <a:ln>
-            <a:solidFill>
-              <a:srgbClr val="0D1117"/>
-            </a:solidFill>
-          </a:ln>
-        </p:spPr>
-        <p:style>
-          <a:lnRef idx="1">
-            <a:schemeClr val="accent1"/>
-          </a:lnRef>
-          <a:fillRef idx="3">
-            <a:schemeClr val="accent1"/>
-          </a:fillRef>
-          <a:effectRef idx="2">
-            <a:schemeClr val="accent1"/>
-          </a:effectRef>
-          <a:fontRef idx="minor">
-            <a:schemeClr val="lt1"/>
-          </a:fontRef>
-        </p:style>
-        <p:txBody>
-          <a:bodyPr rtlCol="0" anchor="ctr"/>
-          <a:lstStyle/>
-          <a:p>
-            <a:pPr algn="ctr">
-              <a:defRPr>
-                <a:latin typeface="Inter"/>
-              </a:defRPr>
-            </a:pPr>
-          </a:p>
-        </p:txBody>
-      </p:sp>
-      <p:sp>
-        <p:nvSpPr>
-          <p:cNvPr id="15" name="TextBox 14"/>
+          <p:cNvPr id="12" name="TextBox 11"/>
           <p:cNvSpPr txBox="1"/>
           <p:nvPr/>
         </p:nvSpPr>
         <p:spPr>
           <a:xfrm>
-            <a:off x="804671" y="5426764"/>
-            <a:ext cx="10616184" cy="228600"/>
+            <a:off x="640080" y="6035039"/>
+            <a:ext cx="10908792" cy="164592"/>
           </a:xfrm>
           <a:prstGeom prst="rect">
             <a:avLst/>
@@ -9550,9 +8565,9 @@
               <a:spcAft>
                 <a:spcPts val="0"/>
               </a:spcAft>
-              <a:defRPr sz="1000" b="1">
+              <a:defRPr sz="680" b="0">
                 <a:solidFill>
-                  <a:srgbClr val="0D1117"/>
+                  <a:srgbClr val="8A94A1"/>
                 </a:solidFill>
                 <a:latin typeface="Inter"/>
               </a:defRPr>
@@ -9561,56 +8576,14 @@
               <a:rPr>
                 <a:latin typeface="Inter"/>
               </a:rPr>
-              <a:t>Method boundary</a:t>
+              <a:t>Data scope for every source: Illustrative sample data. Each digest is the SHA-256 fingerprint of the exact data the report used.</a:t>
             </a:r>
           </a:p>
         </p:txBody>
       </p:sp>
       <p:sp>
         <p:nvSpPr>
-          <p:cNvPr id="16" name="TextBox 15"/>
-          <p:cNvSpPr txBox="1"/>
-          <p:nvPr/>
-        </p:nvSpPr>
-        <p:spPr>
-          <a:xfrm>
-            <a:off x="804671" y="5710228"/>
-            <a:ext cx="10616184" cy="416251"/>
-          </a:xfrm>
-          <a:prstGeom prst="rect">
-            <a:avLst/>
-          </a:prstGeom>
-          <a:noFill/>
-        </p:spPr>
-        <p:txBody>
-          <a:bodyPr wrap="none" lIns="9144" rIns="9144" tIns="9144" bIns="9144" anchor="t">
-            <a:spAutoFit/>
-          </a:bodyPr>
-          <a:lstStyle/>
-          <a:p>
-            <a:pPr algn="l">
-              <a:spcAft>
-                <a:spcPts val="0"/>
-              </a:spcAft>
-              <a:defRPr sz="950" b="0">
-                <a:solidFill>
-                  <a:srgbClr val="4A5563"/>
-                </a:solidFill>
-                <a:latin typeface="Inter"/>
-              </a:defRPr>
-            </a:pPr>
-            <a:r>
-              <a:rPr>
-                <a:latin typeface="Inter"/>
-              </a:rPr>
-              <a:t>Numeric gaps and verdicts are reproduced from the saved reconciliation; no local verdict or filed value was synthesized [S1][S2].</a:t>
-            </a:r>
-          </a:p>
-        </p:txBody>
-      </p:sp>
-      <p:sp>
-        <p:nvSpPr>
-          <p:cNvPr id="17" name="Rectangle 16"/>
+          <p:cNvPr id="13" name="Rectangle 12"/>
           <p:cNvSpPr/>
           <p:nvPr/>
         </p:nvSpPr>
@@ -9659,7 +8632,7 @@
       </p:sp>
       <p:sp>
         <p:nvSpPr>
-          <p:cNvPr id="18" name="TextBox 17"/>
+          <p:cNvPr id="14" name="TextBox 13"/>
           <p:cNvSpPr txBox="1"/>
           <p:nvPr/>
         </p:nvSpPr>
@@ -9701,7 +8674,7 @@
       </p:sp>
       <p:sp>
         <p:nvSpPr>
-          <p:cNvPr id="19" name="TextBox 18"/>
+          <p:cNvPr id="15" name="TextBox 14"/>
           <p:cNvSpPr txBox="1"/>
           <p:nvPr/>
         </p:nvSpPr>
@@ -9743,7 +8716,7 @@
       </p:sp>
       <p:sp>
         <p:nvSpPr>
-          <p:cNvPr id="20" name="TextBox 19"/>
+          <p:cNvPr id="16" name="TextBox 15"/>
           <p:cNvSpPr txBox="1"/>
           <p:nvPr/>
         </p:nvSpPr>
@@ -9858,48 +8831,6 @@
         </p:nvSpPr>
         <p:spPr>
           <a:xfrm>
-            <a:off x="5897880" y="310896"/>
-            <a:ext cx="4800600" cy="256032"/>
-          </a:xfrm>
-          <a:prstGeom prst="rect">
-            <a:avLst/>
-          </a:prstGeom>
-          <a:noFill/>
-        </p:spPr>
-        <p:txBody>
-          <a:bodyPr wrap="none" lIns="9144" rIns="9144" tIns="9144" bIns="9144" anchor="t">
-            <a:spAutoFit/>
-          </a:bodyPr>
-          <a:lstStyle/>
-          <a:p>
-            <a:pPr algn="r">
-              <a:spcAft>
-                <a:spcPts val="0"/>
-              </a:spcAft>
-              <a:defRPr sz="680" b="1">
-                <a:solidFill>
-                  <a:srgbClr val="4F6B00"/>
-                </a:solidFill>
-                <a:latin typeface="Inter"/>
-              </a:defRPr>
-            </a:pPr>
-            <a:r>
-              <a:rPr>
-                <a:latin typeface="Inter"/>
-              </a:rPr>
-              <a:t>Illustrative, Gradient Maintained — demo data, not the client's holdings or managers</a:t>
-            </a:r>
-          </a:p>
-        </p:txBody>
-      </p:sp>
-      <p:sp>
-        <p:nvSpPr>
-          <p:cNvPr id="4" name="TextBox 3"/>
-          <p:cNvSpPr txBox="1"/>
-          <p:nvPr/>
-        </p:nvSpPr>
-        <p:spPr>
-          <a:xfrm>
             <a:off x="640080" y="566928"/>
             <a:ext cx="10058400" cy="530352"/>
           </a:xfrm>
@@ -9936,7 +8867,7 @@
       </p:sp>
       <p:sp>
         <p:nvSpPr>
-          <p:cNvPr id="5" name="Rectangle 4"/>
+          <p:cNvPr id="4" name="Rectangle 3"/>
           <p:cNvSpPr/>
           <p:nvPr/>
         </p:nvSpPr>
@@ -9985,7 +8916,7 @@
       </p:sp>
       <p:sp>
         <p:nvSpPr>
-          <p:cNvPr id="6" name="Rectangle 5"/>
+          <p:cNvPr id="5" name="Rectangle 4"/>
           <p:cNvSpPr/>
           <p:nvPr/>
         </p:nvSpPr>
@@ -10034,7 +8965,7 @@
       </p:sp>
       <p:sp>
         <p:nvSpPr>
-          <p:cNvPr id="7" name="TextBox 6"/>
+          <p:cNvPr id="6" name="TextBox 5"/>
           <p:cNvSpPr txBox="1"/>
           <p:nvPr/>
         </p:nvSpPr>
@@ -10076,306 +9007,14 @@
       </p:sp>
       <p:sp>
         <p:nvSpPr>
-          <p:cNvPr id="8" name="TextBox 7"/>
-          <p:cNvSpPr txBox="1"/>
+          <p:cNvPr id="7" name="Rectangle 6"/>
+          <p:cNvSpPr/>
           <p:nvPr/>
         </p:nvSpPr>
         <p:spPr>
           <a:xfrm>
             <a:off x="640080" y="1325880"/>
-            <a:ext cx="10908792" cy="201168"/>
-          </a:xfrm>
-          <a:prstGeom prst="rect">
-            <a:avLst/>
-          </a:prstGeom>
-          <a:noFill/>
-        </p:spPr>
-        <p:txBody>
-          <a:bodyPr wrap="none" lIns="9144" rIns="9144" tIns="9144" bIns="9144" anchor="t">
-            <a:spAutoFit/>
-          </a:bodyPr>
-          <a:lstStyle/>
-          <a:p>
-            <a:pPr algn="l">
-              <a:spcAft>
-                <a:spcPts val="0"/>
-              </a:spcAft>
-              <a:defRPr sz="720" b="1">
-                <a:solidFill>
-                  <a:srgbClr val="4A5563"/>
-                </a:solidFill>
-                <a:latin typeface="Inter"/>
-              </a:defRPr>
-            </a:pPr>
-            <a:r>
-              <a:rPr>
-                <a:latin typeface="Inter"/>
-              </a:rPr>
-              <a:t>VERDICTS</a:t>
-            </a:r>
-          </a:p>
-        </p:txBody>
-      </p:sp>
-      <p:graphicFrame>
-        <p:nvGraphicFramePr>
-          <p:cNvPr id="9" name="Table 8"/>
-          <p:cNvGraphicFramePr>
-            <a:graphicFrameLocks noGrp="1"/>
-          </p:cNvGraphicFramePr>
-          <p:nvPr/>
-        </p:nvGraphicFramePr>
-        <p:xfrm>
-          <a:off x="640080" y="1600200"/>
-          <a:ext cx="10908792" cy="2946678"/>
-        </p:xfrm>
-        <a:graphic>
-          <a:graphicData uri="http://schemas.openxmlformats.org/drawingml/2006/table">
-            <a:tbl>
-              <a:tblPr firstRow="1" bandRow="1">
-                <a:tableStyleId>{5C22544A-7EE6-4342-B048-85BDC9FD1C3A}</a:tableStyleId>
-              </a:tblPr>
-              <a:tblGrid>
-                <a:gridCol w="2011680"/>
-                <a:gridCol w="8897112"/>
-              </a:tblGrid>
-              <a:tr h="736669">
-                <a:tc>
-                  <a:txBody>
-                    <a:bodyPr/>
-                    <a:lstStyle/>
-                    <a:p>
-                      <a:pPr>
-                        <a:defRPr sz="800" b="1">
-                          <a:solidFill>
-                            <a:srgbClr val="0D1117"/>
-                          </a:solidFill>
-                          <a:latin typeface="Inter"/>
-                        </a:defRPr>
-                      </a:pPr>
-                      <a:r>
-                        <a:rPr>
-                          <a:latin typeface="Inter"/>
-                        </a:rPr>
-                        <a:t>Consistent / corroborated</a:t>
-                      </a:r>
-                    </a:p>
-                  </a:txBody>
-                  <a:tcPr marL="54864" marR="54864" marT="27432" marB="27432" anchor="ctr">
-                    <a:solidFill>
-                      <a:srgbClr val="FFFFFF"/>
-                    </a:solidFill>
-                  </a:tcPr>
-                </a:tc>
-                <a:tc>
-                  <a:txBody>
-                    <a:bodyPr/>
-                    <a:lstStyle/>
-                    <a:p>
-                      <a:pPr>
-                        <a:defRPr sz="800" b="0">
-                          <a:solidFill>
-                            <a:srgbClr val="0D1117"/>
-                          </a:solidFill>
-                          <a:latin typeface="Inter"/>
-                        </a:defRPr>
-                      </a:pPr>
-                      <a:r>
-                        <a:rPr>
-                          <a:latin typeface="Inter"/>
-                        </a:rPr>
-                        <a:t>Exact match, legal-suffix match or within tolerance</a:t>
-                      </a:r>
-                    </a:p>
-                  </a:txBody>
-                  <a:tcPr marL="54864" marR="54864" marT="27432" marB="27432" anchor="ctr">
-                    <a:solidFill>
-                      <a:srgbClr val="FFFFFF"/>
-                    </a:solidFill>
-                  </a:tcPr>
-                </a:tc>
-              </a:tr>
-              <a:tr h="736669">
-                <a:tc>
-                  <a:txBody>
-                    <a:bodyPr/>
-                    <a:lstStyle/>
-                    <a:p>
-                      <a:pPr>
-                        <a:defRPr sz="800" b="1">
-                          <a:solidFill>
-                            <a:srgbClr val="0D1117"/>
-                          </a:solidFill>
-                          <a:latin typeface="Inter"/>
-                        </a:defRPr>
-                      </a:pPr>
-                      <a:r>
-                        <a:rPr>
-                          <a:latin typeface="Inter"/>
-                        </a:rPr>
-                        <a:t>Contradicted</a:t>
-                      </a:r>
-                    </a:p>
-                  </a:txBody>
-                  <a:tcPr marL="54864" marR="54864" marT="27432" marB="27432" anchor="ctr">
-                    <a:solidFill>
-                      <a:srgbClr val="F5F7F9"/>
-                    </a:solidFill>
-                  </a:tcPr>
-                </a:tc>
-                <a:tc>
-                  <a:txBody>
-                    <a:bodyPr/>
-                    <a:lstStyle/>
-                    <a:p>
-                      <a:pPr>
-                        <a:defRPr sz="800" b="0">
-                          <a:solidFill>
-                            <a:srgbClr val="0D1117"/>
-                          </a:solidFill>
-                          <a:latin typeface="Inter"/>
-                        </a:defRPr>
-                      </a:pPr>
-                      <a:r>
-                        <a:rPr>
-                          <a:latin typeface="Inter"/>
-                        </a:rPr>
-                        <a:t>Numeric or name mismatch beyond tolerance</a:t>
-                      </a:r>
-                    </a:p>
-                  </a:txBody>
-                  <a:tcPr marL="54864" marR="54864" marT="27432" marB="27432" anchor="ctr">
-                    <a:solidFill>
-                      <a:srgbClr val="F5F7F9"/>
-                    </a:solidFill>
-                  </a:tcPr>
-                </a:tc>
-              </a:tr>
-              <a:tr h="736669">
-                <a:tc>
-                  <a:txBody>
-                    <a:bodyPr/>
-                    <a:lstStyle/>
-                    <a:p>
-                      <a:pPr>
-                        <a:defRPr sz="800" b="1">
-                          <a:solidFill>
-                            <a:srgbClr val="0D1117"/>
-                          </a:solidFill>
-                          <a:latin typeface="Inter"/>
-                        </a:defRPr>
-                      </a:pPr>
-                      <a:r>
-                        <a:rPr>
-                          <a:latin typeface="Inter"/>
-                        </a:rPr>
-                        <a:t>Needs review</a:t>
-                      </a:r>
-                    </a:p>
-                  </a:txBody>
-                  <a:tcPr marL="54864" marR="54864" marT="27432" marB="27432" anchor="ctr">
-                    <a:solidFill>
-                      <a:srgbClr val="FFFFFF"/>
-                    </a:solidFill>
-                  </a:tcPr>
-                </a:tc>
-                <a:tc>
-                  <a:txBody>
-                    <a:bodyPr/>
-                    <a:lstStyle/>
-                    <a:p>
-                      <a:pPr>
-                        <a:defRPr sz="800" b="0">
-                          <a:solidFill>
-                            <a:srgbClr val="0D1117"/>
-                          </a:solidFill>
-                          <a:latin typeface="Inter"/>
-                        </a:defRPr>
-                      </a:pPr>
-                      <a:r>
-                        <a:rPr>
-                          <a:latin typeface="Inter"/>
-                        </a:rPr>
-                        <a:t>Partial overlap, e.g. DDQ lists a subset of filed providers</a:t>
-                      </a:r>
-                    </a:p>
-                  </a:txBody>
-                  <a:tcPr marL="54864" marR="54864" marT="27432" marB="27432" anchor="ctr">
-                    <a:solidFill>
-                      <a:srgbClr val="FFFFFF"/>
-                    </a:solidFill>
-                  </a:tcPr>
-                </a:tc>
-              </a:tr>
-              <a:tr h="736671">
-                <a:tc>
-                  <a:txBody>
-                    <a:bodyPr/>
-                    <a:lstStyle/>
-                    <a:p>
-                      <a:pPr>
-                        <a:defRPr sz="800" b="1">
-                          <a:solidFill>
-                            <a:srgbClr val="0D1117"/>
-                          </a:solidFill>
-                          <a:latin typeface="Inter"/>
-                        </a:defRPr>
-                      </a:pPr>
-                      <a:r>
-                        <a:rPr>
-                          <a:latin typeface="Inter"/>
-                        </a:rPr>
-                        <a:t>Unverifiable</a:t>
-                      </a:r>
-                    </a:p>
-                  </a:txBody>
-                  <a:tcPr marL="54864" marR="54864" marT="27432" marB="27432" anchor="ctr">
-                    <a:solidFill>
-                      <a:srgbClr val="F5F7F9"/>
-                    </a:solidFill>
-                  </a:tcPr>
-                </a:tc>
-                <a:tc>
-                  <a:txBody>
-                    <a:bodyPr/>
-                    <a:lstStyle/>
-                    <a:p>
-                      <a:pPr>
-                        <a:defRPr sz="800" b="0">
-                          <a:solidFill>
-                            <a:srgbClr val="0D1117"/>
-                          </a:solidFill>
-                          <a:latin typeface="Inter"/>
-                        </a:defRPr>
-                      </a:pPr>
-                      <a:r>
-                        <a:rPr>
-                          <a:latin typeface="Inter"/>
-                        </a:rPr>
-                        <a:t>No filed value to compare</a:t>
-                      </a:r>
-                    </a:p>
-                  </a:txBody>
-                  <a:tcPr marL="54864" marR="54864" marT="27432" marB="27432" anchor="ctr">
-                    <a:solidFill>
-                      <a:srgbClr val="F5F7F9"/>
-                    </a:solidFill>
-                  </a:tcPr>
-                </a:tc>
-              </a:tr>
-            </a:tbl>
-          </a:graphicData>
-        </a:graphic>
-      </p:graphicFrame>
-      <p:sp>
-        <p:nvSpPr>
-          <p:cNvPr id="10" name="Rectangle 9"/>
-          <p:cNvSpPr/>
-          <p:nvPr/>
-        </p:nvSpPr>
-        <p:spPr>
-          <a:xfrm>
-            <a:off x="640080" y="4656606"/>
-            <a:ext cx="10908792" cy="1561313"/>
+            <a:ext cx="10908792" cy="4892040"/>
           </a:xfrm>
           <a:prstGeom prst="rect">
             <a:avLst/>
@@ -10417,14 +9056,431 @@
       </p:sp>
       <p:sp>
         <p:nvSpPr>
+          <p:cNvPr id="8" name="Rectangle 7"/>
+          <p:cNvSpPr/>
+          <p:nvPr/>
+        </p:nvSpPr>
+        <p:spPr>
+          <a:xfrm>
+            <a:off x="640080" y="1325880"/>
+            <a:ext cx="54864" cy="4892040"/>
+          </a:xfrm>
+          <a:prstGeom prst="rect">
+            <a:avLst/>
+          </a:prstGeom>
+          <a:solidFill>
+            <a:srgbClr val="F2A93B"/>
+          </a:solidFill>
+          <a:ln>
+            <a:solidFill>
+              <a:srgbClr val="F2A93B"/>
+            </a:solidFill>
+          </a:ln>
+        </p:spPr>
+        <p:style>
+          <a:lnRef idx="1">
+            <a:schemeClr val="accent1"/>
+          </a:lnRef>
+          <a:fillRef idx="3">
+            <a:schemeClr val="accent1"/>
+          </a:fillRef>
+          <a:effectRef idx="2">
+            <a:schemeClr val="accent1"/>
+          </a:effectRef>
+          <a:fontRef idx="minor">
+            <a:schemeClr val="lt1"/>
+          </a:fontRef>
+        </p:style>
+        <p:txBody>
+          <a:bodyPr rtlCol="0" anchor="ctr"/>
+          <a:lstStyle/>
+          <a:p>
+            <a:pPr algn="ctr">
+              <a:defRPr>
+                <a:latin typeface="Inter"/>
+              </a:defRPr>
+            </a:pPr>
+          </a:p>
+        </p:txBody>
+      </p:sp>
+      <p:sp>
+        <p:nvSpPr>
+          <p:cNvPr id="9" name="TextBox 8"/>
+          <p:cNvSpPr txBox="1"/>
+          <p:nvPr/>
+        </p:nvSpPr>
+        <p:spPr>
+          <a:xfrm>
+            <a:off x="804671" y="1435607"/>
+            <a:ext cx="10616184" cy="228600"/>
+          </a:xfrm>
+          <a:prstGeom prst="rect">
+            <a:avLst/>
+          </a:prstGeom>
+          <a:noFill/>
+        </p:spPr>
+        <p:txBody>
+          <a:bodyPr wrap="none" lIns="9144" rIns="9144" tIns="9144" bIns="9144" anchor="t">
+            <a:spAutoFit/>
+          </a:bodyPr>
+          <a:lstStyle/>
+          <a:p>
+            <a:pPr algn="l">
+              <a:spcAft>
+                <a:spcPts val="0"/>
+              </a:spcAft>
+              <a:defRPr sz="1000" b="1">
+                <a:solidFill>
+                  <a:srgbClr val="0D1117"/>
+                </a:solidFill>
+                <a:latin typeface="Inter"/>
+              </a:defRPr>
+            </a:pPr>
+            <a:r>
+              <a:rPr>
+                <a:latin typeface="Inter"/>
+              </a:rPr>
+              <a:t>Unsupported block</a:t>
+            </a:r>
+          </a:p>
+        </p:txBody>
+      </p:sp>
+      <p:sp>
+        <p:nvSpPr>
+          <p:cNvPr id="10" name="TextBox 9"/>
+          <p:cNvSpPr txBox="1"/>
+          <p:nvPr/>
+        </p:nvSpPr>
+        <p:spPr>
+          <a:xfrm>
+            <a:off x="804671" y="1719072"/>
+            <a:ext cx="10616184" cy="4407408"/>
+          </a:xfrm>
+          <a:prstGeom prst="rect">
+            <a:avLst/>
+          </a:prstGeom>
+          <a:noFill/>
+        </p:spPr>
+        <p:txBody>
+          <a:bodyPr wrap="none" lIns="9144" rIns="9144" tIns="9144" bIns="9144" anchor="t">
+            <a:spAutoFit/>
+          </a:bodyPr>
+          <a:lstStyle/>
+          <a:p>
+            <a:pPr algn="l">
+              <a:spcAft>
+                <a:spcPts val="0"/>
+              </a:spcAft>
+              <a:defRPr sz="950" b="0">
+                <a:solidFill>
+                  <a:srgbClr val="4A5563"/>
+                </a:solidFill>
+                <a:latin typeface="Inter"/>
+              </a:defRPr>
+            </a:pPr>
+            <a:r>
+              <a:rPr>
+                <a:latin typeface="Inter"/>
+              </a:rPr>
+              <a:t>Block type 'two_col' is not available in PowerPoint.</a:t>
+            </a:r>
+          </a:p>
+        </p:txBody>
+      </p:sp>
+      <p:sp>
+        <p:nvSpPr>
           <p:cNvPr id="11" name="Rectangle 10"/>
           <p:cNvSpPr/>
           <p:nvPr/>
         </p:nvSpPr>
         <p:spPr>
           <a:xfrm>
-            <a:off x="640080" y="4656606"/>
-            <a:ext cx="54864" cy="1561313"/>
+            <a:off x="640080" y="6446520"/>
+            <a:ext cx="10908792" cy="9144"/>
+          </a:xfrm>
+          <a:prstGeom prst="rect">
+            <a:avLst/>
+          </a:prstGeom>
+          <a:solidFill>
+            <a:srgbClr val="E3E7EC"/>
+          </a:solidFill>
+          <a:ln>
+            <a:solidFill>
+              <a:srgbClr val="E3E7EC"/>
+            </a:solidFill>
+          </a:ln>
+        </p:spPr>
+        <p:style>
+          <a:lnRef idx="1">
+            <a:schemeClr val="accent1"/>
+          </a:lnRef>
+          <a:fillRef idx="3">
+            <a:schemeClr val="accent1"/>
+          </a:fillRef>
+          <a:effectRef idx="2">
+            <a:schemeClr val="accent1"/>
+          </a:effectRef>
+          <a:fontRef idx="minor">
+            <a:schemeClr val="lt1"/>
+          </a:fontRef>
+        </p:style>
+        <p:txBody>
+          <a:bodyPr rtlCol="0" anchor="ctr"/>
+          <a:lstStyle/>
+          <a:p>
+            <a:pPr algn="ctr">
+              <a:defRPr>
+                <a:latin typeface="Inter"/>
+              </a:defRPr>
+            </a:pPr>
+          </a:p>
+        </p:txBody>
+      </p:sp>
+      <p:sp>
+        <p:nvSpPr>
+          <p:cNvPr id="12" name="TextBox 11"/>
+          <p:cNvSpPr txBox="1"/>
+          <p:nvPr/>
+        </p:nvSpPr>
+        <p:spPr>
+          <a:xfrm>
+            <a:off x="640080" y="6501384"/>
+            <a:ext cx="4297680" cy="146304"/>
+          </a:xfrm>
+          <a:prstGeom prst="rect">
+            <a:avLst/>
+          </a:prstGeom>
+          <a:noFill/>
+        </p:spPr>
+        <p:txBody>
+          <a:bodyPr wrap="none" lIns="9144" rIns="9144" tIns="9144" bIns="9144" anchor="t">
+            <a:spAutoFit/>
+          </a:bodyPr>
+          <a:lstStyle/>
+          <a:p>
+            <a:pPr algn="l">
+              <a:spcAft>
+                <a:spcPts val="0"/>
+              </a:spcAft>
+              <a:defRPr sz="650" b="0">
+                <a:solidFill>
+                  <a:srgbClr val="8A94A1"/>
+                </a:solidFill>
+                <a:latin typeface="Inter"/>
+              </a:defRPr>
+            </a:pPr>
+            <a:r>
+              <a:rPr>
+                <a:latin typeface="Inter"/>
+              </a:rPr>
+              <a:t>Sources: S1 · S2</a:t>
+            </a:r>
+          </a:p>
+        </p:txBody>
+      </p:sp>
+      <p:sp>
+        <p:nvSpPr>
+          <p:cNvPr id="13" name="TextBox 12"/>
+          <p:cNvSpPr txBox="1"/>
+          <p:nvPr/>
+        </p:nvSpPr>
+        <p:spPr>
+          <a:xfrm>
+            <a:off x="4480560" y="6501384"/>
+            <a:ext cx="5303520" cy="146304"/>
+          </a:xfrm>
+          <a:prstGeom prst="rect">
+            <a:avLst/>
+          </a:prstGeom>
+          <a:noFill/>
+        </p:spPr>
+        <p:txBody>
+          <a:bodyPr wrap="none" lIns="9144" rIns="9144" tIns="9144" bIns="9144" anchor="t">
+            <a:spAutoFit/>
+          </a:bodyPr>
+          <a:lstStyle/>
+          <a:p>
+            <a:pPr algn="ctr">
+              <a:spcAft>
+                <a:spcPts val="0"/>
+              </a:spcAft>
+              <a:defRPr sz="650" b="0">
+                <a:solidFill>
+                  <a:srgbClr val="8A94A1"/>
+                </a:solidFill>
+                <a:latin typeface="Inter"/>
+              </a:defRPr>
+            </a:pPr>
+            <a:r>
+              <a:rPr>
+                <a:latin typeface="Inter"/>
+              </a:rPr>
+              <a:t>Confidential — manager diligence review · Data as of 2026-10-01 (Form ADV); DDQ responses as of 2026-09-30</a:t>
+            </a:r>
+          </a:p>
+        </p:txBody>
+      </p:sp>
+      <p:sp>
+        <p:nvSpPr>
+          <p:cNvPr id="14" name="TextBox 13"/>
+          <p:cNvSpPr txBox="1"/>
+          <p:nvPr/>
+        </p:nvSpPr>
+        <p:spPr>
+          <a:xfrm>
+            <a:off x="10287000" y="6501384"/>
+            <a:ext cx="1261872" cy="146304"/>
+          </a:xfrm>
+          <a:prstGeom prst="rect">
+            <a:avLst/>
+          </a:prstGeom>
+          <a:noFill/>
+        </p:spPr>
+        <p:txBody>
+          <a:bodyPr wrap="none" lIns="9144" rIns="9144" tIns="9144" bIns="9144" anchor="t">
+            <a:spAutoFit/>
+          </a:bodyPr>
+          <a:lstStyle/>
+          <a:p>
+            <a:pPr algn="r">
+              <a:spcAft>
+                <a:spcPts val="0"/>
+              </a:spcAft>
+              <a:defRPr sz="650" b="0">
+                <a:solidFill>
+                  <a:srgbClr val="8A94A1"/>
+                </a:solidFill>
+                <a:latin typeface="Inter"/>
+              </a:defRPr>
+            </a:pPr>
+            <a:r>
+              <a:rPr>
+                <a:latin typeface="Inter"/>
+              </a:rPr>
+              <a:t>13</a:t>
+            </a:r>
+          </a:p>
+        </p:txBody>
+      </p:sp>
+    </p:spTree>
+  </p:cSld>
+  <p:clrMapOvr>
+    <a:masterClrMapping/>
+  </p:clrMapOvr>
+</p:sld>
+</file>
+
+<file path=ppt/slides/slide14.xml><?xml version="1.0" encoding="utf-8"?>
+<p:sld xmlns:a="http://schemas.openxmlformats.org/drawingml/2006/main" xmlns:p="http://schemas.openxmlformats.org/presentationml/2006/main" xmlns:r="http://schemas.openxmlformats.org/officeDocument/2006/relationships">
+  <p:cSld>
+    <p:spTree>
+      <p:nvGrpSpPr>
+        <p:cNvPr id="1" name=""/>
+        <p:cNvGrpSpPr/>
+        <p:nvPr/>
+      </p:nvGrpSpPr>
+      <p:grpSpPr/>
+      <p:sp>
+        <p:nvSpPr>
+          <p:cNvPr id="2" name="Rectangle 1"/>
+          <p:cNvSpPr/>
+          <p:nvPr/>
+        </p:nvSpPr>
+        <p:spPr>
+          <a:xfrm>
+            <a:off x="0" y="0"/>
+            <a:ext cx="12191695" cy="6858000"/>
+          </a:xfrm>
+          <a:prstGeom prst="rect">
+            <a:avLst/>
+          </a:prstGeom>
+          <a:solidFill>
+            <a:srgbClr val="FFFFFF"/>
+          </a:solidFill>
+          <a:ln>
+            <a:solidFill>
+              <a:srgbClr val="FFFFFF"/>
+            </a:solidFill>
+          </a:ln>
+        </p:spPr>
+        <p:style>
+          <a:lnRef idx="1">
+            <a:schemeClr val="accent1"/>
+          </a:lnRef>
+          <a:fillRef idx="3">
+            <a:schemeClr val="accent1"/>
+          </a:fillRef>
+          <a:effectRef idx="2">
+            <a:schemeClr val="accent1"/>
+          </a:effectRef>
+          <a:fontRef idx="minor">
+            <a:schemeClr val="lt1"/>
+          </a:fontRef>
+        </p:style>
+        <p:txBody>
+          <a:bodyPr rtlCol="0" anchor="ctr"/>
+          <a:lstStyle/>
+          <a:p>
+            <a:pPr algn="ctr">
+              <a:defRPr>
+                <a:latin typeface="Inter"/>
+              </a:defRPr>
+            </a:pPr>
+          </a:p>
+        </p:txBody>
+      </p:sp>
+      <p:sp>
+        <p:nvSpPr>
+          <p:cNvPr id="3" name="TextBox 2"/>
+          <p:cNvSpPr txBox="1"/>
+          <p:nvPr/>
+        </p:nvSpPr>
+        <p:spPr>
+          <a:xfrm>
+            <a:off x="640080" y="566928"/>
+            <a:ext cx="10058400" cy="530352"/>
+          </a:xfrm>
+          <a:prstGeom prst="rect">
+            <a:avLst/>
+          </a:prstGeom>
+          <a:noFill/>
+        </p:spPr>
+        <p:txBody>
+          <a:bodyPr wrap="none" lIns="9144" rIns="9144" tIns="9144" bIns="9144" anchor="t">
+            <a:spAutoFit/>
+          </a:bodyPr>
+          <a:lstStyle/>
+          <a:p>
+            <a:pPr algn="l">
+              <a:spcAft>
+                <a:spcPts val="0"/>
+              </a:spcAft>
+              <a:defRPr sz="2300" b="1">
+                <a:solidFill>
+                  <a:srgbClr val="0D1117"/>
+                </a:solidFill>
+                <a:latin typeface="Inter"/>
+              </a:defRPr>
+            </a:pPr>
+            <a:r>
+              <a:rPr>
+                <a:latin typeface="Inter"/>
+              </a:rPr>
+              <a:t>Appendix — Sources and methods — continued</a:t>
+            </a:r>
+          </a:p>
+        </p:txBody>
+      </p:sp>
+      <p:sp>
+        <p:nvSpPr>
+          <p:cNvPr id="4" name="Rectangle 3"/>
+          <p:cNvSpPr/>
+          <p:nvPr/>
+        </p:nvSpPr>
+        <p:spPr>
+          <a:xfrm>
+            <a:off x="640080" y="1115568"/>
+            <a:ext cx="10908792" cy="18288"/>
           </a:xfrm>
           <a:prstGeom prst="rect">
             <a:avLst/>
@@ -10466,13 +9522,202 @@
       </p:sp>
       <p:sp>
         <p:nvSpPr>
-          <p:cNvPr id="12" name="TextBox 11"/>
+          <p:cNvPr id="5" name="Rectangle 4"/>
+          <p:cNvSpPr/>
+          <p:nvPr/>
+        </p:nvSpPr>
+        <p:spPr>
+          <a:xfrm>
+            <a:off x="11018520" y="502920"/>
+            <a:ext cx="530352" cy="393192"/>
+          </a:xfrm>
+          <a:prstGeom prst="rect">
+            <a:avLst/>
+          </a:prstGeom>
+          <a:solidFill>
+            <a:srgbClr val="9AA5B1"/>
+          </a:solidFill>
+          <a:ln>
+            <a:solidFill>
+              <a:srgbClr val="9AA5B1"/>
+            </a:solidFill>
+          </a:ln>
+        </p:spPr>
+        <p:style>
+          <a:lnRef idx="1">
+            <a:schemeClr val="accent1"/>
+          </a:lnRef>
+          <a:fillRef idx="3">
+            <a:schemeClr val="accent1"/>
+          </a:fillRef>
+          <a:effectRef idx="2">
+            <a:schemeClr val="accent1"/>
+          </a:effectRef>
+          <a:fontRef idx="minor">
+            <a:schemeClr val="lt1"/>
+          </a:fontRef>
+        </p:style>
+        <p:txBody>
+          <a:bodyPr rtlCol="0" anchor="ctr"/>
+          <a:lstStyle/>
+          <a:p>
+            <a:pPr algn="ctr">
+              <a:defRPr>
+                <a:latin typeface="Inter"/>
+              </a:defRPr>
+            </a:pPr>
+          </a:p>
+        </p:txBody>
+      </p:sp>
+      <p:sp>
+        <p:nvSpPr>
+          <p:cNvPr id="6" name="TextBox 5"/>
           <p:cNvSpPr txBox="1"/>
           <p:nvPr/>
         </p:nvSpPr>
         <p:spPr>
           <a:xfrm>
-            <a:off x="804671" y="4766334"/>
+            <a:off x="11045952" y="557784"/>
+            <a:ext cx="475488" cy="182880"/>
+          </a:xfrm>
+          <a:prstGeom prst="rect">
+            <a:avLst/>
+          </a:prstGeom>
+          <a:noFill/>
+        </p:spPr>
+        <p:txBody>
+          <a:bodyPr wrap="none" lIns="9144" rIns="9144" tIns="9144" bIns="9144" anchor="t">
+            <a:spAutoFit/>
+          </a:bodyPr>
+          <a:lstStyle/>
+          <a:p>
+            <a:pPr algn="ctr">
+              <a:spcAft>
+                <a:spcPts val="0"/>
+              </a:spcAft>
+              <a:defRPr sz="1000" b="1">
+                <a:solidFill>
+                  <a:srgbClr val="0D1117"/>
+                </a:solidFill>
+                <a:latin typeface="Inter"/>
+              </a:defRPr>
+            </a:pPr>
+            <a:r>
+              <a:rPr>
+                <a:latin typeface="Inter"/>
+              </a:rPr>
+              <a:t>A</a:t>
+            </a:r>
+          </a:p>
+        </p:txBody>
+      </p:sp>
+      <p:sp>
+        <p:nvSpPr>
+          <p:cNvPr id="7" name="Rectangle 6"/>
+          <p:cNvSpPr/>
+          <p:nvPr/>
+        </p:nvSpPr>
+        <p:spPr>
+          <a:xfrm>
+            <a:off x="640080" y="1325880"/>
+            <a:ext cx="10908792" cy="4892040"/>
+          </a:xfrm>
+          <a:prstGeom prst="rect">
+            <a:avLst/>
+          </a:prstGeom>
+          <a:solidFill>
+            <a:srgbClr val="F5F7F9"/>
+          </a:solidFill>
+          <a:ln>
+            <a:solidFill>
+              <a:srgbClr val="E3E7EC"/>
+            </a:solidFill>
+          </a:ln>
+        </p:spPr>
+        <p:style>
+          <a:lnRef idx="1">
+            <a:schemeClr val="accent1"/>
+          </a:lnRef>
+          <a:fillRef idx="3">
+            <a:schemeClr val="accent1"/>
+          </a:fillRef>
+          <a:effectRef idx="2">
+            <a:schemeClr val="accent1"/>
+          </a:effectRef>
+          <a:fontRef idx="minor">
+            <a:schemeClr val="lt1"/>
+          </a:fontRef>
+        </p:style>
+        <p:txBody>
+          <a:bodyPr rtlCol="0" anchor="ctr"/>
+          <a:lstStyle/>
+          <a:p>
+            <a:pPr algn="ctr">
+              <a:defRPr>
+                <a:latin typeface="Inter"/>
+              </a:defRPr>
+            </a:pPr>
+          </a:p>
+        </p:txBody>
+      </p:sp>
+      <p:sp>
+        <p:nvSpPr>
+          <p:cNvPr id="8" name="Rectangle 7"/>
+          <p:cNvSpPr/>
+          <p:nvPr/>
+        </p:nvSpPr>
+        <p:spPr>
+          <a:xfrm>
+            <a:off x="640080" y="1325880"/>
+            <a:ext cx="54864" cy="4892040"/>
+          </a:xfrm>
+          <a:prstGeom prst="rect">
+            <a:avLst/>
+          </a:prstGeom>
+          <a:solidFill>
+            <a:srgbClr val="0D1117"/>
+          </a:solidFill>
+          <a:ln>
+            <a:solidFill>
+              <a:srgbClr val="0D1117"/>
+            </a:solidFill>
+          </a:ln>
+        </p:spPr>
+        <p:style>
+          <a:lnRef idx="1">
+            <a:schemeClr val="accent1"/>
+          </a:lnRef>
+          <a:fillRef idx="3">
+            <a:schemeClr val="accent1"/>
+          </a:fillRef>
+          <a:effectRef idx="2">
+            <a:schemeClr val="accent1"/>
+          </a:effectRef>
+          <a:fontRef idx="minor">
+            <a:schemeClr val="lt1"/>
+          </a:fontRef>
+        </p:style>
+        <p:txBody>
+          <a:bodyPr rtlCol="0" anchor="ctr"/>
+          <a:lstStyle/>
+          <a:p>
+            <a:pPr algn="ctr">
+              <a:defRPr>
+                <a:latin typeface="Inter"/>
+              </a:defRPr>
+            </a:pPr>
+          </a:p>
+        </p:txBody>
+      </p:sp>
+      <p:sp>
+        <p:nvSpPr>
+          <p:cNvPr id="9" name="TextBox 8"/>
+          <p:cNvSpPr txBox="1"/>
+          <p:nvPr/>
+        </p:nvSpPr>
+        <p:spPr>
+          <a:xfrm>
+            <a:off x="804671" y="1435607"/>
             <a:ext cx="10616184" cy="228600"/>
           </a:xfrm>
           <a:prstGeom prst="rect">
@@ -10508,14 +9753,14 @@
       </p:sp>
       <p:sp>
         <p:nvSpPr>
-          <p:cNvPr id="13" name="TextBox 12"/>
+          <p:cNvPr id="10" name="TextBox 9"/>
           <p:cNvSpPr txBox="1"/>
           <p:nvPr/>
         </p:nvSpPr>
         <p:spPr>
           <a:xfrm>
-            <a:off x="804671" y="5049798"/>
-            <a:ext cx="10616184" cy="1076681"/>
+            <a:off x="804671" y="1719072"/>
+            <a:ext cx="10616184" cy="4407408"/>
           </a:xfrm>
           <a:prstGeom prst="rect">
             <a:avLst/>
@@ -10550,7 +9795,7 @@
       </p:sp>
       <p:sp>
         <p:nvSpPr>
-          <p:cNvPr id="14" name="Rectangle 13"/>
+          <p:cNvPr id="11" name="Rectangle 10"/>
           <p:cNvSpPr/>
           <p:nvPr/>
         </p:nvSpPr>
@@ -10599,7 +9844,7 @@
       </p:sp>
       <p:sp>
         <p:nvSpPr>
-          <p:cNvPr id="15" name="TextBox 14"/>
+          <p:cNvPr id="12" name="TextBox 11"/>
           <p:cNvSpPr txBox="1"/>
           <p:nvPr/>
         </p:nvSpPr>
@@ -10641,7 +9886,7 @@
       </p:sp>
       <p:sp>
         <p:nvSpPr>
-          <p:cNvPr id="16" name="TextBox 15"/>
+          <p:cNvPr id="13" name="TextBox 12"/>
           <p:cNvSpPr txBox="1"/>
           <p:nvPr/>
         </p:nvSpPr>
@@ -10683,7 +9928,7 @@
       </p:sp>
       <p:sp>
         <p:nvSpPr>
-          <p:cNvPr id="17" name="TextBox 16"/>
+          <p:cNvPr id="14" name="TextBox 13"/>
           <p:cNvSpPr txBox="1"/>
           <p:nvPr/>
         </p:nvSpPr>
@@ -10718,7 +9963,7 @@
               <a:rPr>
                 <a:latin typeface="Inter"/>
               </a:rPr>
-              <a:t>13</a:t>
+              <a:t>14</a:t>
             </a:r>
           </a:p>
         </p:txBody>
@@ -10799,7 +10044,7 @@
         <p:spPr>
           <a:xfrm>
             <a:off x="640080" y="329184"/>
-            <a:ext cx="5303520" cy="182880"/>
+            <a:ext cx="9875520" cy="182880"/>
           </a:xfrm>
           <a:prstGeom prst="rect">
             <a:avLst/>
@@ -10840,48 +10085,6 @@
         </p:nvSpPr>
         <p:spPr>
           <a:xfrm>
-            <a:off x="5897880" y="310896"/>
-            <a:ext cx="4800600" cy="256032"/>
-          </a:xfrm>
-          <a:prstGeom prst="rect">
-            <a:avLst/>
-          </a:prstGeom>
-          <a:noFill/>
-        </p:spPr>
-        <p:txBody>
-          <a:bodyPr wrap="none" lIns="9144" rIns="9144" tIns="9144" bIns="9144" anchor="t">
-            <a:spAutoFit/>
-          </a:bodyPr>
-          <a:lstStyle/>
-          <a:p>
-            <a:pPr algn="r">
-              <a:spcAft>
-                <a:spcPts val="0"/>
-              </a:spcAft>
-              <a:defRPr sz="680" b="1">
-                <a:solidFill>
-                  <a:srgbClr val="4F6B00"/>
-                </a:solidFill>
-                <a:latin typeface="Inter"/>
-              </a:defRPr>
-            </a:pPr>
-            <a:r>
-              <a:rPr>
-                <a:latin typeface="Inter"/>
-              </a:rPr>
-              <a:t>Illustrative, Gradient Maintained — demo data, not the client's holdings or managers</a:t>
-            </a:r>
-          </a:p>
-        </p:txBody>
-      </p:sp>
-      <p:sp>
-        <p:nvSpPr>
-          <p:cNvPr id="5" name="TextBox 4"/>
-          <p:cNvSpPr txBox="1"/>
-          <p:nvPr/>
-        </p:nvSpPr>
-        <p:spPr>
-          <a:xfrm>
             <a:off x="640080" y="566928"/>
             <a:ext cx="10058400" cy="530352"/>
           </a:xfrm>
@@ -10918,7 +10121,7 @@
       </p:sp>
       <p:sp>
         <p:nvSpPr>
-          <p:cNvPr id="6" name="Rectangle 5"/>
+          <p:cNvPr id="5" name="Rectangle 4"/>
           <p:cNvSpPr/>
           <p:nvPr/>
         </p:nvSpPr>
@@ -10967,7 +10170,7 @@
       </p:sp>
       <p:sp>
         <p:nvSpPr>
-          <p:cNvPr id="7" name="Rectangle 6"/>
+          <p:cNvPr id="6" name="Rectangle 5"/>
           <p:cNvSpPr/>
           <p:nvPr/>
         </p:nvSpPr>
@@ -11016,7 +10219,7 @@
       </p:sp>
       <p:sp>
         <p:nvSpPr>
-          <p:cNvPr id="8" name="TextBox 7"/>
+          <p:cNvPr id="7" name="TextBox 6"/>
           <p:cNvSpPr txBox="1"/>
           <p:nvPr/>
         </p:nvSpPr>
@@ -11058,14 +10261,105 @@
       </p:sp>
       <p:sp>
         <p:nvSpPr>
-          <p:cNvPr id="9" name="Rectangle 8"/>
+          <p:cNvPr id="8" name="Rectangle 7"/>
           <p:cNvSpPr/>
           <p:nvPr/>
         </p:nvSpPr>
         <p:spPr>
           <a:xfrm>
-            <a:off x="640080" y="1325880"/>
-            <a:ext cx="5239512" cy="2893811"/>
+            <a:off x="640080" y="1399032"/>
+            <a:ext cx="73152" cy="1262632"/>
+          </a:xfrm>
+          <a:prstGeom prst="rect">
+            <a:avLst/>
+          </a:prstGeom>
+          <a:solidFill>
+            <a:srgbClr val="FF6B5E"/>
+          </a:solidFill>
+          <a:ln>
+            <a:solidFill>
+              <a:srgbClr val="FF6B5E"/>
+            </a:solidFill>
+          </a:ln>
+        </p:spPr>
+        <p:style>
+          <a:lnRef idx="1">
+            <a:schemeClr val="accent1"/>
+          </a:lnRef>
+          <a:fillRef idx="3">
+            <a:schemeClr val="accent1"/>
+          </a:fillRef>
+          <a:effectRef idx="2">
+            <a:schemeClr val="accent1"/>
+          </a:effectRef>
+          <a:fontRef idx="minor">
+            <a:schemeClr val="lt1"/>
+          </a:fontRef>
+        </p:style>
+        <p:txBody>
+          <a:bodyPr rtlCol="0" anchor="ctr"/>
+          <a:lstStyle/>
+          <a:p>
+            <a:pPr algn="ctr">
+              <a:defRPr>
+                <a:latin typeface="Inter"/>
+              </a:defRPr>
+            </a:pPr>
+          </a:p>
+        </p:txBody>
+      </p:sp>
+      <p:sp>
+        <p:nvSpPr>
+          <p:cNvPr id="9" name="TextBox 8"/>
+          <p:cNvSpPr txBox="1"/>
+          <p:nvPr/>
+        </p:nvSpPr>
+        <p:spPr>
+          <a:xfrm>
+            <a:off x="896112" y="1371600"/>
+            <a:ext cx="4919472" cy="817183"/>
+          </a:xfrm>
+          <a:prstGeom prst="rect">
+            <a:avLst/>
+          </a:prstGeom>
+          <a:noFill/>
+        </p:spPr>
+        <p:txBody>
+          <a:bodyPr wrap="none" lIns="9144" rIns="9144" tIns="9144" bIns="9144" anchor="t">
+            <a:spAutoFit/>
+          </a:bodyPr>
+          <a:lstStyle/>
+          <a:p>
+            <a:pPr algn="l">
+              <a:spcAft>
+                <a:spcPts val="0"/>
+              </a:spcAft>
+              <a:defRPr sz="1800" b="1">
+                <a:solidFill>
+                  <a:srgbClr val="0D1117"/>
+                </a:solidFill>
+                <a:latin typeface="Inter"/>
+              </a:defRPr>
+            </a:pPr>
+            <a:r>
+              <a:rPr>
+                <a:latin typeface="Inter"/>
+              </a:rPr>
+              <a:t>Four DDQ answers conflict with the filings</a:t>
+            </a:r>
+          </a:p>
+        </p:txBody>
+      </p:sp>
+      <p:sp>
+        <p:nvSpPr>
+          <p:cNvPr id="10" name="Rectangle 9"/>
+          <p:cNvSpPr/>
+          <p:nvPr/>
+        </p:nvSpPr>
+        <p:spPr>
+          <a:xfrm>
+            <a:off x="640080" y="2844544"/>
+            <a:ext cx="5239512" cy="3373375"/>
           </a:xfrm>
           <a:prstGeom prst="rect">
             <a:avLst/>
@@ -11107,14 +10401,14 @@
       </p:sp>
       <p:sp>
         <p:nvSpPr>
-          <p:cNvPr id="10" name="Rectangle 9"/>
+          <p:cNvPr id="11" name="Rectangle 10"/>
           <p:cNvSpPr/>
           <p:nvPr/>
         </p:nvSpPr>
         <p:spPr>
           <a:xfrm>
-            <a:off x="640080" y="1325880"/>
-            <a:ext cx="54864" cy="2893811"/>
+            <a:off x="640080" y="2844544"/>
+            <a:ext cx="54864" cy="3373375"/>
           </a:xfrm>
           <a:prstGeom prst="rect">
             <a:avLst/>
@@ -11156,13 +10450,13 @@
       </p:sp>
       <p:sp>
         <p:nvSpPr>
-          <p:cNvPr id="11" name="TextBox 10"/>
+          <p:cNvPr id="12" name="TextBox 11"/>
           <p:cNvSpPr txBox="1"/>
           <p:nvPr/>
         </p:nvSpPr>
         <p:spPr>
           <a:xfrm>
-            <a:off x="804671" y="1435607"/>
+            <a:off x="804671" y="2954272"/>
             <a:ext cx="4946904" cy="228600"/>
           </a:xfrm>
           <a:prstGeom prst="rect">
@@ -11198,14 +10492,14 @@
       </p:sp>
       <p:sp>
         <p:nvSpPr>
-          <p:cNvPr id="12" name="TextBox 11"/>
+          <p:cNvPr id="13" name="TextBox 12"/>
           <p:cNvSpPr txBox="1"/>
           <p:nvPr/>
         </p:nvSpPr>
         <p:spPr>
           <a:xfrm>
-            <a:off x="804671" y="1719072"/>
-            <a:ext cx="4946904" cy="2409179"/>
+            <a:off x="804671" y="3237736"/>
+            <a:ext cx="4946904" cy="2888743"/>
           </a:xfrm>
           <a:prstGeom prst="rect">
             <a:avLst/>
@@ -11240,14 +10534,63 @@
       </p:sp>
       <p:sp>
         <p:nvSpPr>
-          <p:cNvPr id="13" name="Rectangle 12"/>
+          <p:cNvPr id="14" name="Rectangle 13"/>
           <p:cNvSpPr/>
           <p:nvPr/>
         </p:nvSpPr>
         <p:spPr>
           <a:xfrm>
-            <a:off x="640080" y="4329419"/>
-            <a:ext cx="1227582" cy="1888500"/>
+            <a:off x="6080760" y="1325880"/>
+            <a:ext cx="9144" cy="4892040"/>
+          </a:xfrm>
+          <a:prstGeom prst="rect">
+            <a:avLst/>
+          </a:prstGeom>
+          <a:solidFill>
+            <a:srgbClr val="E3E7EC"/>
+          </a:solidFill>
+          <a:ln>
+            <a:solidFill>
+              <a:srgbClr val="E3E7EC"/>
+            </a:solidFill>
+          </a:ln>
+        </p:spPr>
+        <p:style>
+          <a:lnRef idx="1">
+            <a:schemeClr val="accent1"/>
+          </a:lnRef>
+          <a:fillRef idx="3">
+            <a:schemeClr val="accent1"/>
+          </a:fillRef>
+          <a:effectRef idx="2">
+            <a:schemeClr val="accent1"/>
+          </a:effectRef>
+          <a:fontRef idx="minor">
+            <a:schemeClr val="lt1"/>
+          </a:fontRef>
+        </p:style>
+        <p:txBody>
+          <a:bodyPr rtlCol="0" anchor="ctr"/>
+          <a:lstStyle/>
+          <a:p>
+            <a:pPr algn="ctr">
+              <a:defRPr>
+                <a:latin typeface="Inter"/>
+              </a:defRPr>
+            </a:pPr>
+          </a:p>
+        </p:txBody>
+      </p:sp>
+      <p:sp>
+        <p:nvSpPr>
+          <p:cNvPr id="15" name="Rectangle 14"/>
+          <p:cNvSpPr/>
+          <p:nvPr/>
+        </p:nvSpPr>
+        <p:spPr>
+          <a:xfrm>
+            <a:off x="6309360" y="1325880"/>
+            <a:ext cx="1227582" cy="1883623"/>
           </a:xfrm>
           <a:prstGeom prst="rect">
             <a:avLst/>
@@ -11289,13 +10632,13 @@
       </p:sp>
       <p:sp>
         <p:nvSpPr>
-          <p:cNvPr id="14" name="Rectangle 13"/>
+          <p:cNvPr id="16" name="Rectangle 15"/>
           <p:cNvSpPr/>
           <p:nvPr/>
         </p:nvSpPr>
         <p:spPr>
           <a:xfrm>
-            <a:off x="640080" y="4329419"/>
+            <a:off x="6309360" y="1325880"/>
             <a:ext cx="1227582" cy="45720"/>
           </a:xfrm>
           <a:prstGeom prst="rect">
@@ -11338,13 +10681,13 @@
       </p:sp>
       <p:sp>
         <p:nvSpPr>
-          <p:cNvPr id="15" name="TextBox 14"/>
+          <p:cNvPr id="17" name="TextBox 16"/>
           <p:cNvSpPr txBox="1"/>
           <p:nvPr/>
         </p:nvSpPr>
         <p:spPr>
           <a:xfrm>
-            <a:off x="749808" y="4457435"/>
+            <a:off x="6419088" y="1453895"/>
             <a:ext cx="1008126" cy="201168"/>
           </a:xfrm>
           <a:prstGeom prst="rect">
@@ -11380,13 +10723,13 @@
       </p:sp>
       <p:sp>
         <p:nvSpPr>
-          <p:cNvPr id="16" name="TextBox 15"/>
+          <p:cNvPr id="18" name="TextBox 17"/>
           <p:cNvSpPr txBox="1"/>
           <p:nvPr/>
         </p:nvSpPr>
         <p:spPr>
           <a:xfrm>
-            <a:off x="749808" y="4713467"/>
+            <a:off x="6419088" y="1709928"/>
             <a:ext cx="1008126" cy="475488"/>
           </a:xfrm>
           <a:prstGeom prst="rect">
@@ -11422,13 +10765,13 @@
       </p:sp>
       <p:sp>
         <p:nvSpPr>
-          <p:cNvPr id="17" name="TextBox 16"/>
+          <p:cNvPr id="19" name="TextBox 18"/>
           <p:cNvSpPr txBox="1"/>
           <p:nvPr/>
         </p:nvSpPr>
         <p:spPr>
           <a:xfrm>
-            <a:off x="749808" y="5888735"/>
+            <a:off x="6419088" y="2880319"/>
             <a:ext cx="1008126" cy="228600"/>
           </a:xfrm>
           <a:prstGeom prst="rect">
@@ -11464,14 +10807,14 @@
       </p:sp>
       <p:sp>
         <p:nvSpPr>
-          <p:cNvPr id="18" name="Rectangle 17"/>
+          <p:cNvPr id="20" name="Rectangle 19"/>
           <p:cNvSpPr/>
           <p:nvPr/>
         </p:nvSpPr>
         <p:spPr>
           <a:xfrm>
-            <a:off x="1977389" y="4329419"/>
-            <a:ext cx="1227582" cy="1888500"/>
+            <a:off x="7646670" y="1325880"/>
+            <a:ext cx="1227582" cy="1883623"/>
           </a:xfrm>
           <a:prstGeom prst="rect">
             <a:avLst/>
@@ -11513,13 +10856,13 @@
       </p:sp>
       <p:sp>
         <p:nvSpPr>
-          <p:cNvPr id="19" name="Rectangle 18"/>
+          <p:cNvPr id="21" name="Rectangle 20"/>
           <p:cNvSpPr/>
           <p:nvPr/>
         </p:nvSpPr>
         <p:spPr>
           <a:xfrm>
-            <a:off x="1977389" y="4329419"/>
+            <a:off x="7646670" y="1325880"/>
             <a:ext cx="1227582" cy="45720"/>
           </a:xfrm>
           <a:prstGeom prst="rect">
@@ -11562,13 +10905,13 @@
       </p:sp>
       <p:sp>
         <p:nvSpPr>
-          <p:cNvPr id="20" name="TextBox 19"/>
+          <p:cNvPr id="22" name="TextBox 21"/>
           <p:cNvSpPr txBox="1"/>
           <p:nvPr/>
         </p:nvSpPr>
         <p:spPr>
           <a:xfrm>
-            <a:off x="2087117" y="4457435"/>
+            <a:off x="7756398" y="1453895"/>
             <a:ext cx="1008126" cy="201168"/>
           </a:xfrm>
           <a:prstGeom prst="rect">
@@ -11604,13 +10947,13 @@
       </p:sp>
       <p:sp>
         <p:nvSpPr>
-          <p:cNvPr id="21" name="TextBox 20"/>
+          <p:cNvPr id="23" name="TextBox 22"/>
           <p:cNvSpPr txBox="1"/>
           <p:nvPr/>
         </p:nvSpPr>
         <p:spPr>
           <a:xfrm>
-            <a:off x="2087117" y="4713467"/>
+            <a:off x="7756398" y="1709928"/>
             <a:ext cx="1008126" cy="475488"/>
           </a:xfrm>
           <a:prstGeom prst="rect">
@@ -11646,13 +10989,13 @@
       </p:sp>
       <p:sp>
         <p:nvSpPr>
-          <p:cNvPr id="22" name="TextBox 21"/>
+          <p:cNvPr id="24" name="TextBox 23"/>
           <p:cNvSpPr txBox="1"/>
           <p:nvPr/>
         </p:nvSpPr>
         <p:spPr>
           <a:xfrm>
-            <a:off x="2087117" y="5888735"/>
+            <a:off x="7756398" y="2880319"/>
             <a:ext cx="1008126" cy="228600"/>
           </a:xfrm>
           <a:prstGeom prst="rect">
@@ -11688,14 +11031,14 @@
       </p:sp>
       <p:sp>
         <p:nvSpPr>
-          <p:cNvPr id="23" name="Rectangle 22"/>
+          <p:cNvPr id="25" name="Rectangle 24"/>
           <p:cNvSpPr/>
           <p:nvPr/>
         </p:nvSpPr>
         <p:spPr>
           <a:xfrm>
-            <a:off x="3314700" y="4329419"/>
-            <a:ext cx="1227582" cy="1888500"/>
+            <a:off x="8983980" y="1325880"/>
+            <a:ext cx="1227582" cy="1883623"/>
           </a:xfrm>
           <a:prstGeom prst="rect">
             <a:avLst/>
@@ -11737,13 +11080,13 @@
       </p:sp>
       <p:sp>
         <p:nvSpPr>
-          <p:cNvPr id="24" name="Rectangle 23"/>
+          <p:cNvPr id="26" name="Rectangle 25"/>
           <p:cNvSpPr/>
           <p:nvPr/>
         </p:nvSpPr>
         <p:spPr>
           <a:xfrm>
-            <a:off x="3314700" y="4329419"/>
+            <a:off x="8983980" y="1325880"/>
             <a:ext cx="1227582" cy="45720"/>
           </a:xfrm>
           <a:prstGeom prst="rect">
@@ -11786,13 +11129,13 @@
       </p:sp>
       <p:sp>
         <p:nvSpPr>
-          <p:cNvPr id="25" name="TextBox 24"/>
+          <p:cNvPr id="27" name="TextBox 26"/>
           <p:cNvSpPr txBox="1"/>
           <p:nvPr/>
         </p:nvSpPr>
         <p:spPr>
           <a:xfrm>
-            <a:off x="3424428" y="4457435"/>
+            <a:off x="9093707" y="1453895"/>
             <a:ext cx="1008126" cy="201168"/>
           </a:xfrm>
           <a:prstGeom prst="rect">
@@ -11828,13 +11171,13 @@
       </p:sp>
       <p:sp>
         <p:nvSpPr>
-          <p:cNvPr id="26" name="TextBox 25"/>
+          <p:cNvPr id="28" name="TextBox 27"/>
           <p:cNvSpPr txBox="1"/>
           <p:nvPr/>
         </p:nvSpPr>
         <p:spPr>
           <a:xfrm>
-            <a:off x="3424428" y="4713467"/>
+            <a:off x="9093707" y="1709928"/>
             <a:ext cx="1008126" cy="475488"/>
           </a:xfrm>
           <a:prstGeom prst="rect">
@@ -11870,13 +11213,13 @@
       </p:sp>
       <p:sp>
         <p:nvSpPr>
-          <p:cNvPr id="27" name="TextBox 26"/>
+          <p:cNvPr id="29" name="TextBox 28"/>
           <p:cNvSpPr txBox="1"/>
           <p:nvPr/>
         </p:nvSpPr>
         <p:spPr>
           <a:xfrm>
-            <a:off x="3424428" y="5888735"/>
+            <a:off x="9093707" y="2880319"/>
             <a:ext cx="1008126" cy="228600"/>
           </a:xfrm>
           <a:prstGeom prst="rect">
@@ -11912,14 +11255,14 @@
       </p:sp>
       <p:sp>
         <p:nvSpPr>
-          <p:cNvPr id="28" name="Rectangle 27"/>
+          <p:cNvPr id="30" name="Rectangle 29"/>
           <p:cNvSpPr/>
           <p:nvPr/>
         </p:nvSpPr>
         <p:spPr>
           <a:xfrm>
-            <a:off x="4652009" y="4329419"/>
-            <a:ext cx="1227582" cy="1888500"/>
+            <a:off x="10321290" y="1325880"/>
+            <a:ext cx="1227582" cy="1883623"/>
           </a:xfrm>
           <a:prstGeom prst="rect">
             <a:avLst/>
@@ -11961,13 +11304,13 @@
       </p:sp>
       <p:sp>
         <p:nvSpPr>
-          <p:cNvPr id="29" name="Rectangle 28"/>
+          <p:cNvPr id="31" name="Rectangle 30"/>
           <p:cNvSpPr/>
           <p:nvPr/>
         </p:nvSpPr>
         <p:spPr>
           <a:xfrm>
-            <a:off x="4652009" y="4329419"/>
+            <a:off x="10321290" y="1325880"/>
             <a:ext cx="1227582" cy="45720"/>
           </a:xfrm>
           <a:prstGeom prst="rect">
@@ -12010,13 +11353,13 @@
       </p:sp>
       <p:sp>
         <p:nvSpPr>
-          <p:cNvPr id="30" name="TextBox 29"/>
+          <p:cNvPr id="32" name="TextBox 31"/>
           <p:cNvSpPr txBox="1"/>
           <p:nvPr/>
         </p:nvSpPr>
         <p:spPr>
           <a:xfrm>
-            <a:off x="4761738" y="4457435"/>
+            <a:off x="10431017" y="1453895"/>
             <a:ext cx="1008126" cy="201168"/>
           </a:xfrm>
           <a:prstGeom prst="rect">
@@ -12052,13 +11395,13 @@
       </p:sp>
       <p:sp>
         <p:nvSpPr>
-          <p:cNvPr id="31" name="TextBox 30"/>
+          <p:cNvPr id="33" name="TextBox 32"/>
           <p:cNvSpPr txBox="1"/>
           <p:nvPr/>
         </p:nvSpPr>
         <p:spPr>
           <a:xfrm>
-            <a:off x="4761738" y="4713467"/>
+            <a:off x="10431017" y="1709928"/>
             <a:ext cx="1008126" cy="475488"/>
           </a:xfrm>
           <a:prstGeom prst="rect">
@@ -12094,13 +11437,13 @@
       </p:sp>
       <p:sp>
         <p:nvSpPr>
-          <p:cNvPr id="32" name="TextBox 31"/>
+          <p:cNvPr id="34" name="TextBox 33"/>
           <p:cNvSpPr txBox="1"/>
           <p:nvPr/>
         </p:nvSpPr>
         <p:spPr>
           <a:xfrm>
-            <a:off x="4761738" y="5888735"/>
+            <a:off x="10431017" y="2880319"/>
             <a:ext cx="1008126" cy="228600"/>
           </a:xfrm>
           <a:prstGeom prst="rect">
@@ -12136,14 +11479,196 @@
       </p:sp>
       <p:sp>
         <p:nvSpPr>
-          <p:cNvPr id="33" name="Rectangle 32"/>
+          <p:cNvPr id="35" name="Rectangle 34"/>
           <p:cNvSpPr/>
           <p:nvPr/>
         </p:nvSpPr>
         <p:spPr>
           <a:xfrm>
-            <a:off x="6080760" y="1325880"/>
-            <a:ext cx="9144" cy="4892040"/>
+            <a:off x="6309360" y="3319231"/>
+            <a:ext cx="5239512" cy="2898688"/>
+          </a:xfrm>
+          <a:prstGeom prst="rect">
+            <a:avLst/>
+          </a:prstGeom>
+          <a:solidFill>
+            <a:srgbClr val="F5F7F9"/>
+          </a:solidFill>
+          <a:ln>
+            <a:solidFill>
+              <a:srgbClr val="E3E7EC"/>
+            </a:solidFill>
+          </a:ln>
+        </p:spPr>
+        <p:style>
+          <a:lnRef idx="1">
+            <a:schemeClr val="accent1"/>
+          </a:lnRef>
+          <a:fillRef idx="3">
+            <a:schemeClr val="accent1"/>
+          </a:fillRef>
+          <a:effectRef idx="2">
+            <a:schemeClr val="accent1"/>
+          </a:effectRef>
+          <a:fontRef idx="minor">
+            <a:schemeClr val="lt1"/>
+          </a:fontRef>
+        </p:style>
+        <p:txBody>
+          <a:bodyPr rtlCol="0" anchor="ctr"/>
+          <a:lstStyle/>
+          <a:p>
+            <a:pPr algn="ctr">
+              <a:defRPr>
+                <a:latin typeface="Inter"/>
+              </a:defRPr>
+            </a:pPr>
+          </a:p>
+        </p:txBody>
+      </p:sp>
+      <p:sp>
+        <p:nvSpPr>
+          <p:cNvPr id="36" name="Rectangle 35"/>
+          <p:cNvSpPr/>
+          <p:nvPr/>
+        </p:nvSpPr>
+        <p:spPr>
+          <a:xfrm>
+            <a:off x="6309360" y="3319231"/>
+            <a:ext cx="54864" cy="2898688"/>
+          </a:xfrm>
+          <a:prstGeom prst="rect">
+            <a:avLst/>
+          </a:prstGeom>
+          <a:solidFill>
+            <a:srgbClr val="F2A93B"/>
+          </a:solidFill>
+          <a:ln>
+            <a:solidFill>
+              <a:srgbClr val="F2A93B"/>
+            </a:solidFill>
+          </a:ln>
+        </p:spPr>
+        <p:style>
+          <a:lnRef idx="1">
+            <a:schemeClr val="accent1"/>
+          </a:lnRef>
+          <a:fillRef idx="3">
+            <a:schemeClr val="accent1"/>
+          </a:fillRef>
+          <a:effectRef idx="2">
+            <a:schemeClr val="accent1"/>
+          </a:effectRef>
+          <a:fontRef idx="minor">
+            <a:schemeClr val="lt1"/>
+          </a:fontRef>
+        </p:style>
+        <p:txBody>
+          <a:bodyPr rtlCol="0" anchor="ctr"/>
+          <a:lstStyle/>
+          <a:p>
+            <a:pPr algn="ctr">
+              <a:defRPr>
+                <a:latin typeface="Inter"/>
+              </a:defRPr>
+            </a:pPr>
+          </a:p>
+        </p:txBody>
+      </p:sp>
+      <p:sp>
+        <p:nvSpPr>
+          <p:cNvPr id="37" name="TextBox 36"/>
+          <p:cNvSpPr txBox="1"/>
+          <p:nvPr/>
+        </p:nvSpPr>
+        <p:spPr>
+          <a:xfrm>
+            <a:off x="6473952" y="3428959"/>
+            <a:ext cx="4946904" cy="228600"/>
+          </a:xfrm>
+          <a:prstGeom prst="rect">
+            <a:avLst/>
+          </a:prstGeom>
+          <a:noFill/>
+        </p:spPr>
+        <p:txBody>
+          <a:bodyPr wrap="none" lIns="9144" rIns="9144" tIns="9144" bIns="9144" anchor="t">
+            <a:spAutoFit/>
+          </a:bodyPr>
+          <a:lstStyle/>
+          <a:p>
+            <a:pPr algn="l">
+              <a:spcAft>
+                <a:spcPts val="0"/>
+              </a:spcAft>
+              <a:defRPr sz="1000" b="1">
+                <a:solidFill>
+                  <a:srgbClr val="0D1117"/>
+                </a:solidFill>
+                <a:latin typeface="Inter"/>
+              </a:defRPr>
+            </a:pPr>
+            <a:r>
+              <a:rPr>
+                <a:latin typeface="Inter"/>
+              </a:rPr>
+              <a:t>Unsupported block</a:t>
+            </a:r>
+          </a:p>
+        </p:txBody>
+      </p:sp>
+      <p:sp>
+        <p:nvSpPr>
+          <p:cNvPr id="38" name="TextBox 37"/>
+          <p:cNvSpPr txBox="1"/>
+          <p:nvPr/>
+        </p:nvSpPr>
+        <p:spPr>
+          <a:xfrm>
+            <a:off x="6473952" y="3712423"/>
+            <a:ext cx="4946904" cy="2414056"/>
+          </a:xfrm>
+          <a:prstGeom prst="rect">
+            <a:avLst/>
+          </a:prstGeom>
+          <a:noFill/>
+        </p:spPr>
+        <p:txBody>
+          <a:bodyPr wrap="none" lIns="9144" rIns="9144" tIns="9144" bIns="9144" anchor="t">
+            <a:spAutoFit/>
+          </a:bodyPr>
+          <a:lstStyle/>
+          <a:p>
+            <a:pPr algn="l">
+              <a:spcAft>
+                <a:spcPts val="0"/>
+              </a:spcAft>
+              <a:defRPr sz="950" b="0">
+                <a:solidFill>
+                  <a:srgbClr val="4A5563"/>
+                </a:solidFill>
+                <a:latin typeface="Inter"/>
+              </a:defRPr>
+            </a:pPr>
+            <a:r>
+              <a:rPr>
+                <a:latin typeface="Inter"/>
+              </a:rPr>
+              <a:t>Block type 'two_col' is not available in PowerPoint.</a:t>
+            </a:r>
+          </a:p>
+        </p:txBody>
+      </p:sp>
+      <p:sp>
+        <p:nvSpPr>
+          <p:cNvPr id="39" name="Rectangle 38"/>
+          <p:cNvSpPr/>
+          <p:nvPr/>
+        </p:nvSpPr>
+        <p:spPr>
+          <a:xfrm>
+            <a:off x="640080" y="6446520"/>
+            <a:ext cx="10908792" cy="9144"/>
           </a:xfrm>
           <a:prstGeom prst="rect">
             <a:avLst/>
@@ -12185,238 +11710,7 @@
       </p:sp>
       <p:sp>
         <p:nvSpPr>
-          <p:cNvPr id="34" name="Rectangle 33"/>
-          <p:cNvSpPr/>
-          <p:nvPr/>
-        </p:nvSpPr>
-        <p:spPr>
-          <a:xfrm>
-            <a:off x="6309360" y="1325880"/>
-            <a:ext cx="5239512" cy="4892040"/>
-          </a:xfrm>
-          <a:prstGeom prst="rect">
-            <a:avLst/>
-          </a:prstGeom>
-          <a:solidFill>
-            <a:srgbClr val="F5F7F9"/>
-          </a:solidFill>
-          <a:ln>
-            <a:solidFill>
-              <a:srgbClr val="E3E7EC"/>
-            </a:solidFill>
-          </a:ln>
-        </p:spPr>
-        <p:style>
-          <a:lnRef idx="1">
-            <a:schemeClr val="accent1"/>
-          </a:lnRef>
-          <a:fillRef idx="3">
-            <a:schemeClr val="accent1"/>
-          </a:fillRef>
-          <a:effectRef idx="2">
-            <a:schemeClr val="accent1"/>
-          </a:effectRef>
-          <a:fontRef idx="minor">
-            <a:schemeClr val="lt1"/>
-          </a:fontRef>
-        </p:style>
-        <p:txBody>
-          <a:bodyPr rtlCol="0" anchor="ctr"/>
-          <a:lstStyle/>
-          <a:p>
-            <a:pPr algn="ctr">
-              <a:defRPr>
-                <a:latin typeface="Inter"/>
-              </a:defRPr>
-            </a:pPr>
-          </a:p>
-        </p:txBody>
-      </p:sp>
-      <p:sp>
-        <p:nvSpPr>
-          <p:cNvPr id="35" name="Rectangle 34"/>
-          <p:cNvSpPr/>
-          <p:nvPr/>
-        </p:nvSpPr>
-        <p:spPr>
-          <a:xfrm>
-            <a:off x="6309360" y="1325880"/>
-            <a:ext cx="54864" cy="4892040"/>
-          </a:xfrm>
-          <a:prstGeom prst="rect">
-            <a:avLst/>
-          </a:prstGeom>
-          <a:solidFill>
-            <a:srgbClr val="F2A93B"/>
-          </a:solidFill>
-          <a:ln>
-            <a:solidFill>
-              <a:srgbClr val="F2A93B"/>
-            </a:solidFill>
-          </a:ln>
-        </p:spPr>
-        <p:style>
-          <a:lnRef idx="1">
-            <a:schemeClr val="accent1"/>
-          </a:lnRef>
-          <a:fillRef idx="3">
-            <a:schemeClr val="accent1"/>
-          </a:fillRef>
-          <a:effectRef idx="2">
-            <a:schemeClr val="accent1"/>
-          </a:effectRef>
-          <a:fontRef idx="minor">
-            <a:schemeClr val="lt1"/>
-          </a:fontRef>
-        </p:style>
-        <p:txBody>
-          <a:bodyPr rtlCol="0" anchor="ctr"/>
-          <a:lstStyle/>
-          <a:p>
-            <a:pPr algn="ctr">
-              <a:defRPr>
-                <a:latin typeface="Inter"/>
-              </a:defRPr>
-            </a:pPr>
-          </a:p>
-        </p:txBody>
-      </p:sp>
-      <p:sp>
-        <p:nvSpPr>
-          <p:cNvPr id="36" name="TextBox 35"/>
-          <p:cNvSpPr txBox="1"/>
-          <p:nvPr/>
-        </p:nvSpPr>
-        <p:spPr>
-          <a:xfrm>
-            <a:off x="6473952" y="1435607"/>
-            <a:ext cx="4946904" cy="228600"/>
-          </a:xfrm>
-          <a:prstGeom prst="rect">
-            <a:avLst/>
-          </a:prstGeom>
-          <a:noFill/>
-        </p:spPr>
-        <p:txBody>
-          <a:bodyPr wrap="none" lIns="9144" rIns="9144" tIns="9144" bIns="9144" anchor="t">
-            <a:spAutoFit/>
-          </a:bodyPr>
-          <a:lstStyle/>
-          <a:p>
-            <a:pPr algn="l">
-              <a:spcAft>
-                <a:spcPts val="0"/>
-              </a:spcAft>
-              <a:defRPr sz="1000" b="1">
-                <a:solidFill>
-                  <a:srgbClr val="0D1117"/>
-                </a:solidFill>
-                <a:latin typeface="Inter"/>
-              </a:defRPr>
-            </a:pPr>
-            <a:r>
-              <a:rPr>
-                <a:latin typeface="Inter"/>
-              </a:rPr>
-              <a:t>Unsupported block</a:t>
-            </a:r>
-          </a:p>
-        </p:txBody>
-      </p:sp>
-      <p:sp>
-        <p:nvSpPr>
-          <p:cNvPr id="37" name="TextBox 36"/>
-          <p:cNvSpPr txBox="1"/>
-          <p:nvPr/>
-        </p:nvSpPr>
-        <p:spPr>
-          <a:xfrm>
-            <a:off x="6473952" y="1719072"/>
-            <a:ext cx="4946904" cy="4407408"/>
-          </a:xfrm>
-          <a:prstGeom prst="rect">
-            <a:avLst/>
-          </a:prstGeom>
-          <a:noFill/>
-        </p:spPr>
-        <p:txBody>
-          <a:bodyPr wrap="none" lIns="9144" rIns="9144" tIns="9144" bIns="9144" anchor="t">
-            <a:spAutoFit/>
-          </a:bodyPr>
-          <a:lstStyle/>
-          <a:p>
-            <a:pPr algn="l">
-              <a:spcAft>
-                <a:spcPts val="0"/>
-              </a:spcAft>
-              <a:defRPr sz="950" b="0">
-                <a:solidFill>
-                  <a:srgbClr val="4A5563"/>
-                </a:solidFill>
-                <a:latin typeface="Inter"/>
-              </a:defRPr>
-            </a:pPr>
-            <a:r>
-              <a:rPr>
-                <a:latin typeface="Inter"/>
-              </a:rPr>
-              <a:t>Block type 'two_col' is not available in PowerPoint.</a:t>
-            </a:r>
-          </a:p>
-        </p:txBody>
-      </p:sp>
-      <p:sp>
-        <p:nvSpPr>
-          <p:cNvPr id="38" name="Rectangle 37"/>
-          <p:cNvSpPr/>
-          <p:nvPr/>
-        </p:nvSpPr>
-        <p:spPr>
-          <a:xfrm>
-            <a:off x="640080" y="6446520"/>
-            <a:ext cx="10908792" cy="9144"/>
-          </a:xfrm>
-          <a:prstGeom prst="rect">
-            <a:avLst/>
-          </a:prstGeom>
-          <a:solidFill>
-            <a:srgbClr val="E3E7EC"/>
-          </a:solidFill>
-          <a:ln>
-            <a:solidFill>
-              <a:srgbClr val="E3E7EC"/>
-            </a:solidFill>
-          </a:ln>
-        </p:spPr>
-        <p:style>
-          <a:lnRef idx="1">
-            <a:schemeClr val="accent1"/>
-          </a:lnRef>
-          <a:fillRef idx="3">
-            <a:schemeClr val="accent1"/>
-          </a:fillRef>
-          <a:effectRef idx="2">
-            <a:schemeClr val="accent1"/>
-          </a:effectRef>
-          <a:fontRef idx="minor">
-            <a:schemeClr val="lt1"/>
-          </a:fontRef>
-        </p:style>
-        <p:txBody>
-          <a:bodyPr rtlCol="0" anchor="ctr"/>
-          <a:lstStyle/>
-          <a:p>
-            <a:pPr algn="ctr">
-              <a:defRPr>
-                <a:latin typeface="Inter"/>
-              </a:defRPr>
-            </a:pPr>
-          </a:p>
-        </p:txBody>
-      </p:sp>
-      <p:sp>
-        <p:nvSpPr>
-          <p:cNvPr id="39" name="TextBox 38"/>
+          <p:cNvPr id="40" name="TextBox 39"/>
           <p:cNvSpPr txBox="1"/>
           <p:nvPr/>
         </p:nvSpPr>
@@ -12458,7 +11752,7 @@
       </p:sp>
       <p:sp>
         <p:nvSpPr>
-          <p:cNvPr id="40" name="TextBox 39"/>
+          <p:cNvPr id="41" name="TextBox 40"/>
           <p:cNvSpPr txBox="1"/>
           <p:nvPr/>
         </p:nvSpPr>
@@ -12500,7 +11794,7 @@
       </p:sp>
       <p:sp>
         <p:nvSpPr>
-          <p:cNvPr id="41" name="TextBox 40"/>
+          <p:cNvPr id="42" name="TextBox 41"/>
           <p:cNvSpPr txBox="1"/>
           <p:nvPr/>
         </p:nvSpPr>
@@ -12616,7 +11910,7 @@
         <p:spPr>
           <a:xfrm>
             <a:off x="640080" y="329184"/>
-            <a:ext cx="5303520" cy="182880"/>
+            <a:ext cx="9875520" cy="182880"/>
           </a:xfrm>
           <a:prstGeom prst="rect">
             <a:avLst/>
@@ -12657,48 +11951,6 @@
         </p:nvSpPr>
         <p:spPr>
           <a:xfrm>
-            <a:off x="5897880" y="310896"/>
-            <a:ext cx="4800600" cy="256032"/>
-          </a:xfrm>
-          <a:prstGeom prst="rect">
-            <a:avLst/>
-          </a:prstGeom>
-          <a:noFill/>
-        </p:spPr>
-        <p:txBody>
-          <a:bodyPr wrap="none" lIns="9144" rIns="9144" tIns="9144" bIns="9144" anchor="t">
-            <a:spAutoFit/>
-          </a:bodyPr>
-          <a:lstStyle/>
-          <a:p>
-            <a:pPr algn="r">
-              <a:spcAft>
-                <a:spcPts val="0"/>
-              </a:spcAft>
-              <a:defRPr sz="680" b="1">
-                <a:solidFill>
-                  <a:srgbClr val="4F6B00"/>
-                </a:solidFill>
-                <a:latin typeface="Inter"/>
-              </a:defRPr>
-            </a:pPr>
-            <a:r>
-              <a:rPr>
-                <a:latin typeface="Inter"/>
-              </a:rPr>
-              <a:t>Illustrative, Gradient Maintained — demo data, not the client's holdings or managers</a:t>
-            </a:r>
-          </a:p>
-        </p:txBody>
-      </p:sp>
-      <p:sp>
-        <p:nvSpPr>
-          <p:cNvPr id="5" name="TextBox 4"/>
-          <p:cNvSpPr txBox="1"/>
-          <p:nvPr/>
-        </p:nvSpPr>
-        <p:spPr>
-          <a:xfrm>
             <a:off x="640080" y="566928"/>
             <a:ext cx="10058400" cy="530352"/>
           </a:xfrm>
@@ -12735,7 +11987,7 @@
       </p:sp>
       <p:sp>
         <p:nvSpPr>
-          <p:cNvPr id="6" name="Rectangle 5"/>
+          <p:cNvPr id="5" name="Rectangle 4"/>
           <p:cNvSpPr/>
           <p:nvPr/>
         </p:nvSpPr>
@@ -12784,7 +12036,7 @@
       </p:sp>
       <p:sp>
         <p:nvSpPr>
-          <p:cNvPr id="7" name="Rectangle 6"/>
+          <p:cNvPr id="6" name="Rectangle 5"/>
           <p:cNvSpPr/>
           <p:nvPr/>
         </p:nvSpPr>
@@ -12833,7 +12085,7 @@
       </p:sp>
       <p:sp>
         <p:nvSpPr>
-          <p:cNvPr id="8" name="TextBox 7"/>
+          <p:cNvPr id="7" name="TextBox 6"/>
           <p:cNvSpPr txBox="1"/>
           <p:nvPr/>
         </p:nvSpPr>
@@ -12875,7 +12127,7 @@
       </p:sp>
       <p:sp>
         <p:nvSpPr>
-          <p:cNvPr id="9" name="Rectangle 8"/>
+          <p:cNvPr id="8" name="Rectangle 7"/>
           <p:cNvSpPr/>
           <p:nvPr/>
         </p:nvSpPr>
@@ -12924,7 +12176,7 @@
       </p:sp>
       <p:sp>
         <p:nvSpPr>
-          <p:cNvPr id="10" name="Rectangle 9"/>
+          <p:cNvPr id="9" name="Rectangle 8"/>
           <p:cNvSpPr/>
           <p:nvPr/>
         </p:nvSpPr>
@@ -12973,7 +12225,7 @@
       </p:sp>
       <p:sp>
         <p:nvSpPr>
-          <p:cNvPr id="11" name="TextBox 10"/>
+          <p:cNvPr id="10" name="TextBox 9"/>
           <p:cNvSpPr txBox="1"/>
           <p:nvPr/>
         </p:nvSpPr>
@@ -13008,14 +12260,14 @@
               <a:rPr>
                 <a:latin typeface="Inter"/>
               </a:rPr>
-              <a:t>Key judgment — headline signal</a:t>
+              <a:t>Key judgment — Discrepancies</a:t>
             </a:r>
           </a:p>
         </p:txBody>
       </p:sp>
       <p:sp>
         <p:nvSpPr>
-          <p:cNvPr id="12" name="TextBox 11"/>
+          <p:cNvPr id="11" name="TextBox 10"/>
           <p:cNvSpPr txBox="1"/>
           <p:nvPr/>
         </p:nvSpPr>
@@ -13050,14 +12302,14 @@
               <a:rPr>
                 <a:latin typeface="Inter"/>
               </a:rPr>
-              <a:t>Observation: The sample report carries a 4 discrepancies found signal [S1]. Why it matters: This signal focuses oversight on the report's most decision-relevant condition. Uncertainty: Evidence coverage may exclude newer or more detailed observations. What would change the view: A governed refresh showing a different signal or breached threshold.</a:t>
+              <a:t>Observation: Four DDQ answers conflict with the Form ADV and Schedule D filings [S1]. Why it matters: Each conflict needs a written explanation before the review can close. Uncertainty: Some differences may reflect timing between the DDQ and filing dates. What would change the view: Amended filings or DDQ answers that reconcile the figures.</a:t>
             </a:r>
           </a:p>
         </p:txBody>
       </p:sp>
       <p:sp>
         <p:nvSpPr>
-          <p:cNvPr id="13" name="Rectangle 12"/>
+          <p:cNvPr id="12" name="Rectangle 11"/>
           <p:cNvSpPr/>
           <p:nvPr/>
         </p:nvSpPr>
@@ -13106,7 +12358,7 @@
       </p:sp>
       <p:sp>
         <p:nvSpPr>
-          <p:cNvPr id="14" name="Rectangle 13"/>
+          <p:cNvPr id="13" name="Rectangle 12"/>
           <p:cNvSpPr/>
           <p:nvPr/>
         </p:nvSpPr>
@@ -13155,7 +12407,7 @@
       </p:sp>
       <p:sp>
         <p:nvSpPr>
-          <p:cNvPr id="15" name="TextBox 14"/>
+          <p:cNvPr id="14" name="TextBox 13"/>
           <p:cNvSpPr txBox="1"/>
           <p:nvPr/>
         </p:nvSpPr>
@@ -13190,14 +12442,14 @@
               <a:rPr>
                 <a:latin typeface="Inter"/>
               </a:rPr>
-              <a:t>Key judgment — primary measure</a:t>
+              <a:t>Key judgment — Contradicted claims</a:t>
             </a:r>
           </a:p>
         </p:txBody>
       </p:sp>
       <p:sp>
         <p:nvSpPr>
-          <p:cNvPr id="16" name="TextBox 15"/>
+          <p:cNvPr id="15" name="TextBox 14"/>
           <p:cNvSpPr txBox="1"/>
           <p:nvPr/>
         </p:nvSpPr>
@@ -13232,14 +12484,14 @@
               <a:rPr>
                 <a:latin typeface="Inter"/>
               </a:rPr>
-              <a:t>Observation: Contradicted is 4 in the review evidence [S2]. Why it matters: This measure establishes the baseline for comparing later governed results. Uncertainty: The source basis may omit newer observations outside the reviewed evidence. What would change the view: A refreshed source report showing a change above 1%.</a:t>
+              <a:t>Observation: Four claims are contradicted by the filings [S2]. Why it matters: These are the follow-up questions for the manager. Uncertainty: The filings are as of 2026-10-01. What would change the view: A newer filing that matches the DDQ.</a:t>
             </a:r>
           </a:p>
         </p:txBody>
       </p:sp>
       <p:sp>
         <p:nvSpPr>
-          <p:cNvPr id="17" name="Rectangle 16"/>
+          <p:cNvPr id="16" name="Rectangle 15"/>
           <p:cNvSpPr/>
           <p:nvPr/>
         </p:nvSpPr>
@@ -13288,7 +12540,7 @@
       </p:sp>
       <p:sp>
         <p:nvSpPr>
-          <p:cNvPr id="18" name="Rectangle 17"/>
+          <p:cNvPr id="17" name="Rectangle 16"/>
           <p:cNvSpPr/>
           <p:nvPr/>
         </p:nvSpPr>
@@ -13337,7 +12589,7 @@
       </p:sp>
       <p:sp>
         <p:nvSpPr>
-          <p:cNvPr id="19" name="TextBox 18"/>
+          <p:cNvPr id="18" name="TextBox 17"/>
           <p:cNvSpPr txBox="1"/>
           <p:nvPr/>
         </p:nvSpPr>
@@ -13372,14 +12624,14 @@
               <a:rPr>
                 <a:latin typeface="Inter"/>
               </a:rPr>
-              <a:t>Key judgment — monitoring priority</a:t>
+              <a:t>Key judgment — Coverage</a:t>
             </a:r>
           </a:p>
         </p:txBody>
       </p:sp>
       <p:sp>
         <p:nvSpPr>
-          <p:cNvPr id="20" name="TextBox 19"/>
+          <p:cNvPr id="19" name="TextBox 18"/>
           <p:cNvSpPr txBox="1"/>
           <p:nvPr/>
         </p:nvSpPr>
@@ -13414,14 +12666,14 @@
               <a:rPr>
                 <a:latin typeface="Inter"/>
               </a:rPr>
-              <a:t>Observation: Not checkable is 0 in the review evidence [S3]. Why it matters: This result determines which item receives priority in the next monitoring cycle. Uncertainty: Supporting coverage may omit later filings or corroborating detail. What would change the view: A new filing or report that resolves the item or changes it by 1%.</a:t>
+              <a:t>Observation: Every claim could be checked against a filing; none was left uncheckable [S3]. Why it matters: The reconciliation covers the full DDQ. Uncertainty: Checks rely on the filed values. What would change the view: A filing correction.</a:t>
             </a:r>
           </a:p>
         </p:txBody>
       </p:sp>
       <p:sp>
         <p:nvSpPr>
-          <p:cNvPr id="21" name="Rectangle 20"/>
+          <p:cNvPr id="20" name="Rectangle 19"/>
           <p:cNvSpPr/>
           <p:nvPr/>
         </p:nvSpPr>
@@ -13470,7 +12722,7 @@
       </p:sp>
       <p:sp>
         <p:nvSpPr>
-          <p:cNvPr id="22" name="TextBox 21"/>
+          <p:cNvPr id="21" name="TextBox 20"/>
           <p:cNvSpPr txBox="1"/>
           <p:nvPr/>
         </p:nvSpPr>
@@ -13512,7 +12764,7 @@
       </p:sp>
       <p:sp>
         <p:nvSpPr>
-          <p:cNvPr id="23" name="TextBox 22"/>
+          <p:cNvPr id="22" name="TextBox 21"/>
           <p:cNvSpPr txBox="1"/>
           <p:nvPr/>
         </p:nvSpPr>
@@ -13554,7 +12806,7 @@
       </p:sp>
       <p:sp>
         <p:nvSpPr>
-          <p:cNvPr id="24" name="TextBox 23"/>
+          <p:cNvPr id="23" name="TextBox 22"/>
           <p:cNvSpPr txBox="1"/>
           <p:nvPr/>
         </p:nvSpPr>
@@ -13670,7 +12922,7 @@
         <p:spPr>
           <a:xfrm>
             <a:off x="640080" y="329184"/>
-            <a:ext cx="5303520" cy="182880"/>
+            <a:ext cx="9875520" cy="182880"/>
           </a:xfrm>
           <a:prstGeom prst="rect">
             <a:avLst/>
@@ -13711,48 +12963,6 @@
         </p:nvSpPr>
         <p:spPr>
           <a:xfrm>
-            <a:off x="5897880" y="310896"/>
-            <a:ext cx="4800600" cy="256032"/>
-          </a:xfrm>
-          <a:prstGeom prst="rect">
-            <a:avLst/>
-          </a:prstGeom>
-          <a:noFill/>
-        </p:spPr>
-        <p:txBody>
-          <a:bodyPr wrap="none" lIns="9144" rIns="9144" tIns="9144" bIns="9144" anchor="t">
-            <a:spAutoFit/>
-          </a:bodyPr>
-          <a:lstStyle/>
-          <a:p>
-            <a:pPr algn="r">
-              <a:spcAft>
-                <a:spcPts val="0"/>
-              </a:spcAft>
-              <a:defRPr sz="680" b="1">
-                <a:solidFill>
-                  <a:srgbClr val="4F6B00"/>
-                </a:solidFill>
-                <a:latin typeface="Inter"/>
-              </a:defRPr>
-            </a:pPr>
-            <a:r>
-              <a:rPr>
-                <a:latin typeface="Inter"/>
-              </a:rPr>
-              <a:t>Illustrative, Gradient Maintained — demo data, not the client's holdings or managers</a:t>
-            </a:r>
-          </a:p>
-        </p:txBody>
-      </p:sp>
-      <p:sp>
-        <p:nvSpPr>
-          <p:cNvPr id="5" name="TextBox 4"/>
-          <p:cNvSpPr txBox="1"/>
-          <p:nvPr/>
-        </p:nvSpPr>
-        <p:spPr>
-          <a:xfrm>
             <a:off x="640080" y="566928"/>
             <a:ext cx="10058400" cy="530352"/>
           </a:xfrm>
@@ -13789,7 +12999,7 @@
       </p:sp>
       <p:sp>
         <p:nvSpPr>
-          <p:cNvPr id="6" name="Rectangle 5"/>
+          <p:cNvPr id="5" name="Rectangle 4"/>
           <p:cNvSpPr/>
           <p:nvPr/>
         </p:nvSpPr>
@@ -13838,7 +13048,7 @@
       </p:sp>
       <p:sp>
         <p:nvSpPr>
-          <p:cNvPr id="7" name="Rectangle 6"/>
+          <p:cNvPr id="6" name="Rectangle 5"/>
           <p:cNvSpPr/>
           <p:nvPr/>
         </p:nvSpPr>
@@ -13887,7 +13097,7 @@
       </p:sp>
       <p:sp>
         <p:nvSpPr>
-          <p:cNvPr id="8" name="TextBox 7"/>
+          <p:cNvPr id="7" name="TextBox 6"/>
           <p:cNvSpPr txBox="1"/>
           <p:nvPr/>
         </p:nvSpPr>
@@ -13929,7 +13139,7 @@
       </p:sp>
       <p:sp>
         <p:nvSpPr>
-          <p:cNvPr id="9" name="TextBox 8"/>
+          <p:cNvPr id="8" name="TextBox 7"/>
           <p:cNvSpPr txBox="1"/>
           <p:nvPr/>
         </p:nvSpPr>
@@ -13971,7 +13181,7 @@
       </p:sp>
       <p:graphicFrame>
         <p:nvGraphicFramePr>
-          <p:cNvPr id="10" name="Chart 9"/>
+          <p:cNvPr id="9" name="Chart 8"/>
           <p:cNvGraphicFramePr>
             <a:graphicFrameLocks noGrp="1"/>
           </p:cNvGraphicFramePr>
@@ -13989,7 +13199,7 @@
       </p:graphicFrame>
       <p:sp>
         <p:nvSpPr>
-          <p:cNvPr id="11" name="Rectangle 10"/>
+          <p:cNvPr id="10" name="Rectangle 9"/>
           <p:cNvSpPr/>
           <p:nvPr/>
         </p:nvSpPr>
@@ -14038,7 +13248,7 @@
       </p:sp>
       <p:sp>
         <p:nvSpPr>
-          <p:cNvPr id="12" name="TextBox 11"/>
+          <p:cNvPr id="11" name="TextBox 10"/>
           <p:cNvSpPr txBox="1"/>
           <p:nvPr/>
         </p:nvSpPr>
@@ -14080,7 +13290,7 @@
       </p:sp>
       <p:sp>
         <p:nvSpPr>
-          <p:cNvPr id="13" name="TextBox 12"/>
+          <p:cNvPr id="12" name="TextBox 11"/>
           <p:cNvSpPr txBox="1"/>
           <p:nvPr/>
         </p:nvSpPr>
@@ -14122,7 +13332,7 @@
       </p:sp>
       <p:sp>
         <p:nvSpPr>
-          <p:cNvPr id="14" name="TextBox 13"/>
+          <p:cNvPr id="13" name="TextBox 12"/>
           <p:cNvSpPr txBox="1"/>
           <p:nvPr/>
         </p:nvSpPr>
@@ -14238,7 +13448,7 @@
         <p:spPr>
           <a:xfrm>
             <a:off x="640080" y="329184"/>
-            <a:ext cx="5303520" cy="182880"/>
+            <a:ext cx="9875520" cy="182880"/>
           </a:xfrm>
           <a:prstGeom prst="rect">
             <a:avLst/>
@@ -14279,48 +13489,6 @@
         </p:nvSpPr>
         <p:spPr>
           <a:xfrm>
-            <a:off x="5897880" y="310896"/>
-            <a:ext cx="4800600" cy="256032"/>
-          </a:xfrm>
-          <a:prstGeom prst="rect">
-            <a:avLst/>
-          </a:prstGeom>
-          <a:noFill/>
-        </p:spPr>
-        <p:txBody>
-          <a:bodyPr wrap="none" lIns="9144" rIns="9144" tIns="9144" bIns="9144" anchor="t">
-            <a:spAutoFit/>
-          </a:bodyPr>
-          <a:lstStyle/>
-          <a:p>
-            <a:pPr algn="r">
-              <a:spcAft>
-                <a:spcPts val="0"/>
-              </a:spcAft>
-              <a:defRPr sz="680" b="1">
-                <a:solidFill>
-                  <a:srgbClr val="4F6B00"/>
-                </a:solidFill>
-                <a:latin typeface="Inter"/>
-              </a:defRPr>
-            </a:pPr>
-            <a:r>
-              <a:rPr>
-                <a:latin typeface="Inter"/>
-              </a:rPr>
-              <a:t>Illustrative, Gradient Maintained — demo data, not the client's holdings or managers</a:t>
-            </a:r>
-          </a:p>
-        </p:txBody>
-      </p:sp>
-      <p:sp>
-        <p:nvSpPr>
-          <p:cNvPr id="5" name="TextBox 4"/>
-          <p:cNvSpPr txBox="1"/>
-          <p:nvPr/>
-        </p:nvSpPr>
-        <p:spPr>
-          <a:xfrm>
             <a:off x="640080" y="566928"/>
             <a:ext cx="10058400" cy="530352"/>
           </a:xfrm>
@@ -14357,7 +13525,7 @@
       </p:sp>
       <p:sp>
         <p:nvSpPr>
-          <p:cNvPr id="6" name="Rectangle 5"/>
+          <p:cNvPr id="5" name="Rectangle 4"/>
           <p:cNvSpPr/>
           <p:nvPr/>
         </p:nvSpPr>
@@ -14406,7 +13574,7 @@
       </p:sp>
       <p:sp>
         <p:nvSpPr>
-          <p:cNvPr id="7" name="Rectangle 6"/>
+          <p:cNvPr id="6" name="Rectangle 5"/>
           <p:cNvSpPr/>
           <p:nvPr/>
         </p:nvSpPr>
@@ -14455,7 +13623,7 @@
       </p:sp>
       <p:sp>
         <p:nvSpPr>
-          <p:cNvPr id="8" name="TextBox 7"/>
+          <p:cNvPr id="7" name="TextBox 6"/>
           <p:cNvSpPr txBox="1"/>
           <p:nvPr/>
         </p:nvSpPr>
@@ -14497,7 +13665,7 @@
       </p:sp>
       <p:graphicFrame>
         <p:nvGraphicFramePr>
-          <p:cNvPr id="9" name="Table 8"/>
+          <p:cNvPr id="8" name="Table 7"/>
           <p:cNvGraphicFramePr>
             <a:graphicFrameLocks noGrp="1"/>
           </p:cNvGraphicFramePr>
@@ -14619,7 +13787,7 @@
                         <a:rPr>
                           <a:latin typeface="Inter"/>
                         </a:rPr>
-                        <a:t>● HIGH</a:t>
+                        <a:t>● High</a:t>
                       </a:r>
                     </a:p>
                   </a:txBody>
@@ -14702,7 +13870,7 @@
                         <a:rPr>
                           <a:latin typeface="Inter"/>
                         </a:rPr>
-                        <a:t>● MEDIUM</a:t>
+                        <a:t>● Medium</a:t>
                       </a:r>
                     </a:p>
                   </a:txBody>
@@ -14785,7 +13953,7 @@
                         <a:rPr>
                           <a:latin typeface="Inter"/>
                         </a:rPr>
-                        <a:t>● MEDIUM</a:t>
+                        <a:t>● Medium</a:t>
                       </a:r>
                     </a:p>
                   </a:txBody>
@@ -14868,7 +14036,7 @@
                         <a:rPr>
                           <a:latin typeface="Inter"/>
                         </a:rPr>
-                        <a:t>● MEDIUM</a:t>
+                        <a:t>● Medium</a:t>
                       </a:r>
                     </a:p>
                   </a:txBody>
@@ -14951,7 +14119,7 @@
                         <a:rPr>
                           <a:latin typeface="Inter"/>
                         </a:rPr>
-                        <a:t>● LOW</a:t>
+                        <a:t>● Low</a:t>
                       </a:r>
                     </a:p>
                   </a:txBody>
@@ -15022,7 +14190,7 @@
       </p:graphicFrame>
       <p:sp>
         <p:nvSpPr>
-          <p:cNvPr id="10" name="Rectangle 9"/>
+          <p:cNvPr id="9" name="Rectangle 8"/>
           <p:cNvSpPr/>
           <p:nvPr/>
         </p:nvSpPr>
@@ -15071,7 +14239,7 @@
       </p:sp>
       <p:sp>
         <p:nvSpPr>
-          <p:cNvPr id="11" name="Rectangle 10"/>
+          <p:cNvPr id="10" name="Rectangle 9"/>
           <p:cNvSpPr/>
           <p:nvPr/>
         </p:nvSpPr>
@@ -15120,7 +14288,7 @@
       </p:sp>
       <p:sp>
         <p:nvSpPr>
-          <p:cNvPr id="12" name="TextBox 11"/>
+          <p:cNvPr id="11" name="TextBox 10"/>
           <p:cNvSpPr txBox="1"/>
           <p:nvPr/>
         </p:nvSpPr>
@@ -15162,7 +14330,7 @@
       </p:sp>
       <p:sp>
         <p:nvSpPr>
-          <p:cNvPr id="13" name="TextBox 12"/>
+          <p:cNvPr id="12" name="TextBox 11"/>
           <p:cNvSpPr txBox="1"/>
           <p:nvPr/>
         </p:nvSpPr>
@@ -15204,7 +14372,7 @@
       </p:sp>
       <p:sp>
         <p:nvSpPr>
-          <p:cNvPr id="14" name="Rectangle 13"/>
+          <p:cNvPr id="13" name="Rectangle 12"/>
           <p:cNvSpPr/>
           <p:nvPr/>
         </p:nvSpPr>
@@ -15253,7 +14421,7 @@
       </p:sp>
       <p:sp>
         <p:nvSpPr>
-          <p:cNvPr id="15" name="TextBox 14"/>
+          <p:cNvPr id="14" name="TextBox 13"/>
           <p:cNvSpPr txBox="1"/>
           <p:nvPr/>
         </p:nvSpPr>
@@ -15295,7 +14463,7 @@
       </p:sp>
       <p:sp>
         <p:nvSpPr>
-          <p:cNvPr id="16" name="TextBox 15"/>
+          <p:cNvPr id="15" name="TextBox 14"/>
           <p:cNvSpPr txBox="1"/>
           <p:nvPr/>
         </p:nvSpPr>
@@ -15337,7 +14505,7 @@
       </p:sp>
       <p:sp>
         <p:nvSpPr>
-          <p:cNvPr id="17" name="TextBox 16"/>
+          <p:cNvPr id="16" name="TextBox 15"/>
           <p:cNvSpPr txBox="1"/>
           <p:nvPr/>
         </p:nvSpPr>
@@ -15453,7 +14621,7 @@
         <p:spPr>
           <a:xfrm>
             <a:off x="640080" y="329184"/>
-            <a:ext cx="5303520" cy="182880"/>
+            <a:ext cx="9875520" cy="182880"/>
           </a:xfrm>
           <a:prstGeom prst="rect">
             <a:avLst/>
@@ -15494,48 +14662,6 @@
         </p:nvSpPr>
         <p:spPr>
           <a:xfrm>
-            <a:off x="5897880" y="310896"/>
-            <a:ext cx="4800600" cy="256032"/>
-          </a:xfrm>
-          <a:prstGeom prst="rect">
-            <a:avLst/>
-          </a:prstGeom>
-          <a:noFill/>
-        </p:spPr>
-        <p:txBody>
-          <a:bodyPr wrap="none" lIns="9144" rIns="9144" tIns="9144" bIns="9144" anchor="t">
-            <a:spAutoFit/>
-          </a:bodyPr>
-          <a:lstStyle/>
-          <a:p>
-            <a:pPr algn="r">
-              <a:spcAft>
-                <a:spcPts val="0"/>
-              </a:spcAft>
-              <a:defRPr sz="680" b="1">
-                <a:solidFill>
-                  <a:srgbClr val="4F6B00"/>
-                </a:solidFill>
-                <a:latin typeface="Inter"/>
-              </a:defRPr>
-            </a:pPr>
-            <a:r>
-              <a:rPr>
-                <a:latin typeface="Inter"/>
-              </a:rPr>
-              <a:t>Illustrative, Gradient Maintained — demo data, not the client's holdings or managers</a:t>
-            </a:r>
-          </a:p>
-        </p:txBody>
-      </p:sp>
-      <p:sp>
-        <p:nvSpPr>
-          <p:cNvPr id="5" name="TextBox 4"/>
-          <p:cNvSpPr txBox="1"/>
-          <p:nvPr/>
-        </p:nvSpPr>
-        <p:spPr>
-          <a:xfrm>
             <a:off x="640080" y="566928"/>
             <a:ext cx="10058400" cy="530352"/>
           </a:xfrm>
@@ -15572,7 +14698,7 @@
       </p:sp>
       <p:sp>
         <p:nvSpPr>
-          <p:cNvPr id="6" name="Rectangle 5"/>
+          <p:cNvPr id="5" name="Rectangle 4"/>
           <p:cNvSpPr/>
           <p:nvPr/>
         </p:nvSpPr>
@@ -15621,7 +14747,7 @@
       </p:sp>
       <p:sp>
         <p:nvSpPr>
-          <p:cNvPr id="7" name="Rectangle 6"/>
+          <p:cNvPr id="6" name="Rectangle 5"/>
           <p:cNvSpPr/>
           <p:nvPr/>
         </p:nvSpPr>
@@ -15670,7 +14796,7 @@
       </p:sp>
       <p:sp>
         <p:nvSpPr>
-          <p:cNvPr id="8" name="TextBox 7"/>
+          <p:cNvPr id="7" name="TextBox 6"/>
           <p:cNvSpPr txBox="1"/>
           <p:nvPr/>
         </p:nvSpPr>
@@ -15712,7 +14838,7 @@
       </p:sp>
       <p:sp>
         <p:nvSpPr>
-          <p:cNvPr id="9" name="TextBox 8"/>
+          <p:cNvPr id="8" name="TextBox 7"/>
           <p:cNvSpPr txBox="1"/>
           <p:nvPr/>
         </p:nvSpPr>
@@ -15806,7 +14932,7 @@
               <a:rPr>
                 <a:latin typeface="Inter"/>
               </a:rPr>
-              <a:t>      Governed gap of 105 [S1]</a:t>
+              <a:t>      Gap of 105 [S1]</a:t>
             </a:r>
           </a:p>
           <a:p>
@@ -15865,7 +14991,7 @@
       </p:sp>
       <p:sp>
         <p:nvSpPr>
-          <p:cNvPr id="10" name="Rectangle 9"/>
+          <p:cNvPr id="9" name="Rectangle 8"/>
           <p:cNvSpPr/>
           <p:nvPr/>
         </p:nvSpPr>
@@ -15914,7 +15040,7 @@
       </p:sp>
       <p:sp>
         <p:nvSpPr>
-          <p:cNvPr id="11" name="TextBox 10"/>
+          <p:cNvPr id="10" name="TextBox 9"/>
           <p:cNvSpPr txBox="1"/>
           <p:nvPr/>
         </p:nvSpPr>
@@ -15956,7 +15082,7 @@
       </p:sp>
       <p:sp>
         <p:nvSpPr>
-          <p:cNvPr id="12" name="TextBox 11"/>
+          <p:cNvPr id="11" name="TextBox 10"/>
           <p:cNvSpPr txBox="1"/>
           <p:nvPr/>
         </p:nvSpPr>
@@ -15998,7 +15124,7 @@
       </p:sp>
       <p:sp>
         <p:nvSpPr>
-          <p:cNvPr id="13" name="TextBox 12"/>
+          <p:cNvPr id="12" name="TextBox 11"/>
           <p:cNvSpPr txBox="1"/>
           <p:nvPr/>
         </p:nvSpPr>
@@ -16114,7 +15240,7 @@
         <p:spPr>
           <a:xfrm>
             <a:off x="640080" y="329184"/>
-            <a:ext cx="5303520" cy="182880"/>
+            <a:ext cx="9875520" cy="182880"/>
           </a:xfrm>
           <a:prstGeom prst="rect">
             <a:avLst/>
@@ -16155,48 +15281,6 @@
         </p:nvSpPr>
         <p:spPr>
           <a:xfrm>
-            <a:off x="5897880" y="310896"/>
-            <a:ext cx="4800600" cy="256032"/>
-          </a:xfrm>
-          <a:prstGeom prst="rect">
-            <a:avLst/>
-          </a:prstGeom>
-          <a:noFill/>
-        </p:spPr>
-        <p:txBody>
-          <a:bodyPr wrap="none" lIns="9144" rIns="9144" tIns="9144" bIns="9144" anchor="t">
-            <a:spAutoFit/>
-          </a:bodyPr>
-          <a:lstStyle/>
-          <a:p>
-            <a:pPr algn="r">
-              <a:spcAft>
-                <a:spcPts val="0"/>
-              </a:spcAft>
-              <a:defRPr sz="680" b="1">
-                <a:solidFill>
-                  <a:srgbClr val="4F6B00"/>
-                </a:solidFill>
-                <a:latin typeface="Inter"/>
-              </a:defRPr>
-            </a:pPr>
-            <a:r>
-              <a:rPr>
-                <a:latin typeface="Inter"/>
-              </a:rPr>
-              <a:t>Illustrative, Gradient Maintained — demo data, not the client's holdings or managers</a:t>
-            </a:r>
-          </a:p>
-        </p:txBody>
-      </p:sp>
-      <p:sp>
-        <p:nvSpPr>
-          <p:cNvPr id="5" name="TextBox 4"/>
-          <p:cNvSpPr txBox="1"/>
-          <p:nvPr/>
-        </p:nvSpPr>
-        <p:spPr>
-          <a:xfrm>
             <a:off x="640080" y="566928"/>
             <a:ext cx="10058400" cy="530352"/>
           </a:xfrm>
@@ -16233,7 +15317,7 @@
       </p:sp>
       <p:sp>
         <p:nvSpPr>
-          <p:cNvPr id="6" name="Rectangle 5"/>
+          <p:cNvPr id="5" name="Rectangle 4"/>
           <p:cNvSpPr/>
           <p:nvPr/>
         </p:nvSpPr>
@@ -16282,7 +15366,7 @@
       </p:sp>
       <p:sp>
         <p:nvSpPr>
-          <p:cNvPr id="7" name="Rectangle 6"/>
+          <p:cNvPr id="6" name="Rectangle 5"/>
           <p:cNvSpPr/>
           <p:nvPr/>
         </p:nvSpPr>
@@ -16331,7 +15415,7 @@
       </p:sp>
       <p:sp>
         <p:nvSpPr>
-          <p:cNvPr id="8" name="TextBox 7"/>
+          <p:cNvPr id="7" name="TextBox 6"/>
           <p:cNvSpPr txBox="1"/>
           <p:nvPr/>
         </p:nvSpPr>
@@ -16373,7 +15457,7 @@
       </p:sp>
       <p:sp>
         <p:nvSpPr>
-          <p:cNvPr id="9" name="TextBox 8"/>
+          <p:cNvPr id="8" name="TextBox 7"/>
           <p:cNvSpPr txBox="1"/>
           <p:nvPr/>
         </p:nvSpPr>
@@ -16415,7 +15499,7 @@
       </p:sp>
       <p:graphicFrame>
         <p:nvGraphicFramePr>
-          <p:cNvPr id="10" name="Table 9"/>
+          <p:cNvPr id="9" name="Table 8"/>
           <p:cNvGraphicFramePr>
             <a:graphicFrameLocks noGrp="1"/>
           </p:cNvGraphicFramePr>
@@ -16986,7 +16070,7 @@
       </p:graphicFrame>
       <p:sp>
         <p:nvSpPr>
-          <p:cNvPr id="11" name="Rectangle 10"/>
+          <p:cNvPr id="10" name="Rectangle 9"/>
           <p:cNvSpPr/>
           <p:nvPr/>
         </p:nvSpPr>
@@ -17035,7 +16119,7 @@
       </p:sp>
       <p:sp>
         <p:nvSpPr>
-          <p:cNvPr id="12" name="Rectangle 11"/>
+          <p:cNvPr id="11" name="Rectangle 10"/>
           <p:cNvSpPr/>
           <p:nvPr/>
         </p:nvSpPr>
@@ -17084,7 +16168,7 @@
       </p:sp>
       <p:sp>
         <p:nvSpPr>
-          <p:cNvPr id="13" name="TextBox 12"/>
+          <p:cNvPr id="12" name="TextBox 11"/>
           <p:cNvSpPr txBox="1"/>
           <p:nvPr/>
         </p:nvSpPr>
@@ -17126,7 +16210,7 @@
       </p:sp>
       <p:sp>
         <p:nvSpPr>
-          <p:cNvPr id="14" name="TextBox 13"/>
+          <p:cNvPr id="13" name="TextBox 12"/>
           <p:cNvSpPr txBox="1"/>
           <p:nvPr/>
         </p:nvSpPr>
@@ -17168,7 +16252,7 @@
       </p:sp>
       <p:sp>
         <p:nvSpPr>
-          <p:cNvPr id="15" name="Rectangle 14"/>
+          <p:cNvPr id="14" name="Rectangle 13"/>
           <p:cNvSpPr/>
           <p:nvPr/>
         </p:nvSpPr>
@@ -17217,7 +16301,7 @@
       </p:sp>
       <p:sp>
         <p:nvSpPr>
-          <p:cNvPr id="16" name="TextBox 15"/>
+          <p:cNvPr id="15" name="TextBox 14"/>
           <p:cNvSpPr txBox="1"/>
           <p:nvPr/>
         </p:nvSpPr>
@@ -17259,7 +16343,7 @@
       </p:sp>
       <p:sp>
         <p:nvSpPr>
-          <p:cNvPr id="17" name="TextBox 16"/>
+          <p:cNvPr id="16" name="TextBox 15"/>
           <p:cNvSpPr txBox="1"/>
           <p:nvPr/>
         </p:nvSpPr>
@@ -17301,7 +16385,7 @@
       </p:sp>
       <p:sp>
         <p:nvSpPr>
-          <p:cNvPr id="18" name="TextBox 17"/>
+          <p:cNvPr id="17" name="TextBox 16"/>
           <p:cNvSpPr txBox="1"/>
           <p:nvPr/>
         </p:nvSpPr>
@@ -17417,7 +16501,7 @@
         <p:spPr>
           <a:xfrm>
             <a:off x="640080" y="329184"/>
-            <a:ext cx="5303520" cy="182880"/>
+            <a:ext cx="9875520" cy="182880"/>
           </a:xfrm>
           <a:prstGeom prst="rect">
             <a:avLst/>
@@ -17458,48 +16542,6 @@
         </p:nvSpPr>
         <p:spPr>
           <a:xfrm>
-            <a:off x="5897880" y="310896"/>
-            <a:ext cx="4800600" cy="256032"/>
-          </a:xfrm>
-          <a:prstGeom prst="rect">
-            <a:avLst/>
-          </a:prstGeom>
-          <a:noFill/>
-        </p:spPr>
-        <p:txBody>
-          <a:bodyPr wrap="none" lIns="9144" rIns="9144" tIns="9144" bIns="9144" anchor="t">
-            <a:spAutoFit/>
-          </a:bodyPr>
-          <a:lstStyle/>
-          <a:p>
-            <a:pPr algn="r">
-              <a:spcAft>
-                <a:spcPts val="0"/>
-              </a:spcAft>
-              <a:defRPr sz="680" b="1">
-                <a:solidFill>
-                  <a:srgbClr val="4F6B00"/>
-                </a:solidFill>
-                <a:latin typeface="Inter"/>
-              </a:defRPr>
-            </a:pPr>
-            <a:r>
-              <a:rPr>
-                <a:latin typeface="Inter"/>
-              </a:rPr>
-              <a:t>Illustrative, Gradient Maintained — demo data, not the client's holdings or managers</a:t>
-            </a:r>
-          </a:p>
-        </p:txBody>
-      </p:sp>
-      <p:sp>
-        <p:nvSpPr>
-          <p:cNvPr id="5" name="TextBox 4"/>
-          <p:cNvSpPr txBox="1"/>
-          <p:nvPr/>
-        </p:nvSpPr>
-        <p:spPr>
-          <a:xfrm>
             <a:off x="640080" y="566928"/>
             <a:ext cx="10058400" cy="530352"/>
           </a:xfrm>
@@ -17536,7 +16578,7 @@
       </p:sp>
       <p:sp>
         <p:nvSpPr>
-          <p:cNvPr id="6" name="Rectangle 5"/>
+          <p:cNvPr id="5" name="Rectangle 4"/>
           <p:cNvSpPr/>
           <p:nvPr/>
         </p:nvSpPr>
@@ -17585,7 +16627,7 @@
       </p:sp>
       <p:sp>
         <p:nvSpPr>
-          <p:cNvPr id="7" name="Rectangle 6"/>
+          <p:cNvPr id="6" name="Rectangle 5"/>
           <p:cNvSpPr/>
           <p:nvPr/>
         </p:nvSpPr>
@@ -17634,7 +16676,7 @@
       </p:sp>
       <p:sp>
         <p:nvSpPr>
-          <p:cNvPr id="8" name="TextBox 7"/>
+          <p:cNvPr id="7" name="TextBox 6"/>
           <p:cNvSpPr txBox="1"/>
           <p:nvPr/>
         </p:nvSpPr>
@@ -17676,7 +16718,7 @@
       </p:sp>
       <p:graphicFrame>
         <p:nvGraphicFramePr>
-          <p:cNvPr id="9" name="Table 8"/>
+          <p:cNvPr id="8" name="Table 7"/>
           <p:cNvGraphicFramePr>
             <a:graphicFrameLocks noGrp="1"/>
           </p:cNvGraphicFramePr>
@@ -17935,7 +16977,7 @@
                         <a:rPr>
                           <a:latin typeface="Inter"/>
                         </a:rPr>
-                        <a:t>● corroborated</a:t>
+                        <a:t>● Corroborated</a:t>
                       </a:r>
                     </a:p>
                   </a:txBody>
@@ -18072,7 +17114,7 @@
                         <a:rPr>
                           <a:latin typeface="Inter"/>
                         </a:rPr>
-                        <a:t>● corroborated</a:t>
+                        <a:t>● Corroborated</a:t>
                       </a:r>
                     </a:p>
                   </a:txBody>
@@ -18209,7 +17251,7 @@
                         <a:rPr>
                           <a:latin typeface="Inter"/>
                         </a:rPr>
-                        <a:t>● contradicted</a:t>
+                        <a:t>● Contradicted</a:t>
                       </a:r>
                     </a:p>
                   </a:txBody>
@@ -18346,7 +17388,7 @@
                         <a:rPr>
                           <a:latin typeface="Inter"/>
                         </a:rPr>
-                        <a:t>● corroborated</a:t>
+                        <a:t>● Corroborated</a:t>
                       </a:r>
                     </a:p>
                   </a:txBody>
@@ -18483,7 +17525,7 @@
                         <a:rPr>
                           <a:latin typeface="Inter"/>
                         </a:rPr>
-                        <a:t>● contradicted</a:t>
+                        <a:t>● Contradicted</a:t>
                       </a:r>
                     </a:p>
                   </a:txBody>
@@ -18620,7 +17662,7 @@
                         <a:rPr>
                           <a:latin typeface="Inter"/>
                         </a:rPr>
-                        <a:t>● corroborated</a:t>
+                        <a:t>● Corroborated</a:t>
                       </a:r>
                     </a:p>
                   </a:txBody>
@@ -18757,7 +17799,7 @@
                         <a:rPr>
                           <a:latin typeface="Inter"/>
                         </a:rPr>
-                        <a:t>● corroborated</a:t>
+                        <a:t>● Corroborated</a:t>
                       </a:r>
                     </a:p>
                   </a:txBody>
@@ -18894,7 +17936,7 @@
                         <a:rPr>
                           <a:latin typeface="Inter"/>
                         </a:rPr>
-                        <a:t>● corroborated</a:t>
+                        <a:t>● Corroborated</a:t>
                       </a:r>
                     </a:p>
                   </a:txBody>
@@ -18938,7 +17980,7 @@
       </p:graphicFrame>
       <p:sp>
         <p:nvSpPr>
-          <p:cNvPr id="10" name="TextBox 9"/>
+          <p:cNvPr id="9" name="TextBox 8"/>
           <p:cNvSpPr txBox="1"/>
           <p:nvPr/>
         </p:nvSpPr>
@@ -18980,7 +18022,7 @@
       </p:sp>
       <p:sp>
         <p:nvSpPr>
-          <p:cNvPr id="11" name="Rectangle 10"/>
+          <p:cNvPr id="10" name="Rectangle 9"/>
           <p:cNvSpPr/>
           <p:nvPr/>
         </p:nvSpPr>
@@ -19029,7 +18071,7 @@
       </p:sp>
       <p:sp>
         <p:nvSpPr>
-          <p:cNvPr id="12" name="TextBox 11"/>
+          <p:cNvPr id="11" name="TextBox 10"/>
           <p:cNvSpPr txBox="1"/>
           <p:nvPr/>
         </p:nvSpPr>
@@ -19071,7 +18113,7 @@
       </p:sp>
       <p:sp>
         <p:nvSpPr>
-          <p:cNvPr id="13" name="TextBox 12"/>
+          <p:cNvPr id="12" name="TextBox 11"/>
           <p:cNvSpPr txBox="1"/>
           <p:nvPr/>
         </p:nvSpPr>
@@ -19113,7 +18155,7 @@
       </p:sp>
       <p:sp>
         <p:nvSpPr>
-          <p:cNvPr id="14" name="TextBox 13"/>
+          <p:cNvPr id="13" name="TextBox 12"/>
           <p:cNvSpPr txBox="1"/>
           <p:nvPr/>
         </p:nvSpPr>
@@ -19229,7 +18271,7 @@
         <p:spPr>
           <a:xfrm>
             <a:off x="640080" y="329184"/>
-            <a:ext cx="5303520" cy="182880"/>
+            <a:ext cx="9875520" cy="182880"/>
           </a:xfrm>
           <a:prstGeom prst="rect">
             <a:avLst/>
@@ -19270,48 +18312,6 @@
         </p:nvSpPr>
         <p:spPr>
           <a:xfrm>
-            <a:off x="5897880" y="310896"/>
-            <a:ext cx="4800600" cy="256032"/>
-          </a:xfrm>
-          <a:prstGeom prst="rect">
-            <a:avLst/>
-          </a:prstGeom>
-          <a:noFill/>
-        </p:spPr>
-        <p:txBody>
-          <a:bodyPr wrap="none" lIns="9144" rIns="9144" tIns="9144" bIns="9144" anchor="t">
-            <a:spAutoFit/>
-          </a:bodyPr>
-          <a:lstStyle/>
-          <a:p>
-            <a:pPr algn="r">
-              <a:spcAft>
-                <a:spcPts val="0"/>
-              </a:spcAft>
-              <a:defRPr sz="680" b="1">
-                <a:solidFill>
-                  <a:srgbClr val="4F6B00"/>
-                </a:solidFill>
-                <a:latin typeface="Inter"/>
-              </a:defRPr>
-            </a:pPr>
-            <a:r>
-              <a:rPr>
-                <a:latin typeface="Inter"/>
-              </a:rPr>
-              <a:t>Illustrative, Gradient Maintained — demo data, not the client's holdings or managers</a:t>
-            </a:r>
-          </a:p>
-        </p:txBody>
-      </p:sp>
-      <p:sp>
-        <p:nvSpPr>
-          <p:cNvPr id="5" name="TextBox 4"/>
-          <p:cNvSpPr txBox="1"/>
-          <p:nvPr/>
-        </p:nvSpPr>
-        <p:spPr>
-          <a:xfrm>
             <a:off x="640080" y="566928"/>
             <a:ext cx="10058400" cy="530352"/>
           </a:xfrm>
@@ -19348,7 +18348,7 @@
       </p:sp>
       <p:sp>
         <p:nvSpPr>
-          <p:cNvPr id="6" name="Rectangle 5"/>
+          <p:cNvPr id="5" name="Rectangle 4"/>
           <p:cNvSpPr/>
           <p:nvPr/>
         </p:nvSpPr>
@@ -19397,7 +18397,7 @@
       </p:sp>
       <p:sp>
         <p:nvSpPr>
-          <p:cNvPr id="7" name="Rectangle 6"/>
+          <p:cNvPr id="6" name="Rectangle 5"/>
           <p:cNvSpPr/>
           <p:nvPr/>
         </p:nvSpPr>
@@ -19446,7 +18446,7 @@
       </p:sp>
       <p:sp>
         <p:nvSpPr>
-          <p:cNvPr id="8" name="TextBox 7"/>
+          <p:cNvPr id="7" name="TextBox 6"/>
           <p:cNvSpPr txBox="1"/>
           <p:nvPr/>
         </p:nvSpPr>
@@ -19488,7 +18488,7 @@
       </p:sp>
       <p:sp>
         <p:nvSpPr>
-          <p:cNvPr id="9" name="TextBox 8"/>
+          <p:cNvPr id="8" name="TextBox 7"/>
           <p:cNvSpPr txBox="1"/>
           <p:nvPr/>
         </p:nvSpPr>
@@ -19530,7 +18530,7 @@
       </p:sp>
       <p:graphicFrame>
         <p:nvGraphicFramePr>
-          <p:cNvPr id="10" name="Table 9"/>
+          <p:cNvPr id="9" name="Table 8"/>
           <p:cNvGraphicFramePr>
             <a:graphicFrameLocks noGrp="1"/>
           </p:cNvGraphicFramePr>
@@ -19827,7 +18827,7 @@
       </p:graphicFrame>
       <p:sp>
         <p:nvSpPr>
-          <p:cNvPr id="11" name="Rectangle 10"/>
+          <p:cNvPr id="10" name="Rectangle 9"/>
           <p:cNvSpPr/>
           <p:nvPr/>
         </p:nvSpPr>
@@ -19876,7 +18876,7 @@
       </p:sp>
       <p:sp>
         <p:nvSpPr>
-          <p:cNvPr id="12" name="Rectangle 11"/>
+          <p:cNvPr id="11" name="Rectangle 10"/>
           <p:cNvSpPr/>
           <p:nvPr/>
         </p:nvSpPr>
@@ -19925,7 +18925,7 @@
       </p:sp>
       <p:sp>
         <p:nvSpPr>
-          <p:cNvPr id="13" name="TextBox 12"/>
+          <p:cNvPr id="12" name="TextBox 11"/>
           <p:cNvSpPr txBox="1"/>
           <p:nvPr/>
         </p:nvSpPr>
@@ -19967,7 +18967,7 @@
       </p:sp>
       <p:sp>
         <p:nvSpPr>
-          <p:cNvPr id="14" name="TextBox 13"/>
+          <p:cNvPr id="13" name="TextBox 12"/>
           <p:cNvSpPr txBox="1"/>
           <p:nvPr/>
         </p:nvSpPr>
@@ -20002,14 +19002,14 @@
               <a:rPr>
                 <a:latin typeface="Inter"/>
               </a:rPr>
-              <a:t>Observation: The fund resolves only to pfid:805-5927286713, so its rows are analyst comparisons [S2]. Why it matters: Those comparisons are not governed reconciliation verdicts. Uncertainty: A canonical catalog…</a:t>
+              <a:t>Observation: The fund resolves only to pfid:805-5927286713, so its rows are analyst comparisons [S2]. Why it matters: Those comparisons are not Gradient reconciliation verdicts. Uncertainty: The fund is…</a:t>
             </a:r>
           </a:p>
         </p:txBody>
       </p:sp>
       <p:sp>
         <p:nvSpPr>
-          <p:cNvPr id="15" name="Rectangle 14"/>
+          <p:cNvPr id="14" name="Rectangle 13"/>
           <p:cNvSpPr/>
           <p:nvPr/>
         </p:nvSpPr>
@@ -20058,7 +19058,7 @@
       </p:sp>
       <p:sp>
         <p:nvSpPr>
-          <p:cNvPr id="16" name="TextBox 15"/>
+          <p:cNvPr id="15" name="TextBox 14"/>
           <p:cNvSpPr txBox="1"/>
           <p:nvPr/>
         </p:nvSpPr>
@@ -20100,7 +19100,7 @@
       </p:sp>
       <p:sp>
         <p:nvSpPr>
-          <p:cNvPr id="17" name="TextBox 16"/>
+          <p:cNvPr id="16" name="TextBox 15"/>
           <p:cNvSpPr txBox="1"/>
           <p:nvPr/>
         </p:nvSpPr>
@@ -20142,7 +19142,7 @@
       </p:sp>
       <p:sp>
         <p:nvSpPr>
-          <p:cNvPr id="18" name="TextBox 17"/>
+          <p:cNvPr id="17" name="TextBox 16"/>
           <p:cNvSpPr txBox="1"/>
           <p:nvPr/>
         </p:nvSpPr>
